--- a/展示文稿.pptx
+++ b/展示文稿.pptx
@@ -14,11 +14,13 @@
     <p:sldId id="258" r:id="rId7"/>
     <p:sldId id="259" r:id="rId8"/>
     <p:sldId id="262" r:id="rId9"/>
-    <p:sldId id="260" r:id="rId10"/>
-    <p:sldId id="263" r:id="rId11"/>
-    <p:sldId id="264" r:id="rId12"/>
-    <p:sldId id="266" r:id="rId13"/>
-    <p:sldId id="265" r:id="rId14"/>
+    <p:sldId id="267" r:id="rId10"/>
+    <p:sldId id="268" r:id="rId11"/>
+    <p:sldId id="260" r:id="rId12"/>
+    <p:sldId id="263" r:id="rId13"/>
+    <p:sldId id="264" r:id="rId14"/>
+    <p:sldId id="266" r:id="rId15"/>
+    <p:sldId id="265" r:id="rId16"/>
   </p:sldIdLst>
   <p:sldSz cx="12192000" cy="6858000"/>
   <p:notesSz cx="6858000" cy="9144000"/>
@@ -136,6 +138,15 @@
 </p:presentation>
 </file>
 
+<file path=ppt/commentAuthors.xml><?xml version="1.0" encoding="utf-8"?>
+<p:cmAuthorLst xmlns:a="http://schemas.openxmlformats.org/drawingml/2006/main" xmlns:r="http://schemas.openxmlformats.org/officeDocument/2006/relationships" xmlns:p="http://schemas.openxmlformats.org/presentationml/2006/main">
+  <p:cmAuthor id="1" name="79883" initials="7" lastIdx="0" clrIdx="0"/>
+  <p:cmAuthor id="2" name="作者" initials="A" lastIdx="0" clrIdx="1"/>
+  <p:cmAuthor id="3" name="xinfa" initials="x" lastIdx="0" clrIdx="2"/>
+  <p:cmAuthor id="4" name="rogers steve" initials="rs" lastIdx="0" clrIdx="3"/>
+</p:cmAuthorLst>
+</file>
+
 <file path=ppt/notesMasters/notesMaster1.xml><?xml version="1.0" encoding="utf-8"?>
 <p:notesMaster xmlns:a="http://schemas.openxmlformats.org/drawingml/2006/main" xmlns:r="http://schemas.openxmlformats.org/officeDocument/2006/relationships" xmlns:p="http://schemas.openxmlformats.org/presentationml/2006/main">
   <p:cSld>
@@ -610,62 +621,284 @@
               <a:rPr lang="zh-CN" altLang="en-US">
                 <a:sym typeface="+mn-ea"/>
               </a:rPr>
-              <a:t>接下来我们看媒体文件的最后一步，如何结束。由于</a:t>
-            </a:r>
-            <a:r>
-              <a:rPr lang="en-US" altLang="zh-CN">
-                <a:sym typeface="+mn-ea"/>
-              </a:rPr>
-              <a:t>ESDK</a:t>
-            </a:r>
-            <a:r>
-              <a:rPr lang="zh-CN" altLang="en-US">
-                <a:sym typeface="+mn-ea"/>
-              </a:rPr>
-              <a:t>好像并没有给出明确的结束函数，但是我们可以自己想一个，即：从收到图片开始我们就启动一个定时器开始计时，之后只要收到图片就刷新计时器，如果定时器结束那么就认为此次媒体分析文件任务结束。</a:t>
-            </a:r>
-            <a:r>
-              <a:rPr lang="en-US" altLang="zh-CN">
-                <a:sym typeface="+mn-ea"/>
-              </a:rPr>
-              <a:t>monitorThread_</a:t>
-            </a:r>
-            <a:r>
-              <a:rPr lang="zh-CN" altLang="en-US">
-                <a:sym typeface="+mn-ea"/>
-              </a:rPr>
-              <a:t>就是我们的监控线程，</a:t>
-            </a:r>
-            <a:r>
-              <a:rPr lang="en-US" altLang="zh-CN">
-                <a:sym typeface="+mn-ea"/>
-              </a:rPr>
-              <a:t>monitorLoop</a:t>
-            </a:r>
-            <a:r>
-              <a:rPr lang="zh-CN" altLang="en-US">
-                <a:sym typeface="+mn-ea"/>
-              </a:rPr>
-              <a:t>中会一直调用</a:t>
-            </a:r>
-            <a:r>
-              <a:rPr lang="en-US" altLang="zh-CN">
-                <a:sym typeface="+mn-ea"/>
-              </a:rPr>
-              <a:t>shouldComplete</a:t>
-            </a:r>
-            <a:r>
-              <a:rPr lang="zh-CN" altLang="en-US">
-                <a:sym typeface="+mn-ea"/>
-              </a:rPr>
-              <a:t>来判断定时器是否已经结束。任务结束后呢，推送消息，清理文件，</a:t>
-            </a:r>
-            <a:r>
-              <a:rPr lang="zh-CN" altLang="en-US">
-                <a:sym typeface="+mn-ea"/>
-              </a:rPr>
-              <a:t>恢复设置</a:t>
-            </a:r>
+              <a:t>我们收到图片之后是不是就要处理后送给检测模型分析了。那我们要如何送给检测模型呢？又如何调用检测模型检测呢？回想一下操作系统是不是学过一种生产者消费者的设计模式？我们现在这个情况是不是很适合生产者消费者模式？机场</a:t>
+            </a:r>
+            <a:r>
+              <a:rPr lang="en-US" altLang="zh-CN">
+                <a:sym typeface="+mn-ea"/>
+              </a:rPr>
+              <a:t>(</a:t>
+            </a:r>
+            <a:r>
+              <a:rPr lang="zh-CN" altLang="en-US">
+                <a:sym typeface="+mn-ea"/>
+              </a:rPr>
+              <a:t>生产者</a:t>
+            </a:r>
+            <a:r>
+              <a:rPr lang="en-US" altLang="zh-CN">
+                <a:sym typeface="+mn-ea"/>
+              </a:rPr>
+              <a:t>)</a:t>
+            </a:r>
+            <a:r>
+              <a:rPr lang="zh-CN" altLang="en-US">
+                <a:sym typeface="+mn-ea"/>
+              </a:rPr>
+              <a:t>会更新图片，检测模型</a:t>
+            </a:r>
+            <a:r>
+              <a:rPr lang="en-US" altLang="zh-CN">
+                <a:sym typeface="+mn-ea"/>
+              </a:rPr>
+              <a:t>(</a:t>
+            </a:r>
+            <a:r>
+              <a:rPr lang="zh-CN" altLang="en-US">
+                <a:sym typeface="+mn-ea"/>
+              </a:rPr>
+              <a:t>消费者</a:t>
+            </a:r>
+            <a:r>
+              <a:rPr lang="en-US" altLang="zh-CN">
+                <a:sym typeface="+mn-ea"/>
+              </a:rPr>
+              <a:t>)</a:t>
+            </a:r>
+            <a:r>
+              <a:rPr lang="zh-CN" altLang="en-US">
+                <a:sym typeface="+mn-ea"/>
+              </a:rPr>
+              <a:t>会拿走图片进行分析。我们来看看它们之间的交互具体是什么样的，首先是图片到来，</a:t>
+            </a:r>
+            <a:r>
+              <a:rPr lang="en-US" altLang="zh-CN">
+                <a:sym typeface="+mn-ea"/>
+              </a:rPr>
+              <a:t>observer</a:t>
+            </a:r>
+            <a:r>
+              <a:rPr lang="zh-CN" altLang="en-US">
+                <a:sym typeface="+mn-ea"/>
+              </a:rPr>
+              <a:t>中会调用</a:t>
+            </a:r>
+            <a:r>
+              <a:rPr lang="en-US" altLang="zh-CN">
+                <a:sym typeface="+mn-ea"/>
+              </a:rPr>
+              <a:t>onMediaFileUpdate</a:t>
+            </a:r>
+            <a:r>
+              <a:rPr lang="zh-CN" altLang="en-US">
+                <a:sym typeface="+mn-ea"/>
+              </a:rPr>
+              <a:t>，将文件放入队列，想想这里为什么会加锁？第一个原因呢是因为</a:t>
+            </a:r>
+            <a:r>
+              <a:rPr lang="en-US" altLang="zh-CN">
+                <a:sym typeface="+mn-ea"/>
+              </a:rPr>
+              <a:t>queue</a:t>
+            </a:r>
+            <a:r>
+              <a:rPr lang="zh-CN" altLang="en-US">
+                <a:sym typeface="+mn-ea"/>
+              </a:rPr>
+              <a:t>的</a:t>
+            </a:r>
+            <a:r>
+              <a:rPr lang="en-US" altLang="zh-CN">
+                <a:sym typeface="+mn-ea"/>
+              </a:rPr>
+              <a:t>push</a:t>
+            </a:r>
+            <a:r>
+              <a:rPr lang="zh-CN" altLang="en-US">
+                <a:sym typeface="+mn-ea"/>
+              </a:rPr>
+              <a:t>操作不是原子的，所以生产者在写队列的过程中如果消费者醒了去读队列可能会造成未定义行为导致崩坏；第二个原因则是可能不止一个生产者</a:t>
+            </a:r>
+            <a:r>
+              <a:rPr lang="en-US" altLang="zh-CN">
+                <a:sym typeface="+mn-ea"/>
+              </a:rPr>
+              <a:t>(</a:t>
+            </a:r>
+            <a:r>
+              <a:rPr lang="zh-CN" altLang="en-US">
+                <a:sym typeface="+mn-ea"/>
+              </a:rPr>
+              <a:t>当然我们的程序应该是只有一个生产者</a:t>
+            </a:r>
+            <a:r>
+              <a:rPr lang="en-US" altLang="zh-CN">
+                <a:sym typeface="+mn-ea"/>
+              </a:rPr>
+              <a:t>)</a:t>
+            </a:r>
+            <a:r>
+              <a:rPr lang="zh-CN" altLang="en-US">
+                <a:sym typeface="+mn-ea"/>
+              </a:rPr>
+              <a:t>，所以为了写的顺序也是要</a:t>
+            </a:r>
+            <a:r>
+              <a:rPr lang="zh-CN" altLang="en-US">
+                <a:sym typeface="+mn-ea"/>
+              </a:rPr>
+              <a:t>加锁的。</a:t>
+            </a:r>
+            <a:endParaRPr lang="zh-CN" altLang="en-US">
+              <a:sym typeface="+mn-ea"/>
+            </a:endParaRPr>
+          </a:p>
+          <a:p>
+            <a:pPr indent="457200"/>
+            <a:r>
+              <a:rPr lang="zh-CN" altLang="en-US">
+                <a:sym typeface="+mn-ea"/>
+              </a:rPr>
+              <a:t>我们再来看看消费者，暂停可以先不用管，多余内容。消费者会一直等待，直到等到队列非空或者是程序终止，队列非空后取出文件，开始处理。这里有没有发现一个问题，为什么生产者用的是</a:t>
+            </a:r>
+            <a:r>
+              <a:rPr lang="en-US" altLang="zh-CN">
+                <a:sym typeface="+mn-ea"/>
+              </a:rPr>
+              <a:t>lock_guard</a:t>
+            </a:r>
+            <a:r>
+              <a:rPr lang="zh-CN" altLang="en-US">
+                <a:sym typeface="+mn-ea"/>
+              </a:rPr>
+              <a:t>，而消费者用的是</a:t>
+            </a:r>
+            <a:r>
+              <a:rPr lang="en-US" altLang="zh-CN">
+                <a:sym typeface="+mn-ea"/>
+              </a:rPr>
+              <a:t>unique_lock</a:t>
+            </a:r>
+            <a:r>
+              <a:rPr lang="zh-CN" altLang="en-US">
+                <a:sym typeface="+mn-ea"/>
+              </a:rPr>
+              <a:t>？这俩有什么</a:t>
+            </a:r>
+            <a:r>
+              <a:rPr lang="zh-CN" altLang="en-US">
+                <a:sym typeface="+mn-ea"/>
+              </a:rPr>
+              <a:t>区别？</a:t>
+            </a:r>
+            <a:endParaRPr lang="zh-CN" altLang="en-US">
+              <a:sym typeface="+mn-ea"/>
+            </a:endParaRPr>
+          </a:p>
+          <a:p>
+            <a:pPr indent="457200"/>
+            <a:r>
+              <a:rPr lang="en-US" altLang="zh-CN">
+                <a:sym typeface="+mn-ea"/>
+              </a:rPr>
+              <a:t>lock_guard</a:t>
+            </a:r>
+            <a:r>
+              <a:rPr lang="zh-CN" altLang="en-US">
+                <a:sym typeface="+mn-ea"/>
+              </a:rPr>
+              <a:t>只在作用域生效，进入作用域加锁，离开作用域上锁。</a:t>
+            </a:r>
+            <a:r>
+              <a:rPr lang="en-US" altLang="zh-CN">
+                <a:sym typeface="+mn-ea"/>
+              </a:rPr>
+              <a:t>unique_lock</a:t>
+            </a:r>
+            <a:r>
+              <a:rPr lang="zh-CN" altLang="en-US">
+                <a:sym typeface="+mn-ea"/>
+              </a:rPr>
+              <a:t>则需要自己手动加锁解锁。</a:t>
+            </a:r>
+            <a:r>
+              <a:rPr lang="en-US" altLang="zh-CN">
+                <a:sym typeface="+mn-ea"/>
+              </a:rPr>
+              <a:t>condition_variable</a:t>
+            </a:r>
+            <a:r>
+              <a:rPr lang="zh-CN" altLang="en-US">
+                <a:sym typeface="+mn-ea"/>
+              </a:rPr>
+              <a:t>条件变量的作用就是生产者通知</a:t>
+            </a:r>
+            <a:r>
+              <a:rPr lang="en-US" altLang="zh-CN">
+                <a:sym typeface="+mn-ea"/>
+              </a:rPr>
+              <a:t>(notify)</a:t>
+            </a:r>
+            <a:r>
+              <a:rPr lang="zh-CN" altLang="en-US">
+                <a:sym typeface="+mn-ea"/>
+              </a:rPr>
+              <a:t>，消费者等待</a:t>
+            </a:r>
+            <a:r>
+              <a:rPr lang="en-US" altLang="zh-CN">
+                <a:sym typeface="+mn-ea"/>
+              </a:rPr>
+              <a:t>(wait),</a:t>
+            </a:r>
+            <a:r>
+              <a:rPr lang="zh-CN" altLang="en-US">
+                <a:sym typeface="+mn-ea"/>
+              </a:rPr>
+              <a:t>在</a:t>
+            </a:r>
+            <a:r>
+              <a:rPr lang="en-US" altLang="zh-CN">
+                <a:sym typeface="+mn-ea"/>
+              </a:rPr>
+              <a:t>wait</a:t>
+            </a:r>
+            <a:r>
+              <a:rPr lang="zh-CN" altLang="en-US">
+                <a:sym typeface="+mn-ea"/>
+              </a:rPr>
+              <a:t>时，会完成以下三步：解锁互斥量、休眠等待通知、被唤醒后加锁判断是否满足条件。因为</a:t>
+            </a:r>
+            <a:r>
+              <a:rPr lang="en-US" altLang="zh-CN">
+                <a:sym typeface="+mn-ea"/>
+              </a:rPr>
+              <a:t>lock_guard</a:t>
+            </a:r>
+            <a:r>
+              <a:rPr lang="zh-CN" altLang="en-US">
+                <a:sym typeface="+mn-ea"/>
+              </a:rPr>
+              <a:t>不支持中途解锁和加锁，所以就需要用</a:t>
+            </a:r>
+            <a:r>
+              <a:rPr lang="en-US" altLang="zh-CN">
+                <a:sym typeface="+mn-ea"/>
+              </a:rPr>
+              <a:t>unique_lock</a:t>
+            </a:r>
+            <a:r>
+              <a:rPr lang="zh-CN" altLang="en-US">
+                <a:sym typeface="+mn-ea"/>
+              </a:rPr>
+              <a:t>了。</a:t>
+            </a:r>
+            <a:endParaRPr lang="zh-CN" altLang="en-US">
+              <a:sym typeface="+mn-ea"/>
+            </a:endParaRPr>
+          </a:p>
+          <a:p>
+            <a:pPr indent="457200"/>
             <a:endParaRPr lang="zh-CN" altLang="en-US">
               <a:sym typeface="+mn-ea"/>
             </a:endParaRPr>
@@ -721,6 +954,474 @@
               <a:rPr lang="zh-CN" altLang="en-US">
                 <a:sym typeface="+mn-ea"/>
               </a:rPr>
+              <a:t>好，我们再回来看这一句，为什么要开一个线程去跑</a:t>
+            </a:r>
+            <a:r>
+              <a:rPr lang="en-US" altLang="zh-CN">
+                <a:sym typeface="+mn-ea"/>
+              </a:rPr>
+              <a:t>execute</a:t>
+            </a:r>
+            <a:r>
+              <a:rPr lang="zh-CN" altLang="en-US">
+                <a:sym typeface="+mn-ea"/>
+              </a:rPr>
+              <a:t>？</a:t>
+            </a:r>
+            <a:r>
+              <a:rPr lang="en-US" altLang="zh-CN">
+                <a:sym typeface="+mn-ea"/>
+              </a:rPr>
+              <a:t>execute</a:t>
+            </a:r>
+            <a:r>
+              <a:rPr lang="zh-CN" altLang="en-US">
+                <a:sym typeface="+mn-ea"/>
+              </a:rPr>
+              <a:t>就是我们刚才看的消费者线程。如果不开一个线程的话，那当前的线程又是生产者又是消费者，线程拿到图片去推理之后程序就会一直阻塞到这里了，后面的图片就可能得不到及时的</a:t>
+            </a:r>
+            <a:r>
+              <a:rPr lang="zh-CN" altLang="en-US">
+                <a:sym typeface="+mn-ea"/>
+              </a:rPr>
+              <a:t>处理。所以一个线程存，一个线程取才是</a:t>
+            </a:r>
+            <a:r>
+              <a:rPr lang="zh-CN" altLang="en-US">
+                <a:sym typeface="+mn-ea"/>
+              </a:rPr>
+              <a:t>正解。</a:t>
+            </a:r>
+            <a:endParaRPr lang="zh-CN" altLang="en-US">
+              <a:sym typeface="+mn-ea"/>
+            </a:endParaRPr>
+          </a:p>
+          <a:p>
+            <a:pPr indent="457200"/>
+            <a:r>
+              <a:rPr lang="zh-CN" altLang="en-US">
+                <a:sym typeface="+mn-ea"/>
+              </a:rPr>
+              <a:t>接下来我们去看</a:t>
+            </a:r>
+            <a:r>
+              <a:rPr lang="en-US" altLang="zh-CN">
+                <a:sym typeface="+mn-ea"/>
+              </a:rPr>
+              <a:t>processFile</a:t>
+            </a:r>
+            <a:r>
+              <a:rPr lang="zh-CN" altLang="en-US">
+                <a:sym typeface="+mn-ea"/>
+              </a:rPr>
+              <a:t>，该函数功能是解码图片，解析元数据</a:t>
+            </a:r>
+            <a:r>
+              <a:rPr lang="en-US" altLang="zh-CN">
+                <a:sym typeface="+mn-ea"/>
+              </a:rPr>
+              <a:t>(</a:t>
+            </a:r>
+            <a:r>
+              <a:rPr lang="zh-CN" altLang="en-US">
+                <a:sym typeface="+mn-ea"/>
+              </a:rPr>
+              <a:t>主要是经纬度</a:t>
+            </a:r>
+            <a:r>
+              <a:rPr lang="en-US" altLang="zh-CN">
+                <a:sym typeface="+mn-ea"/>
+              </a:rPr>
+              <a:t>)</a:t>
+            </a:r>
+            <a:r>
+              <a:rPr lang="zh-CN" altLang="en-US">
+                <a:sym typeface="+mn-ea"/>
+              </a:rPr>
+              <a:t>，调用</a:t>
+            </a:r>
+            <a:r>
+              <a:rPr lang="en-US" altLang="zh-CN">
+                <a:sym typeface="+mn-ea"/>
+              </a:rPr>
+              <a:t> TaskService </a:t>
+            </a:r>
+            <a:r>
+              <a:rPr lang="zh-CN" altLang="en-US">
+                <a:sym typeface="+mn-ea"/>
+              </a:rPr>
+              <a:t>进行目标检测。加下来我们看</a:t>
+            </a:r>
+            <a:r>
+              <a:rPr lang="en-US" altLang="zh-CN">
+                <a:sym typeface="+mn-ea"/>
+              </a:rPr>
+              <a:t>processFrame</a:t>
+            </a:r>
+            <a:r>
+              <a:rPr lang="zh-CN" altLang="en-US">
+                <a:sym typeface="+mn-ea"/>
+              </a:rPr>
+              <a:t>里面做了什么，该函数其实就是做了一个判断，下面我们再看看</a:t>
+            </a:r>
+            <a:r>
+              <a:rPr lang="en-US" altLang="zh-CN">
+                <a:sym typeface="+mn-ea"/>
+              </a:rPr>
+              <a:t>processDetection</a:t>
+            </a:r>
+            <a:r>
+              <a:rPr lang="zh-CN" altLang="en-US">
+                <a:sym typeface="+mn-ea"/>
+              </a:rPr>
+              <a:t>里面是如何做的，该函数做了三件事情，执行推理、构建事件和发布事件，我们首先看</a:t>
+            </a:r>
+            <a:r>
+              <a:rPr lang="en-US" altLang="zh-CN">
+                <a:sym typeface="+mn-ea"/>
+              </a:rPr>
+              <a:t>detectObjects</a:t>
+            </a:r>
+            <a:r>
+              <a:rPr lang="zh-CN" altLang="en-US">
+                <a:sym typeface="+mn-ea"/>
+              </a:rPr>
+              <a:t>，函数里面是调用</a:t>
+            </a:r>
+            <a:r>
+              <a:rPr lang="en-US" altLang="zh-CN">
+                <a:sym typeface="+mn-ea"/>
+              </a:rPr>
+              <a:t>detector-&gt;detect(frame);</a:t>
+            </a:r>
+            <a:r>
+              <a:rPr lang="zh-CN" altLang="en-US">
+                <a:sym typeface="+mn-ea"/>
+              </a:rPr>
+              <a:t>来进行推理的，</a:t>
+            </a:r>
+            <a:r>
+              <a:rPr lang="en-US" altLang="zh-CN">
+                <a:sym typeface="+mn-ea"/>
+              </a:rPr>
+              <a:t>detector</a:t>
+            </a:r>
+            <a:r>
+              <a:rPr lang="zh-CN" altLang="en-US">
+                <a:sym typeface="+mn-ea"/>
+              </a:rPr>
+              <a:t>是什么呢，我们这里显示的是</a:t>
+            </a:r>
+            <a:r>
+              <a:rPr lang="en-US" altLang="zh-CN">
+                <a:sym typeface="+mn-ea"/>
+              </a:rPr>
+              <a:t>IDetector</a:t>
+            </a:r>
+            <a:r>
+              <a:rPr lang="zh-CN" altLang="en-US">
+                <a:sym typeface="+mn-ea"/>
+              </a:rPr>
+              <a:t>的对象，为什么点进去是</a:t>
+            </a:r>
+            <a:r>
+              <a:rPr lang="en-US" altLang="zh-CN">
+                <a:sym typeface="+mn-ea"/>
+              </a:rPr>
+              <a:t>ppyoloE</a:t>
+            </a:r>
+            <a:r>
+              <a:rPr lang="zh-CN" altLang="en-US">
+                <a:sym typeface="+mn-ea"/>
+              </a:rPr>
+              <a:t>的</a:t>
+            </a:r>
+            <a:r>
+              <a:rPr lang="en-US" altLang="zh-CN">
+                <a:sym typeface="+mn-ea"/>
+              </a:rPr>
+              <a:t>detector</a:t>
+            </a:r>
+            <a:r>
+              <a:rPr lang="zh-CN" altLang="en-US">
+                <a:sym typeface="+mn-ea"/>
+              </a:rPr>
+              <a:t>函数呢？答案就是在程序进行初始化时就会根据配置文件中的指定字符串来初始化相应的检测器。接下来的预处理，推理，后处理，这些都是常规事情就不再多说了，刚才的消息中只有这几种类别，所以我们要对检测出来的目标进行过滤，只留下指定的类别。过滤就是根据</a:t>
+            </a:r>
+            <a:r>
+              <a:rPr lang="en-US" altLang="zh-CN">
+                <a:sym typeface="+mn-ea"/>
+              </a:rPr>
+              <a:t>coco.names</a:t>
+            </a:r>
+            <a:r>
+              <a:rPr lang="zh-CN" altLang="en-US">
+                <a:sym typeface="+mn-ea"/>
+              </a:rPr>
+              <a:t>将类别转化为</a:t>
+            </a:r>
+            <a:r>
+              <a:rPr lang="en-US" altLang="zh-CN">
+                <a:sym typeface="+mn-ea"/>
+              </a:rPr>
+              <a:t>id</a:t>
+            </a:r>
+            <a:r>
+              <a:rPr lang="zh-CN" altLang="en-US">
+                <a:sym typeface="+mn-ea"/>
+              </a:rPr>
+              <a:t>，如果</a:t>
+            </a:r>
+            <a:r>
+              <a:rPr lang="en-US" altLang="zh-CN">
+                <a:sym typeface="+mn-ea"/>
+              </a:rPr>
+              <a:t>box.classId</a:t>
+            </a:r>
+            <a:r>
+              <a:rPr lang="zh-CN" altLang="en-US">
+                <a:sym typeface="+mn-ea"/>
+              </a:rPr>
+              <a:t>在</a:t>
+            </a:r>
+            <a:r>
+              <a:rPr lang="en-US" altLang="zh-CN">
+                <a:sym typeface="+mn-ea"/>
+              </a:rPr>
+              <a:t>targetClassIds</a:t>
+            </a:r>
+            <a:r>
+              <a:rPr lang="zh-CN" altLang="en-US">
+                <a:sym typeface="+mn-ea"/>
+              </a:rPr>
+              <a:t>里面就说明本次任务包括该目标，可以放进过滤好的</a:t>
+            </a:r>
+            <a:r>
+              <a:rPr lang="en-US" altLang="zh-CN">
+                <a:sym typeface="+mn-ea"/>
+              </a:rPr>
+              <a:t>filtered</a:t>
+            </a:r>
+            <a:r>
+              <a:rPr lang="zh-CN" altLang="en-US">
+                <a:sym typeface="+mn-ea"/>
+              </a:rPr>
+              <a:t>中。</a:t>
+            </a:r>
+            <a:endParaRPr lang="zh-CN" altLang="en-US">
+              <a:sym typeface="+mn-ea"/>
+            </a:endParaRPr>
+          </a:p>
+          <a:p>
+            <a:pPr indent="457200"/>
+            <a:r>
+              <a:rPr lang="zh-CN" altLang="en-US">
+                <a:sym typeface="+mn-ea"/>
+              </a:rPr>
+              <a:t>之后就是构建事件，求经纬度、根据</a:t>
+            </a:r>
+            <a:r>
+              <a:rPr lang="en-US" altLang="zh-CN">
+                <a:sym typeface="+mn-ea"/>
+              </a:rPr>
+              <a:t>bboxes</a:t>
+            </a:r>
+            <a:r>
+              <a:rPr lang="zh-CN" altLang="en-US">
+                <a:sym typeface="+mn-ea"/>
+              </a:rPr>
+              <a:t>绘制可视化图片，构建事件，发布</a:t>
+            </a:r>
+            <a:r>
+              <a:rPr lang="zh-CN" altLang="en-US">
+                <a:sym typeface="+mn-ea"/>
+              </a:rPr>
+              <a:t>事件。</a:t>
+            </a:r>
+            <a:endParaRPr lang="zh-CN" altLang="en-US">
+              <a:sym typeface="+mn-ea"/>
+            </a:endParaRPr>
+          </a:p>
+          <a:p>
+            <a:pPr indent="457200"/>
+            <a:r>
+              <a:rPr lang="zh-CN" altLang="en-US">
+                <a:sym typeface="+mn-ea"/>
+              </a:rPr>
+              <a:t>好，媒体文件分析已经差不多处理完了，我们再来看视频流有哪些</a:t>
+            </a:r>
+            <a:r>
+              <a:rPr lang="zh-CN" altLang="en-US">
+                <a:sym typeface="+mn-ea"/>
+              </a:rPr>
+              <a:t>需要注意的事情。</a:t>
+            </a:r>
+            <a:endParaRPr lang="zh-CN" altLang="en-US">
+              <a:sym typeface="+mn-ea"/>
+            </a:endParaRPr>
+          </a:p>
+        </p:txBody>
+      </p:sp>
+    </p:spTree>
+  </p:cSld>
+  <p:clrMapOvr>
+    <a:masterClrMapping/>
+  </p:clrMapOvr>
+</p:notes>
+</file>
+
+<file path=ppt/notesSlides/notesSlide12.xml><?xml version="1.0" encoding="utf-8"?>
+<p:notes xmlns:a="http://schemas.openxmlformats.org/drawingml/2006/main" xmlns:r="http://schemas.openxmlformats.org/officeDocument/2006/relationships" xmlns:p="http://schemas.openxmlformats.org/presentationml/2006/main">
+  <p:cSld>
+    <p:spTree>
+      <p:nvGrpSpPr>
+        <p:cNvPr id="1" name=""/>
+        <p:cNvGrpSpPr/>
+        <p:nvPr/>
+      </p:nvGrpSpPr>
+      <p:grpSpPr/>
+      <p:sp>
+        <p:nvSpPr>
+          <p:cNvPr id="2" name="幻灯片图像占位符 1"/>
+          <p:cNvSpPr>
+            <a:spLocks noGrp="1"/>
+          </p:cNvSpPr>
+          <p:nvPr>
+            <p:ph type="sldImg" idx="2"/>
+          </p:nvPr>
+        </p:nvSpPr>
+        <p:spPr/>
+      </p:sp>
+      <p:sp>
+        <p:nvSpPr>
+          <p:cNvPr id="3" name="文本占位符 2"/>
+          <p:cNvSpPr>
+            <a:spLocks noGrp="1"/>
+          </p:cNvSpPr>
+          <p:nvPr>
+            <p:ph type="body" idx="3"/>
+          </p:nvPr>
+        </p:nvSpPr>
+        <p:spPr/>
+        <p:txBody>
+          <a:bodyPr/>
+          <a:p>
+            <a:pPr indent="457200"/>
+            <a:r>
+              <a:rPr lang="zh-CN" altLang="en-US">
+                <a:sym typeface="+mn-ea"/>
+              </a:rPr>
+              <a:t>接下来我们看媒体文件的最后一步，如何结束。由于</a:t>
+            </a:r>
+            <a:r>
+              <a:rPr lang="en-US" altLang="zh-CN">
+                <a:sym typeface="+mn-ea"/>
+              </a:rPr>
+              <a:t>ESDK</a:t>
+            </a:r>
+            <a:r>
+              <a:rPr lang="zh-CN" altLang="en-US">
+                <a:sym typeface="+mn-ea"/>
+              </a:rPr>
+              <a:t>好像并没有给出明确的结束函数，但是我们可以自己想一个，即：从收到图片开始我们就启动一个定时器开始计时，之后只要收到图片就刷新计时器，如果定时器结束那么就认为此次媒体分析文件任务结束。</a:t>
+            </a:r>
+            <a:r>
+              <a:rPr lang="en-US" altLang="zh-CN">
+                <a:sym typeface="+mn-ea"/>
+              </a:rPr>
+              <a:t>monitorThread_</a:t>
+            </a:r>
+            <a:r>
+              <a:rPr lang="zh-CN" altLang="en-US">
+                <a:sym typeface="+mn-ea"/>
+              </a:rPr>
+              <a:t>就是我们的监控线程，</a:t>
+            </a:r>
+            <a:r>
+              <a:rPr lang="en-US" altLang="zh-CN">
+                <a:sym typeface="+mn-ea"/>
+              </a:rPr>
+              <a:t>monitorLoop</a:t>
+            </a:r>
+            <a:r>
+              <a:rPr lang="zh-CN" altLang="en-US">
+                <a:sym typeface="+mn-ea"/>
+              </a:rPr>
+              <a:t>中会一直调用</a:t>
+            </a:r>
+            <a:r>
+              <a:rPr lang="en-US" altLang="zh-CN">
+                <a:sym typeface="+mn-ea"/>
+              </a:rPr>
+              <a:t>shouldComplete</a:t>
+            </a:r>
+            <a:r>
+              <a:rPr lang="zh-CN" altLang="en-US">
+                <a:sym typeface="+mn-ea"/>
+              </a:rPr>
+              <a:t>来判断定时器是否已经结束。任务结束后呢，推送消息，清理文件，</a:t>
+            </a:r>
+            <a:r>
+              <a:rPr lang="zh-CN" altLang="en-US">
+                <a:sym typeface="+mn-ea"/>
+              </a:rPr>
+              <a:t>恢复设置</a:t>
+            </a:r>
+            <a:endParaRPr lang="zh-CN" altLang="en-US">
+              <a:sym typeface="+mn-ea"/>
+            </a:endParaRPr>
+          </a:p>
+        </p:txBody>
+      </p:sp>
+    </p:spTree>
+  </p:cSld>
+  <p:clrMapOvr>
+    <a:masterClrMapping/>
+  </p:clrMapOvr>
+</p:notes>
+</file>
+
+<file path=ppt/notesSlides/notesSlide13.xml><?xml version="1.0" encoding="utf-8"?>
+<p:notes xmlns:a="http://schemas.openxmlformats.org/drawingml/2006/main" xmlns:r="http://schemas.openxmlformats.org/officeDocument/2006/relationships" xmlns:p="http://schemas.openxmlformats.org/presentationml/2006/main">
+  <p:cSld>
+    <p:spTree>
+      <p:nvGrpSpPr>
+        <p:cNvPr id="1" name=""/>
+        <p:cNvGrpSpPr/>
+        <p:nvPr/>
+      </p:nvGrpSpPr>
+      <p:grpSpPr/>
+      <p:sp>
+        <p:nvSpPr>
+          <p:cNvPr id="2" name="幻灯片图像占位符 1"/>
+          <p:cNvSpPr>
+            <a:spLocks noGrp="1"/>
+          </p:cNvSpPr>
+          <p:nvPr>
+            <p:ph type="sldImg" idx="2"/>
+          </p:nvPr>
+        </p:nvSpPr>
+        <p:spPr/>
+      </p:sp>
+      <p:sp>
+        <p:nvSpPr>
+          <p:cNvPr id="3" name="文本占位符 2"/>
+          <p:cNvSpPr>
+            <a:spLocks noGrp="1"/>
+          </p:cNvSpPr>
+          <p:nvPr>
+            <p:ph type="body" idx="3"/>
+          </p:nvPr>
+        </p:nvSpPr>
+        <p:spPr/>
+        <p:txBody>
+          <a:bodyPr/>
+          <a:p>
+            <a:pPr indent="457200"/>
+            <a:r>
+              <a:rPr lang="zh-CN" altLang="en-US">
+                <a:sym typeface="+mn-ea"/>
+              </a:rPr>
               <a:t>好，媒体文件分析已经差不多处理完了，我们再来看视频流有哪些需要注意的事情。直接看</a:t>
             </a:r>
             <a:r>
@@ -2612,487 +3313,187 @@
         <p:cNvGrpSpPr/>
         <p:nvPr/>
       </p:nvGrpSpPr>
-      <p:grpSpPr/>
+      <p:grpSpPr>
+        <a:xfrm>
+          <a:off x="0" y="0"/>
+          <a:ext cx="0" cy="0"/>
+          <a:chOff x="0" y="0"/>
+          <a:chExt cx="0" cy="0"/>
+        </a:xfrm>
+      </p:grpSpPr>
       <p:sp>
         <p:nvSpPr>
           <p:cNvPr id="2" name="幻灯片图像占位符 1"/>
+          <p:cNvSpPr>
+            <a:spLocks noGrp="1" noRot="1" noChangeAspect="1"/>
+          </p:cNvSpPr>
+          <p:nvPr>
+            <p:ph type="sldImg"/>
+          </p:nvPr>
+        </p:nvSpPr>
+        <p:spPr/>
+      </p:sp>
+      <p:sp>
+        <p:nvSpPr>
+          <p:cNvPr id="3" name="备注占位符 2"/>
           <p:cNvSpPr>
             <a:spLocks noGrp="1"/>
           </p:cNvSpPr>
           <p:nvPr>
-            <p:ph type="sldImg" idx="2"/>
+            <p:ph type="body" idx="1"/>
           </p:nvPr>
         </p:nvSpPr>
         <p:spPr/>
-      </p:sp>
-      <p:sp>
-        <p:nvSpPr>
-          <p:cNvPr id="3" name="文本占位符 2"/>
+        <p:txBody>
+          <a:bodyPr/>
+          <a:lstStyle/>
+          <a:p>
+            <a:r>
+              <a:rPr lang="zh-CN" altLang="en-US" sz="2000" dirty="0"/>
+              <a:t>对于问题二如何</a:t>
+            </a:r>
+            <a:r>
+              <a:rPr lang="zh-CN" altLang="en-US" sz="2000" dirty="0">
+                <a:sym typeface="+mn-ea"/>
+              </a:rPr>
+              <a:t>提取</a:t>
+            </a:r>
+            <a:r>
+              <a:rPr lang="en-US" altLang="zh-CN" sz="2000" dirty="0">
+                <a:sym typeface="+mn-ea"/>
+              </a:rPr>
+              <a:t>‘</a:t>
+            </a:r>
+            <a:r>
+              <a:rPr lang="zh-CN" altLang="en-US" sz="2000" dirty="0">
+                <a:sym typeface="+mn-ea"/>
+              </a:rPr>
+              <a:t>抗干扰的几何特征</a:t>
+            </a:r>
+            <a:r>
+              <a:rPr lang="en-US" altLang="zh-CN" sz="2000" dirty="0">
+                <a:sym typeface="+mn-ea"/>
+              </a:rPr>
+              <a:t>’</a:t>
+            </a:r>
+            <a:r>
+              <a:rPr lang="zh-CN" altLang="en-US" sz="2000" dirty="0">
+                <a:sym typeface="+mn-ea"/>
+              </a:rPr>
+              <a:t>，</a:t>
+            </a:r>
+            <a:r>
+              <a:rPr lang="zh-CN" altLang="en-US" sz="2000" dirty="0"/>
+              <a:t>解决思路是将</a:t>
+            </a:r>
+            <a:r>
+              <a:rPr lang="en-US" altLang="zh-CN" sz="2000" dirty="0"/>
+              <a:t>“</a:t>
+            </a:r>
+            <a:r>
+              <a:rPr lang="zh-CN" altLang="en-US" sz="2000" dirty="0"/>
+              <a:t>距离场</a:t>
+            </a:r>
+            <a:r>
+              <a:rPr lang="en-US" altLang="zh-CN" sz="2000" dirty="0"/>
+              <a:t>”</a:t>
+            </a:r>
+            <a:r>
+              <a:rPr lang="zh-CN" altLang="en-US" sz="2000" dirty="0"/>
+              <a:t>转化为</a:t>
+            </a:r>
+            <a:r>
+              <a:rPr lang="en-US" altLang="zh-CN" sz="2000" dirty="0"/>
+              <a:t>“</a:t>
+            </a:r>
+            <a:r>
+              <a:rPr lang="zh-CN" altLang="en-US" sz="2000" dirty="0"/>
+              <a:t>梯度场</a:t>
+            </a:r>
+            <a:r>
+              <a:rPr lang="en-US" altLang="zh-CN" sz="2000" dirty="0"/>
+              <a:t>”</a:t>
+            </a:r>
+            <a:r>
+              <a:rPr lang="zh-CN" altLang="en-US" sz="2000" dirty="0"/>
+              <a:t>。</a:t>
+            </a:r>
+            <a:r>
+              <a:rPr lang="en-US" altLang="zh-CN" sz="2000" dirty="0"/>
+              <a:t> </a:t>
+            </a:r>
+            <a:r>
+              <a:rPr lang="zh-CN" altLang="en-US" sz="2000" dirty="0">
+                <a:latin typeface="宋体" panose="02010600030101010101" pitchFamily="2" charset="-122"/>
+                <a:ea typeface="宋体" panose="02010600030101010101" pitchFamily="2" charset="-122"/>
+                <a:cs typeface="宋体" panose="02010600030101010101" pitchFamily="2" charset="-122"/>
+                <a:sym typeface="+mn-ea"/>
+              </a:rPr>
+              <a:t>显式提取深度的空间变化率以表征物体形状。</a:t>
+            </a:r>
+            <a:r>
+              <a:rPr lang="zh-CN" altLang="en-US" sz="2000" dirty="0">
+                <a:latin typeface="宋体" panose="02010600030101010101" pitchFamily="2" charset="-122"/>
+                <a:ea typeface="宋体" panose="02010600030101010101" pitchFamily="2" charset="-122"/>
+                <a:cs typeface="阿里巴巴普惠体 3.0 55 Regular" panose="00020600040101010101" pitchFamily="18" charset="-122"/>
+                <a:sym typeface="+mn-ea"/>
+              </a:rPr>
+              <a:t>引入中心差分卷积模块CDC，捕获细粒度的深度纹理与局部相对距离，增强网络对</a:t>
+            </a:r>
+            <a:r>
+              <a:rPr lang="zh-CN" altLang="en-US" sz="2000" dirty="0">
+                <a:solidFill>
+                  <a:srgbClr val="FF0000"/>
+                </a:solidFill>
+                <a:latin typeface="宋体" panose="02010600030101010101" pitchFamily="2" charset="-122"/>
+                <a:ea typeface="宋体" panose="02010600030101010101" pitchFamily="2" charset="-122"/>
+                <a:cs typeface="阿里巴巴普惠体 3.0 55 Regular" panose="00020600040101010101" pitchFamily="18" charset="-122"/>
+                <a:sym typeface="+mn-ea"/>
+              </a:rPr>
+              <a:t>无人机视角</a:t>
+            </a:r>
+            <a:r>
+              <a:rPr lang="zh-CN" altLang="en-US" sz="2000" dirty="0">
+                <a:latin typeface="宋体" panose="02010600030101010101" pitchFamily="2" charset="-122"/>
+                <a:ea typeface="宋体" panose="02010600030101010101" pitchFamily="2" charset="-122"/>
+                <a:cs typeface="阿里巴巴普惠体 3.0 55 Regular" panose="00020600040101010101" pitchFamily="18" charset="-122"/>
+                <a:sym typeface="+mn-ea"/>
+              </a:rPr>
+              <a:t>下微小物体表面几何结构的感知能力</a:t>
+            </a:r>
+            <a:endParaRPr lang="zh-CN" altLang="en-US" sz="2000" b="1" dirty="0">
+              <a:solidFill>
+                <a:schemeClr val="tx1"/>
+              </a:solidFill>
+              <a:latin typeface="宋体" panose="02010600030101010101" pitchFamily="2" charset="-122"/>
+              <a:ea typeface="宋体" panose="02010600030101010101" pitchFamily="2" charset="-122"/>
+              <a:cs typeface="宋体" panose="02010600030101010101" pitchFamily="2" charset="-122"/>
+            </a:endParaRPr>
+          </a:p>
+          <a:p>
+            <a:endParaRPr lang="zh-CN" altLang="en-US" sz="2000" dirty="0"/>
+          </a:p>
+        </p:txBody>
+      </p:sp>
+      <p:sp>
+        <p:nvSpPr>
+          <p:cNvPr id="4" name="灯片编号占位符 3"/>
           <p:cNvSpPr>
             <a:spLocks noGrp="1"/>
           </p:cNvSpPr>
           <p:nvPr>
-            <p:ph type="body" idx="3"/>
+            <p:ph type="sldNum" sz="quarter" idx="10"/>
           </p:nvPr>
         </p:nvSpPr>
         <p:spPr/>
         <p:txBody>
           <a:bodyPr/>
-          <a:p>
-            <a:pPr indent="457200"/>
-            <a:r>
-              <a:rPr lang="zh-CN" altLang="en-US">
-                <a:sym typeface="+mn-ea"/>
-              </a:rPr>
-              <a:t>我们的</a:t>
-            </a:r>
-            <a:r>
-              <a:rPr lang="en-US" altLang="zh-CN">
-                <a:sym typeface="+mn-ea"/>
-              </a:rPr>
-              <a:t>topic</a:t>
-            </a:r>
-            <a:r>
-              <a:rPr lang="zh-CN" altLang="en-US">
-                <a:sym typeface="+mn-ea"/>
-              </a:rPr>
-              <a:t>是</a:t>
-            </a:r>
-            <a:r>
-              <a:rPr lang="en-US" altLang="zh-CN">
-                <a:sym typeface="+mn-ea"/>
-              </a:rPr>
-              <a:t>thing/product/{device_sn}/services</a:t>
-            </a:r>
-            <a:r>
-              <a:rPr lang="zh-CN" altLang="en-US">
-                <a:sym typeface="+mn-ea"/>
-              </a:rPr>
-              <a:t>，所以走</a:t>
-            </a:r>
-            <a:r>
-              <a:rPr lang="en-US" altLang="zh-CN">
-                <a:sym typeface="+mn-ea"/>
-              </a:rPr>
-              <a:t>handleServiceCommand</a:t>
-            </a:r>
-            <a:r>
-              <a:rPr lang="zh-CN" altLang="en-US">
-                <a:sym typeface="+mn-ea"/>
-              </a:rPr>
-              <a:t>，函数处理</a:t>
-            </a:r>
-            <a:r>
-              <a:rPr lang="en-US" altLang="zh-CN">
-                <a:sym typeface="+mn-ea"/>
-              </a:rPr>
-              <a:t>json</a:t>
-            </a:r>
-            <a:r>
-              <a:rPr lang="zh-CN" altLang="en-US">
-                <a:sym typeface="+mn-ea"/>
-              </a:rPr>
-              <a:t>提取请求内容，根据</a:t>
-            </a:r>
-            <a:r>
-              <a:rPr lang="en-US" altLang="zh-CN">
-                <a:sym typeface="+mn-ea"/>
-              </a:rPr>
-              <a:t>menthod</a:t>
-            </a:r>
-            <a:r>
-              <a:rPr lang="zh-CN" altLang="en-US">
-                <a:sym typeface="+mn-ea"/>
-              </a:rPr>
-              <a:t>来调用相关的处理函数。</a:t>
-            </a:r>
-            <a:r>
-              <a:rPr lang="en-US" altLang="zh-CN">
-                <a:sym typeface="+mn-ea"/>
-              </a:rPr>
-              <a:t>commandHandlers_</a:t>
-            </a:r>
-            <a:r>
-              <a:rPr lang="zh-CN" altLang="en-US">
-                <a:sym typeface="+mn-ea"/>
-              </a:rPr>
-              <a:t>其实就是一个</a:t>
-            </a:r>
-            <a:r>
-              <a:rPr lang="en-US" altLang="zh-CN">
-                <a:sym typeface="+mn-ea"/>
-              </a:rPr>
-              <a:t>map&lt;string,funtion&gt;</a:t>
-            </a:r>
-            <a:r>
-              <a:rPr lang="zh-CN" altLang="en-US">
-                <a:sym typeface="+mn-ea"/>
-              </a:rPr>
-              <a:t>，他存储了所有处理函数。</a:t>
-            </a:r>
-            <a:endParaRPr lang="zh-CN" altLang="en-US">
-              <a:sym typeface="+mn-ea"/>
-            </a:endParaRPr>
-          </a:p>
-          <a:p>
-            <a:pPr indent="457200"/>
-            <a:r>
-              <a:rPr lang="zh-CN" altLang="en-US">
-                <a:sym typeface="+mn-ea"/>
-              </a:rPr>
-              <a:t>之后数据走向</a:t>
-            </a:r>
-            <a:r>
-              <a:rPr lang="en-US" altLang="zh-CN">
-                <a:sym typeface="+mn-ea"/>
-              </a:rPr>
-              <a:t>handleAlgorithmEnable</a:t>
-            </a:r>
-            <a:r>
-              <a:rPr lang="zh-CN" altLang="en-US">
-                <a:sym typeface="+mn-ea"/>
-              </a:rPr>
-              <a:t>，该函数重点就是启动任务和发送</a:t>
-            </a:r>
-            <a:r>
-              <a:rPr lang="en-US" altLang="zh-CN">
-                <a:sym typeface="+mn-ea"/>
-              </a:rPr>
-              <a:t>device_algorithm_enable</a:t>
-            </a:r>
-            <a:r>
-              <a:rPr lang="zh-CN" altLang="en-US">
-                <a:sym typeface="+mn-ea"/>
-              </a:rPr>
-              <a:t>的应答，</a:t>
-            </a:r>
-            <a:r>
-              <a:rPr lang="en-US" altLang="zh-CN">
-                <a:sym typeface="+mn-ea"/>
-              </a:rPr>
-              <a:t>startTask</a:t>
-            </a:r>
-            <a:r>
-              <a:rPr lang="zh-CN" altLang="en-US">
-                <a:sym typeface="+mn-ea"/>
-              </a:rPr>
-              <a:t>重点就是创建和启动任务，我们先看是如何创建的，这里使用了简单工厂模式来判断。为什么要用简单工厂呢，可以想一下如果我们不用简单工厂，那我们创建、启动、停止任务都要判断是视频流分析任务还是媒体文件分析任务然后再去执行相应的函数，我们这是两个任务还好，如果我们再加几个任务呢，大量的重复代码不说，耦合度会越来越高，代码也会越来越难阅读。但是使用简单工厂之后，我们就只需要在</a:t>
-            </a:r>
-            <a:r>
-              <a:rPr lang="en-US" altLang="zh-CN">
-                <a:sym typeface="+mn-ea"/>
-              </a:rPr>
-              <a:t>switch</a:t>
-            </a:r>
-            <a:r>
-              <a:rPr lang="zh-CN" altLang="en-US">
-                <a:sym typeface="+mn-ea"/>
-              </a:rPr>
-              <a:t>类这里加上自己新增加的任务就可以了。无论是视频流还是媒体文件分析，都去继承</a:t>
-            </a:r>
-            <a:r>
-              <a:rPr lang="en-US" altLang="zh-CN">
-                <a:sym typeface="+mn-ea"/>
-              </a:rPr>
-              <a:t>ITask</a:t>
-            </a:r>
-            <a:r>
-              <a:rPr lang="zh-CN" altLang="en-US">
-                <a:sym typeface="+mn-ea"/>
-              </a:rPr>
-              <a:t>这个类，实现他的接口，这样我们就可以使用统一的函数来实现不同任务的功能了。</a:t>
-            </a:r>
-            <a:endParaRPr lang="zh-CN" altLang="en-US">
-              <a:sym typeface="+mn-ea"/>
-            </a:endParaRPr>
-          </a:p>
-          <a:p>
-            <a:pPr indent="457200"/>
-            <a:r>
-              <a:rPr lang="zh-CN" altLang="en-US">
-                <a:sym typeface="+mn-ea"/>
-              </a:rPr>
-              <a:t>创建完任务之后</a:t>
-            </a:r>
-            <a:r>
-              <a:rPr lang="en-US" altLang="zh-CN">
-                <a:sym typeface="+mn-ea"/>
-              </a:rPr>
-              <a:t>start</a:t>
-            </a:r>
-            <a:r>
-              <a:rPr lang="zh-CN" altLang="en-US">
-                <a:sym typeface="+mn-ea"/>
-              </a:rPr>
-              <a:t>，事件缓存可以先不用管，因为我也没大看。好，现在来想媒体文件分析的</a:t>
-            </a:r>
-            <a:r>
-              <a:rPr lang="en-US" altLang="zh-CN">
-                <a:sym typeface="+mn-ea"/>
-              </a:rPr>
-              <a:t>start</a:t>
-            </a:r>
-            <a:r>
-              <a:rPr lang="zh-CN" altLang="en-US">
-                <a:sym typeface="+mn-ea"/>
-              </a:rPr>
-              <a:t>需要做什么事情？刚才我们说的程序启动后等待无人机传输数据给机场，机场有了新的数据后状态发生变化，我们的程序就开始拉取图片进行分析，那我们的程序要如何才能知道机场状态发生变化并作出反应呢？对，其实思想和刚才程序收到</a:t>
-            </a:r>
-            <a:r>
-              <a:rPr lang="en-US" altLang="zh-CN">
-                <a:sym typeface="+mn-ea"/>
-              </a:rPr>
-              <a:t>mqtt</a:t>
-            </a:r>
-            <a:r>
-              <a:rPr lang="zh-CN" altLang="en-US">
-                <a:sym typeface="+mn-ea"/>
-              </a:rPr>
-              <a:t>消息并做处理是一样的，回调函数和观察者模式。好，除去事件缓存</a:t>
-            </a:r>
-            <a:r>
-              <a:rPr lang="en-US" altLang="zh-CN">
-                <a:sym typeface="+mn-ea"/>
-              </a:rPr>
-              <a:t>start</a:t>
-            </a:r>
-            <a:r>
-              <a:rPr lang="zh-CN" altLang="en-US">
-                <a:sym typeface="+mn-ea"/>
-              </a:rPr>
-              <a:t>做的第一件事就是</a:t>
-            </a:r>
-            <a:r>
-              <a:rPr lang="en-US" altLang="zh-CN">
-                <a:sym typeface="+mn-ea"/>
-              </a:rPr>
-              <a:t>registerMediaFilesObserver</a:t>
-            </a:r>
-            <a:r>
-              <a:rPr lang="zh-CN" altLang="en-US">
-                <a:sym typeface="+mn-ea"/>
-              </a:rPr>
-              <a:t>注册观察者，我们来看她是怎么注册的，首先获取</a:t>
-            </a:r>
-            <a:r>
-              <a:rPr lang="en-US" altLang="zh-CN">
-                <a:sym typeface="+mn-ea"/>
-              </a:rPr>
-              <a:t>MediaManager</a:t>
-            </a:r>
-            <a:r>
-              <a:rPr lang="zh-CN" altLang="en-US">
-                <a:sym typeface="+mn-ea"/>
-              </a:rPr>
-              <a:t>的实例，</a:t>
-            </a:r>
-            <a:r>
-              <a:rPr lang="en-US" altLang="zh-CN">
-                <a:sym typeface="+mn-ea"/>
-              </a:rPr>
-              <a:t>edge_sdk</a:t>
-            </a:r>
-            <a:r>
-              <a:rPr lang="zh-CN" altLang="en-US">
-                <a:sym typeface="+mn-ea"/>
-              </a:rPr>
-              <a:t>开头的都是大疆</a:t>
-            </a:r>
-            <a:r>
-              <a:rPr lang="en-US" altLang="zh-CN">
-                <a:sym typeface="+mn-ea"/>
-              </a:rPr>
-              <a:t>edge_sdk</a:t>
-            </a:r>
-            <a:r>
-              <a:rPr lang="zh-CN" altLang="en-US">
-                <a:sym typeface="+mn-ea"/>
-              </a:rPr>
-              <a:t>的内容，我们只需要知道他们的函数是做什么用的就可以了。</a:t>
-            </a:r>
-            <a:r>
-              <a:rPr lang="en-US" altLang="zh-CN">
-                <a:sym typeface="+mn-ea"/>
-              </a:rPr>
-              <a:t>MediaManager</a:t>
-            </a:r>
-            <a:r>
-              <a:rPr lang="zh-CN" altLang="en-US">
-                <a:sym typeface="+mn-ea"/>
-              </a:rPr>
-              <a:t>功能就是管理机场的文件。这边写的</a:t>
-            </a:r>
-            <a:r>
-              <a:rPr lang="en-US" altLang="zh-CN">
-                <a:sym typeface="+mn-ea"/>
-              </a:rPr>
-              <a:t>observer</a:t>
-            </a:r>
-            <a:r>
-              <a:rPr lang="zh-CN" altLang="en-US">
-                <a:sym typeface="+mn-ea"/>
-              </a:rPr>
-              <a:t>是一个函数，我们可以看一下这个</a:t>
-            </a:r>
-            <a:r>
-              <a:rPr lang="en-US" altLang="zh-CN">
-                <a:sym typeface="+mn-ea"/>
-              </a:rPr>
-              <a:t>lambda</a:t>
-            </a:r>
-            <a:r>
-              <a:rPr lang="zh-CN" altLang="en-US">
-                <a:sym typeface="+mn-ea"/>
-              </a:rPr>
-              <a:t>表达式，</a:t>
-            </a:r>
-            <a:r>
-              <a:rPr lang="en-US" altLang="zh-CN">
-                <a:sym typeface="+mn-ea"/>
-              </a:rPr>
-              <a:t>[this]</a:t>
-            </a:r>
-            <a:r>
-              <a:rPr lang="zh-CN" altLang="en-US">
-                <a:sym typeface="+mn-ea"/>
-              </a:rPr>
-              <a:t>中的</a:t>
-            </a:r>
-            <a:r>
-              <a:rPr lang="en-US" altLang="zh-CN">
-                <a:sym typeface="+mn-ea"/>
-              </a:rPr>
-              <a:t>[]</a:t>
-            </a:r>
-            <a:r>
-              <a:rPr lang="zh-CN" altLang="en-US">
-                <a:sym typeface="+mn-ea"/>
-              </a:rPr>
-              <a:t>叫做捕获列表，表示</a:t>
-            </a:r>
-            <a:r>
-              <a:rPr lang="en-US" altLang="zh-CN">
-                <a:sym typeface="+mn-ea"/>
-              </a:rPr>
-              <a:t>lambda</a:t>
-            </a:r>
-            <a:r>
-              <a:rPr lang="zh-CN" altLang="en-US">
-                <a:sym typeface="+mn-ea"/>
-              </a:rPr>
-              <a:t>需要访问外部</a:t>
-            </a:r>
-            <a:r>
-              <a:rPr lang="en-US" altLang="zh-CN">
-                <a:sym typeface="+mn-ea"/>
-              </a:rPr>
-              <a:t>(</a:t>
-            </a:r>
-            <a:r>
-              <a:rPr lang="zh-CN" altLang="en-US">
-                <a:sym typeface="+mn-ea"/>
-              </a:rPr>
-              <a:t>即包含这个</a:t>
-            </a:r>
-            <a:r>
-              <a:rPr lang="en-US" altLang="zh-CN">
-                <a:sym typeface="+mn-ea"/>
-              </a:rPr>
-              <a:t>lambda</a:t>
-            </a:r>
-            <a:r>
-              <a:rPr lang="zh-CN" altLang="en-US">
-                <a:sym typeface="+mn-ea"/>
-              </a:rPr>
-              <a:t>的函数或类）的哪些变量。</a:t>
-            </a:r>
-            <a:r>
-              <a:rPr lang="en-US" altLang="zh-CN">
-                <a:sym typeface="+mn-ea"/>
-              </a:rPr>
-              <a:t>[this]</a:t>
-            </a:r>
-            <a:r>
-              <a:rPr lang="zh-CN" altLang="en-US">
-                <a:sym typeface="+mn-ea"/>
-              </a:rPr>
-              <a:t>就表示</a:t>
-            </a:r>
-            <a:r>
-              <a:rPr lang="en-US" altLang="zh-CN">
-                <a:sym typeface="+mn-ea"/>
-              </a:rPr>
-              <a:t>lambda</a:t>
-            </a:r>
-            <a:r>
-              <a:rPr lang="zh-CN" altLang="en-US">
-                <a:sym typeface="+mn-ea"/>
-              </a:rPr>
-              <a:t>可以像当前对象一样访问所有的成员。</a:t>
-            </a:r>
-            <a:r>
-              <a:rPr lang="en-US" altLang="zh-CN">
-                <a:sym typeface="+mn-ea"/>
-              </a:rPr>
-              <a:t>const edge_sdk::MediaFile&amp; file</a:t>
-            </a:r>
-            <a:r>
-              <a:rPr lang="zh-CN" altLang="en-US">
-                <a:sym typeface="+mn-ea"/>
-              </a:rPr>
-              <a:t>是参数，</a:t>
-            </a:r>
-            <a:r>
-              <a:rPr lang="en-US" altLang="zh-CN">
-                <a:sym typeface="+mn-ea"/>
-              </a:rPr>
-              <a:t>edge_sdk::ErrorCode</a:t>
-            </a:r>
-            <a:r>
-              <a:rPr lang="zh-CN" altLang="en-US">
-                <a:sym typeface="+mn-ea"/>
-              </a:rPr>
-              <a:t>是返回值。</a:t>
-            </a:r>
-            <a:r>
-              <a:rPr lang="en-US" altLang="zh-CN">
-                <a:sym typeface="+mn-ea"/>
-              </a:rPr>
-              <a:t>mediaManager_-&gt;RegisterMediaFilesObserver(observer)</a:t>
-            </a:r>
-            <a:r>
-              <a:rPr lang="zh-CN" altLang="en-US">
-                <a:sym typeface="+mn-ea"/>
-              </a:rPr>
-              <a:t>就是将</a:t>
-            </a:r>
-            <a:r>
-              <a:rPr lang="en-US" altLang="zh-CN">
-                <a:sym typeface="+mn-ea"/>
-              </a:rPr>
-              <a:t>observer</a:t>
-            </a:r>
-            <a:r>
-              <a:rPr lang="zh-CN" altLang="en-US">
-                <a:sym typeface="+mn-ea"/>
-              </a:rPr>
-              <a:t>注册成了观察者，说白了就是图片更新就会调用</a:t>
-            </a:r>
-            <a:r>
-              <a:rPr lang="en-US" altLang="zh-CN">
-                <a:sym typeface="+mn-ea"/>
-              </a:rPr>
-              <a:t>observer</a:t>
-            </a:r>
-            <a:r>
-              <a:rPr lang="zh-CN" altLang="en-US">
-                <a:sym typeface="+mn-ea"/>
-              </a:rPr>
-              <a:t>这个函数。</a:t>
-            </a:r>
-            <a:endParaRPr lang="zh-CN" altLang="en-US">
-              <a:sym typeface="+mn-ea"/>
-            </a:endParaRPr>
+          <a:lstStyle/>
+          <a:p>
+            <a:fld id="{3D7F0B17-20C8-4CBB-BD66-70902ADF39C6}" type="slidenum">
+              <a:rPr lang="zh-CN" altLang="en-US" smtClean="0"/>
+            </a:fld>
+            <a:endParaRPr lang="zh-CN" altLang="en-US"/>
           </a:p>
         </p:txBody>
       </p:sp>
@@ -3113,319 +3514,140 @@
         <p:cNvGrpSpPr/>
         <p:nvPr/>
       </p:nvGrpSpPr>
-      <p:grpSpPr/>
+      <p:grpSpPr>
+        <a:xfrm>
+          <a:off x="0" y="0"/>
+          <a:ext cx="0" cy="0"/>
+          <a:chOff x="0" y="0"/>
+          <a:chExt cx="0" cy="0"/>
+        </a:xfrm>
+      </p:grpSpPr>
       <p:sp>
         <p:nvSpPr>
           <p:cNvPr id="2" name="幻灯片图像占位符 1"/>
+          <p:cNvSpPr>
+            <a:spLocks noGrp="1" noRot="1" noChangeAspect="1"/>
+          </p:cNvSpPr>
+          <p:nvPr>
+            <p:ph type="sldImg"/>
+          </p:nvPr>
+        </p:nvSpPr>
+        <p:spPr/>
+      </p:sp>
+      <p:sp>
+        <p:nvSpPr>
+          <p:cNvPr id="3" name="备注占位符 2"/>
           <p:cNvSpPr>
             <a:spLocks noGrp="1"/>
           </p:cNvSpPr>
           <p:nvPr>
-            <p:ph type="sldImg" idx="2"/>
+            <p:ph type="body" idx="1"/>
           </p:nvPr>
         </p:nvSpPr>
         <p:spPr/>
-      </p:sp>
-      <p:sp>
-        <p:nvSpPr>
-          <p:cNvPr id="3" name="文本占位符 2"/>
+        <p:txBody>
+          <a:bodyPr/>
+          <a:lstStyle/>
+          <a:p>
+            <a:pPr>
+              <a:lnSpc>
+                <a:spcPct val="120000"/>
+              </a:lnSpc>
+            </a:pPr>
+            <a:r>
+              <a:rPr lang="zh-CN" altLang="en-US" sz="2000" dirty="0"/>
+              <a:t>对于问题三，</a:t>
+            </a:r>
+            <a:r>
+              <a:rPr lang="zh-CN" altLang="en-US" sz="2000" dirty="0">
+                <a:latin typeface="宋体" panose="02010600030101010101" pitchFamily="2" charset="-122"/>
+                <a:ea typeface="宋体" panose="02010600030101010101" pitchFamily="2" charset="-122"/>
+                <a:cs typeface="宋体" panose="02010600030101010101" pitchFamily="2" charset="-122"/>
+                <a:sym typeface="+mn-ea"/>
+              </a:rPr>
+              <a:t>直接融合会引入噪声干扰</a:t>
+            </a:r>
+            <a:r>
+              <a:rPr lang="zh-CN" altLang="en-US" sz="2000" dirty="0"/>
+              <a:t>；同时，几何信息在深层网络中容易被</a:t>
+            </a:r>
+            <a:r>
+              <a:rPr lang="en-US" altLang="zh-CN" sz="2000" dirty="0"/>
+              <a:t>“</a:t>
+            </a:r>
+            <a:r>
+              <a:rPr lang="zh-CN" altLang="en-US" sz="2000" dirty="0"/>
+              <a:t>稀释</a:t>
+            </a:r>
+            <a:r>
+              <a:rPr lang="en-US" altLang="zh-CN" sz="2000" dirty="0"/>
+              <a:t>”</a:t>
+            </a:r>
+            <a:r>
+              <a:rPr lang="zh-CN" altLang="en-US" sz="2000" dirty="0"/>
+              <a:t>。</a:t>
+            </a:r>
+            <a:r>
+              <a:rPr lang="en-US" altLang="zh-CN" sz="2000" dirty="0"/>
+              <a:t> </a:t>
+            </a:r>
+            <a:r>
+              <a:rPr lang="zh-CN" altLang="en-US" sz="2000" dirty="0"/>
+              <a:t>提出一种跨尺度几何显著性引导机制。</a:t>
+            </a:r>
+            <a:r>
+              <a:rPr lang="en-US" altLang="zh-CN" sz="2000" dirty="0"/>
+              <a:t> </a:t>
+            </a:r>
+            <a:r>
+              <a:rPr lang="zh-CN" altLang="en-US" sz="2000" dirty="0"/>
+              <a:t>利用局部方差构建置信度</a:t>
+            </a:r>
+            <a:r>
+              <a:rPr lang="zh-CN" altLang="en-US" sz="2000" dirty="0">
+                <a:latin typeface="宋体" panose="02010600030101010101" pitchFamily="2" charset="-122"/>
+                <a:ea typeface="宋体" panose="02010600030101010101" pitchFamily="2" charset="-122"/>
+                <a:cs typeface="宋体" panose="02010600030101010101" pitchFamily="2" charset="-122"/>
+                <a:sym typeface="+mn-ea"/>
+              </a:rPr>
+              <a:t>评估机制</a:t>
+            </a:r>
+            <a:r>
+              <a:rPr lang="zh-CN" altLang="en-US" sz="2000" dirty="0"/>
+              <a:t>，通过注意力门控滤除深度图中的伪影噪声，建立跨层通路，</a:t>
+            </a:r>
+            <a:r>
+              <a:rPr lang="zh-CN" altLang="en-US" sz="2000" dirty="0">
+                <a:latin typeface="宋体" panose="02010600030101010101" pitchFamily="2" charset="-122"/>
+                <a:ea typeface="宋体" panose="02010600030101010101" pitchFamily="2" charset="-122"/>
+                <a:cs typeface="宋体" panose="02010600030101010101" pitchFamily="2" charset="-122"/>
+                <a:sym typeface="+mn-ea"/>
+              </a:rPr>
+              <a:t>以残差流形式直接引导深层特征的聚合方向,防止几何信息在下采样过程中丢失。</a:t>
+            </a:r>
+            <a:endParaRPr lang="zh-CN" altLang="en-US" sz="2000" dirty="0"/>
+          </a:p>
+        </p:txBody>
+      </p:sp>
+      <p:sp>
+        <p:nvSpPr>
+          <p:cNvPr id="4" name="灯片编号占位符 3"/>
           <p:cNvSpPr>
             <a:spLocks noGrp="1"/>
           </p:cNvSpPr>
           <p:nvPr>
-            <p:ph type="body" idx="3"/>
+            <p:ph type="sldNum" sz="quarter" idx="10"/>
           </p:nvPr>
         </p:nvSpPr>
         <p:spPr/>
         <p:txBody>
           <a:bodyPr/>
-          <a:p>
-            <a:pPr indent="457200"/>
-            <a:r>
-              <a:rPr lang="zh-CN" altLang="en-US">
-                <a:sym typeface="+mn-ea"/>
-              </a:rPr>
-              <a:t>我们收到图片之后是不是就要处理后送给检测模型分析了。那我们要如何送给检测模型呢？又如何调用检测模型检测呢？回想一下操作系统是不是学过一种生产者消费者的设计模式？我们现在这个情况是不是很适合生产者消费者模式？机场</a:t>
-            </a:r>
-            <a:r>
-              <a:rPr lang="en-US" altLang="zh-CN">
-                <a:sym typeface="+mn-ea"/>
-              </a:rPr>
-              <a:t>(</a:t>
-            </a:r>
-            <a:r>
-              <a:rPr lang="zh-CN" altLang="en-US">
-                <a:sym typeface="+mn-ea"/>
-              </a:rPr>
-              <a:t>生产者</a:t>
-            </a:r>
-            <a:r>
-              <a:rPr lang="en-US" altLang="zh-CN">
-                <a:sym typeface="+mn-ea"/>
-              </a:rPr>
-              <a:t>)</a:t>
-            </a:r>
-            <a:r>
-              <a:rPr lang="zh-CN" altLang="en-US">
-                <a:sym typeface="+mn-ea"/>
-              </a:rPr>
-              <a:t>会更新图片，检测模型</a:t>
-            </a:r>
-            <a:r>
-              <a:rPr lang="en-US" altLang="zh-CN">
-                <a:sym typeface="+mn-ea"/>
-              </a:rPr>
-              <a:t>(</a:t>
-            </a:r>
-            <a:r>
-              <a:rPr lang="zh-CN" altLang="en-US">
-                <a:sym typeface="+mn-ea"/>
-              </a:rPr>
-              <a:t>消费者</a:t>
-            </a:r>
-            <a:r>
-              <a:rPr lang="en-US" altLang="zh-CN">
-                <a:sym typeface="+mn-ea"/>
-              </a:rPr>
-              <a:t>)</a:t>
-            </a:r>
-            <a:r>
-              <a:rPr lang="zh-CN" altLang="en-US">
-                <a:sym typeface="+mn-ea"/>
-              </a:rPr>
-              <a:t>会拿走图片进行分析。我们来看看它们之间的交互具体是什么样的，首先是图片到来，</a:t>
-            </a:r>
-            <a:r>
-              <a:rPr lang="en-US" altLang="zh-CN">
-                <a:sym typeface="+mn-ea"/>
-              </a:rPr>
-              <a:t>observer</a:t>
-            </a:r>
-            <a:r>
-              <a:rPr lang="zh-CN" altLang="en-US">
-                <a:sym typeface="+mn-ea"/>
-              </a:rPr>
-              <a:t>中会调用</a:t>
-            </a:r>
-            <a:r>
-              <a:rPr lang="en-US" altLang="zh-CN">
-                <a:sym typeface="+mn-ea"/>
-              </a:rPr>
-              <a:t>onMediaFileUpdate</a:t>
-            </a:r>
-            <a:r>
-              <a:rPr lang="zh-CN" altLang="en-US">
-                <a:sym typeface="+mn-ea"/>
-              </a:rPr>
-              <a:t>，将文件放入队列，想想这里为什么会加锁？第一个原因呢是因为</a:t>
-            </a:r>
-            <a:r>
-              <a:rPr lang="en-US" altLang="zh-CN">
-                <a:sym typeface="+mn-ea"/>
-              </a:rPr>
-              <a:t>queue</a:t>
-            </a:r>
-            <a:r>
-              <a:rPr lang="zh-CN" altLang="en-US">
-                <a:sym typeface="+mn-ea"/>
-              </a:rPr>
-              <a:t>的</a:t>
-            </a:r>
-            <a:r>
-              <a:rPr lang="en-US" altLang="zh-CN">
-                <a:sym typeface="+mn-ea"/>
-              </a:rPr>
-              <a:t>push</a:t>
-            </a:r>
-            <a:r>
-              <a:rPr lang="zh-CN" altLang="en-US">
-                <a:sym typeface="+mn-ea"/>
-              </a:rPr>
-              <a:t>操作不是原子的，所以生产者在写队列的过程中如果消费者醒了去读队列可能会造成未定义行为导致崩坏；第二个原因则是可能不止一个生产者</a:t>
-            </a:r>
-            <a:r>
-              <a:rPr lang="en-US" altLang="zh-CN">
-                <a:sym typeface="+mn-ea"/>
-              </a:rPr>
-              <a:t>(</a:t>
-            </a:r>
-            <a:r>
-              <a:rPr lang="zh-CN" altLang="en-US">
-                <a:sym typeface="+mn-ea"/>
-              </a:rPr>
-              <a:t>当然我们的程序应该是只有一个生产者</a:t>
-            </a:r>
-            <a:r>
-              <a:rPr lang="en-US" altLang="zh-CN">
-                <a:sym typeface="+mn-ea"/>
-              </a:rPr>
-              <a:t>)</a:t>
-            </a:r>
-            <a:r>
-              <a:rPr lang="zh-CN" altLang="en-US">
-                <a:sym typeface="+mn-ea"/>
-              </a:rPr>
-              <a:t>，所以为了写的顺序也是要</a:t>
-            </a:r>
-            <a:r>
-              <a:rPr lang="zh-CN" altLang="en-US">
-                <a:sym typeface="+mn-ea"/>
-              </a:rPr>
-              <a:t>加锁的。</a:t>
-            </a:r>
-            <a:endParaRPr lang="zh-CN" altLang="en-US">
-              <a:sym typeface="+mn-ea"/>
-            </a:endParaRPr>
-          </a:p>
-          <a:p>
-            <a:pPr indent="457200"/>
-            <a:r>
-              <a:rPr lang="zh-CN" altLang="en-US">
-                <a:sym typeface="+mn-ea"/>
-              </a:rPr>
-              <a:t>我们再来看看消费者，暂停可以先不用管，多余内容。消费者会一直等待，直到等到队列非空或者是程序终止，队列非空后取出文件，开始处理。这里有没有发现一个问题，为什么生产者用的是</a:t>
-            </a:r>
-            <a:r>
-              <a:rPr lang="en-US" altLang="zh-CN">
-                <a:sym typeface="+mn-ea"/>
-              </a:rPr>
-              <a:t>lock_guard</a:t>
-            </a:r>
-            <a:r>
-              <a:rPr lang="zh-CN" altLang="en-US">
-                <a:sym typeface="+mn-ea"/>
-              </a:rPr>
-              <a:t>，而消费者用的是</a:t>
-            </a:r>
-            <a:r>
-              <a:rPr lang="en-US" altLang="zh-CN">
-                <a:sym typeface="+mn-ea"/>
-              </a:rPr>
-              <a:t>unique_lock</a:t>
-            </a:r>
-            <a:r>
-              <a:rPr lang="zh-CN" altLang="en-US">
-                <a:sym typeface="+mn-ea"/>
-              </a:rPr>
-              <a:t>？这俩有什么</a:t>
-            </a:r>
-            <a:r>
-              <a:rPr lang="zh-CN" altLang="en-US">
-                <a:sym typeface="+mn-ea"/>
-              </a:rPr>
-              <a:t>区别？</a:t>
-            </a:r>
-            <a:endParaRPr lang="zh-CN" altLang="en-US">
-              <a:sym typeface="+mn-ea"/>
-            </a:endParaRPr>
-          </a:p>
-          <a:p>
-            <a:pPr indent="457200"/>
-            <a:r>
-              <a:rPr lang="en-US" altLang="zh-CN">
-                <a:sym typeface="+mn-ea"/>
-              </a:rPr>
-              <a:t>lock_guard</a:t>
-            </a:r>
-            <a:r>
-              <a:rPr lang="zh-CN" altLang="en-US">
-                <a:sym typeface="+mn-ea"/>
-              </a:rPr>
-              <a:t>只在作用域生效，进入作用域加锁，离开作用域上锁。</a:t>
-            </a:r>
-            <a:r>
-              <a:rPr lang="en-US" altLang="zh-CN">
-                <a:sym typeface="+mn-ea"/>
-              </a:rPr>
-              <a:t>unique_lock</a:t>
-            </a:r>
-            <a:r>
-              <a:rPr lang="zh-CN" altLang="en-US">
-                <a:sym typeface="+mn-ea"/>
-              </a:rPr>
-              <a:t>则需要自己手动加锁解锁。</a:t>
-            </a:r>
-            <a:r>
-              <a:rPr lang="en-US" altLang="zh-CN">
-                <a:sym typeface="+mn-ea"/>
-              </a:rPr>
-              <a:t>condition_variable</a:t>
-            </a:r>
-            <a:r>
-              <a:rPr lang="zh-CN" altLang="en-US">
-                <a:sym typeface="+mn-ea"/>
-              </a:rPr>
-              <a:t>条件变量的作用就是生产者通知</a:t>
-            </a:r>
-            <a:r>
-              <a:rPr lang="en-US" altLang="zh-CN">
-                <a:sym typeface="+mn-ea"/>
-              </a:rPr>
-              <a:t>(notify)</a:t>
-            </a:r>
-            <a:r>
-              <a:rPr lang="zh-CN" altLang="en-US">
-                <a:sym typeface="+mn-ea"/>
-              </a:rPr>
-              <a:t>，消费者等待</a:t>
-            </a:r>
-            <a:r>
-              <a:rPr lang="en-US" altLang="zh-CN">
-                <a:sym typeface="+mn-ea"/>
-              </a:rPr>
-              <a:t>(wait),</a:t>
-            </a:r>
-            <a:r>
-              <a:rPr lang="zh-CN" altLang="en-US">
-                <a:sym typeface="+mn-ea"/>
-              </a:rPr>
-              <a:t>在</a:t>
-            </a:r>
-            <a:r>
-              <a:rPr lang="en-US" altLang="zh-CN">
-                <a:sym typeface="+mn-ea"/>
-              </a:rPr>
-              <a:t>wait</a:t>
-            </a:r>
-            <a:r>
-              <a:rPr lang="zh-CN" altLang="en-US">
-                <a:sym typeface="+mn-ea"/>
-              </a:rPr>
-              <a:t>时，会完成以下三步：解锁互斥量、休眠等待通知、被唤醒后加锁判断是否满足条件。因为</a:t>
-            </a:r>
-            <a:r>
-              <a:rPr lang="en-US" altLang="zh-CN">
-                <a:sym typeface="+mn-ea"/>
-              </a:rPr>
-              <a:t>lock_guard</a:t>
-            </a:r>
-            <a:r>
-              <a:rPr lang="zh-CN" altLang="en-US">
-                <a:sym typeface="+mn-ea"/>
-              </a:rPr>
-              <a:t>不支持中途解锁和加锁，所以就需要用</a:t>
-            </a:r>
-            <a:r>
-              <a:rPr lang="en-US" altLang="zh-CN">
-                <a:sym typeface="+mn-ea"/>
-              </a:rPr>
-              <a:t>unique_lock</a:t>
-            </a:r>
-            <a:r>
-              <a:rPr lang="zh-CN" altLang="en-US">
-                <a:sym typeface="+mn-ea"/>
-              </a:rPr>
-              <a:t>了。</a:t>
-            </a:r>
-            <a:endParaRPr lang="zh-CN" altLang="en-US">
-              <a:sym typeface="+mn-ea"/>
-            </a:endParaRPr>
-          </a:p>
-          <a:p>
-            <a:pPr indent="457200"/>
-            <a:endParaRPr lang="zh-CN" altLang="en-US">
-              <a:sym typeface="+mn-ea"/>
-            </a:endParaRPr>
+          <a:lstStyle/>
+          <a:p>
+            <a:fld id="{3D7F0B17-20C8-4CBB-BD66-70902ADF39C6}" type="slidenum">
+              <a:rPr lang="zh-CN" altLang="en-US" smtClean="0"/>
+            </a:fld>
+            <a:endParaRPr lang="zh-CN" altLang="en-US"/>
           </a:p>
         </p:txBody>
       </p:sp>
@@ -3478,43 +3700,91 @@
               <a:rPr lang="zh-CN" altLang="en-US">
                 <a:sym typeface="+mn-ea"/>
               </a:rPr>
-              <a:t>好，我们再回来看这一句，为什么要开一个线程去跑</a:t>
-            </a:r>
-            <a:r>
-              <a:rPr lang="en-US" altLang="zh-CN">
-                <a:sym typeface="+mn-ea"/>
-              </a:rPr>
-              <a:t>execute</a:t>
-            </a:r>
-            <a:r>
-              <a:rPr lang="zh-CN" altLang="en-US">
-                <a:sym typeface="+mn-ea"/>
-              </a:rPr>
-              <a:t>？</a:t>
-            </a:r>
-            <a:r>
-              <a:rPr lang="en-US" altLang="zh-CN">
-                <a:sym typeface="+mn-ea"/>
-              </a:rPr>
-              <a:t>execute</a:t>
-            </a:r>
-            <a:r>
-              <a:rPr lang="zh-CN" altLang="en-US">
-                <a:sym typeface="+mn-ea"/>
-              </a:rPr>
-              <a:t>就是我们刚才看的消费者线程。如果不开一个线程的话，那当前的线程又是生产者又是消费者，线程拿到图片去推理之后程序就会一直阻塞到这里了，后面的图片就可能得不到及时的</a:t>
-            </a:r>
-            <a:r>
-              <a:rPr lang="zh-CN" altLang="en-US">
-                <a:sym typeface="+mn-ea"/>
-              </a:rPr>
-              <a:t>处理。所以一个线程存，一个线程取才是</a:t>
-            </a:r>
-            <a:r>
-              <a:rPr lang="zh-CN" altLang="en-US">
-                <a:sym typeface="+mn-ea"/>
-              </a:rPr>
-              <a:t>正解。</a:t>
+              <a:t>我们的</a:t>
+            </a:r>
+            <a:r>
+              <a:rPr lang="en-US" altLang="zh-CN">
+                <a:sym typeface="+mn-ea"/>
+              </a:rPr>
+              <a:t>topic</a:t>
+            </a:r>
+            <a:r>
+              <a:rPr lang="zh-CN" altLang="en-US">
+                <a:sym typeface="+mn-ea"/>
+              </a:rPr>
+              <a:t>是</a:t>
+            </a:r>
+            <a:r>
+              <a:rPr lang="en-US" altLang="zh-CN">
+                <a:sym typeface="+mn-ea"/>
+              </a:rPr>
+              <a:t>thing/product/{device_sn}/services</a:t>
+            </a:r>
+            <a:r>
+              <a:rPr lang="zh-CN" altLang="en-US">
+                <a:sym typeface="+mn-ea"/>
+              </a:rPr>
+              <a:t>，所以走</a:t>
+            </a:r>
+            <a:r>
+              <a:rPr lang="en-US" altLang="zh-CN">
+                <a:sym typeface="+mn-ea"/>
+              </a:rPr>
+              <a:t>handleServiceCommand</a:t>
+            </a:r>
+            <a:r>
+              <a:rPr lang="zh-CN" altLang="en-US">
+                <a:sym typeface="+mn-ea"/>
+              </a:rPr>
+              <a:t>，函数处理</a:t>
+            </a:r>
+            <a:r>
+              <a:rPr lang="en-US" altLang="zh-CN">
+                <a:sym typeface="+mn-ea"/>
+              </a:rPr>
+              <a:t>json</a:t>
+            </a:r>
+            <a:r>
+              <a:rPr lang="zh-CN" altLang="en-US">
+                <a:sym typeface="+mn-ea"/>
+              </a:rPr>
+              <a:t>提取请求内容，根据</a:t>
+            </a:r>
+            <a:r>
+              <a:rPr lang="en-US" altLang="zh-CN">
+                <a:sym typeface="+mn-ea"/>
+              </a:rPr>
+              <a:t>menthod</a:t>
+            </a:r>
+            <a:r>
+              <a:rPr lang="zh-CN" altLang="en-US">
+                <a:sym typeface="+mn-ea"/>
+              </a:rPr>
+              <a:t>来调用相关的处理函数。</a:t>
+            </a:r>
+            <a:r>
+              <a:rPr lang="en-US" altLang="zh-CN">
+                <a:sym typeface="+mn-ea"/>
+              </a:rPr>
+              <a:t>commandHandlers_</a:t>
+            </a:r>
+            <a:r>
+              <a:rPr lang="zh-CN" altLang="en-US">
+                <a:sym typeface="+mn-ea"/>
+              </a:rPr>
+              <a:t>其实就是一个</a:t>
+            </a:r>
+            <a:r>
+              <a:rPr lang="en-US" altLang="zh-CN">
+                <a:sym typeface="+mn-ea"/>
+              </a:rPr>
+              <a:t>map&lt;string,funtion&gt;</a:t>
+            </a:r>
+            <a:r>
+              <a:rPr lang="zh-CN" altLang="en-US">
+                <a:sym typeface="+mn-ea"/>
+              </a:rPr>
+              <a:t>，他存储了所有处理函数。</a:t>
             </a:r>
             <a:endParaRPr lang="zh-CN" altLang="en-US">
               <a:sym typeface="+mn-ea"/>
@@ -3526,211 +3796,67 @@
               <a:rPr lang="zh-CN" altLang="en-US">
                 <a:sym typeface="+mn-ea"/>
               </a:rPr>
-              <a:t>接下来我们去看</a:t>
-            </a:r>
-            <a:r>
-              <a:rPr lang="en-US" altLang="zh-CN">
-                <a:sym typeface="+mn-ea"/>
-              </a:rPr>
-              <a:t>processFile</a:t>
-            </a:r>
-            <a:r>
-              <a:rPr lang="zh-CN" altLang="en-US">
-                <a:sym typeface="+mn-ea"/>
-              </a:rPr>
-              <a:t>，该函数功能是解码图片，解析元数据</a:t>
-            </a:r>
-            <a:r>
-              <a:rPr lang="en-US" altLang="zh-CN">
-                <a:sym typeface="+mn-ea"/>
-              </a:rPr>
-              <a:t>(</a:t>
-            </a:r>
-            <a:r>
-              <a:rPr lang="zh-CN" altLang="en-US">
-                <a:sym typeface="+mn-ea"/>
-              </a:rPr>
-              <a:t>主要是经纬度</a:t>
-            </a:r>
-            <a:r>
-              <a:rPr lang="en-US" altLang="zh-CN">
-                <a:sym typeface="+mn-ea"/>
-              </a:rPr>
-              <a:t>)</a:t>
-            </a:r>
-            <a:r>
-              <a:rPr lang="zh-CN" altLang="en-US">
-                <a:sym typeface="+mn-ea"/>
-              </a:rPr>
-              <a:t>，调用</a:t>
-            </a:r>
-            <a:r>
-              <a:rPr lang="en-US" altLang="zh-CN">
-                <a:sym typeface="+mn-ea"/>
-              </a:rPr>
-              <a:t> TaskService </a:t>
-            </a:r>
-            <a:r>
-              <a:rPr lang="zh-CN" altLang="en-US">
-                <a:sym typeface="+mn-ea"/>
-              </a:rPr>
-              <a:t>进行目标检测。加下来我们看</a:t>
-            </a:r>
-            <a:r>
-              <a:rPr lang="en-US" altLang="zh-CN">
-                <a:sym typeface="+mn-ea"/>
-              </a:rPr>
-              <a:t>processFrame</a:t>
-            </a:r>
-            <a:r>
-              <a:rPr lang="zh-CN" altLang="en-US">
-                <a:sym typeface="+mn-ea"/>
-              </a:rPr>
-              <a:t>里面做了什么，该函数其实就是做了一个判断，下面我们再看看</a:t>
-            </a:r>
-            <a:r>
-              <a:rPr lang="en-US" altLang="zh-CN">
-                <a:sym typeface="+mn-ea"/>
-              </a:rPr>
-              <a:t>processDetection</a:t>
-            </a:r>
-            <a:r>
-              <a:rPr lang="zh-CN" altLang="en-US">
-                <a:sym typeface="+mn-ea"/>
-              </a:rPr>
-              <a:t>里面是如何做的，该函数做了三件事情，执行推理、构建事件和发布事件，我们首先看</a:t>
-            </a:r>
-            <a:r>
-              <a:rPr lang="en-US" altLang="zh-CN">
-                <a:sym typeface="+mn-ea"/>
-              </a:rPr>
-              <a:t>detectObjects</a:t>
-            </a:r>
-            <a:r>
-              <a:rPr lang="zh-CN" altLang="en-US">
-                <a:sym typeface="+mn-ea"/>
-              </a:rPr>
-              <a:t>，函数里面是调用</a:t>
-            </a:r>
-            <a:r>
-              <a:rPr lang="en-US" altLang="zh-CN">
-                <a:sym typeface="+mn-ea"/>
-              </a:rPr>
-              <a:t>detector-&gt;detect(frame);</a:t>
-            </a:r>
-            <a:r>
-              <a:rPr lang="zh-CN" altLang="en-US">
-                <a:sym typeface="+mn-ea"/>
-              </a:rPr>
-              <a:t>来进行推理的，</a:t>
-            </a:r>
-            <a:r>
-              <a:rPr lang="en-US" altLang="zh-CN">
-                <a:sym typeface="+mn-ea"/>
-              </a:rPr>
-              <a:t>detector</a:t>
-            </a:r>
-            <a:r>
-              <a:rPr lang="zh-CN" altLang="en-US">
-                <a:sym typeface="+mn-ea"/>
-              </a:rPr>
-              <a:t>是什么呢，我们这里显示的是</a:t>
-            </a:r>
-            <a:r>
-              <a:rPr lang="en-US" altLang="zh-CN">
-                <a:sym typeface="+mn-ea"/>
-              </a:rPr>
-              <a:t>IDetector</a:t>
-            </a:r>
-            <a:r>
-              <a:rPr lang="zh-CN" altLang="en-US">
-                <a:sym typeface="+mn-ea"/>
-              </a:rPr>
-              <a:t>的对象，为什么点进去是</a:t>
-            </a:r>
-            <a:r>
-              <a:rPr lang="en-US" altLang="zh-CN">
-                <a:sym typeface="+mn-ea"/>
-              </a:rPr>
-              <a:t>ppyoloE</a:t>
-            </a:r>
-            <a:r>
-              <a:rPr lang="zh-CN" altLang="en-US">
-                <a:sym typeface="+mn-ea"/>
-              </a:rPr>
-              <a:t>的</a:t>
-            </a:r>
-            <a:r>
-              <a:rPr lang="en-US" altLang="zh-CN">
-                <a:sym typeface="+mn-ea"/>
-              </a:rPr>
-              <a:t>detector</a:t>
-            </a:r>
-            <a:r>
-              <a:rPr lang="zh-CN" altLang="en-US">
-                <a:sym typeface="+mn-ea"/>
-              </a:rPr>
-              <a:t>函数呢？答案就是在程序进行初始化时就会根据配置文件中的指定字符串来初始化相应的检测器。接下来的预处理，推理，后处理，这些都是常规事情就不再多说了，刚才的消息中只有这几种类别，所以我们要对检测出来的目标进行过滤，只留下指定的类别。过滤就是根据</a:t>
-            </a:r>
-            <a:r>
-              <a:rPr lang="en-US" altLang="zh-CN">
-                <a:sym typeface="+mn-ea"/>
-              </a:rPr>
-              <a:t>coco.names</a:t>
-            </a:r>
-            <a:r>
-              <a:rPr lang="zh-CN" altLang="en-US">
-                <a:sym typeface="+mn-ea"/>
-              </a:rPr>
-              <a:t>将类别转化为</a:t>
-            </a:r>
-            <a:r>
-              <a:rPr lang="en-US" altLang="zh-CN">
-                <a:sym typeface="+mn-ea"/>
-              </a:rPr>
-              <a:t>id</a:t>
-            </a:r>
-            <a:r>
-              <a:rPr lang="zh-CN" altLang="en-US">
-                <a:sym typeface="+mn-ea"/>
-              </a:rPr>
-              <a:t>，如果</a:t>
-            </a:r>
-            <a:r>
-              <a:rPr lang="en-US" altLang="zh-CN">
-                <a:sym typeface="+mn-ea"/>
-              </a:rPr>
-              <a:t>box.classId</a:t>
-            </a:r>
-            <a:r>
-              <a:rPr lang="zh-CN" altLang="en-US">
-                <a:sym typeface="+mn-ea"/>
-              </a:rPr>
-              <a:t>在</a:t>
-            </a:r>
-            <a:r>
-              <a:rPr lang="en-US" altLang="zh-CN">
-                <a:sym typeface="+mn-ea"/>
-              </a:rPr>
-              <a:t>targetClassIds</a:t>
-            </a:r>
-            <a:r>
-              <a:rPr lang="zh-CN" altLang="en-US">
-                <a:sym typeface="+mn-ea"/>
-              </a:rPr>
-              <a:t>里面就说明本次任务包括该目标，可以放进过滤好的</a:t>
-            </a:r>
-            <a:r>
-              <a:rPr lang="en-US" altLang="zh-CN">
-                <a:sym typeface="+mn-ea"/>
-              </a:rPr>
-              <a:t>filtered</a:t>
-            </a:r>
-            <a:r>
-              <a:rPr lang="zh-CN" altLang="en-US">
-                <a:sym typeface="+mn-ea"/>
-              </a:rPr>
-              <a:t>中。</a:t>
+              <a:t>之后数据走向</a:t>
+            </a:r>
+            <a:r>
+              <a:rPr lang="en-US" altLang="zh-CN">
+                <a:sym typeface="+mn-ea"/>
+              </a:rPr>
+              <a:t>handleAlgorithmEnable</a:t>
+            </a:r>
+            <a:r>
+              <a:rPr lang="zh-CN" altLang="en-US">
+                <a:sym typeface="+mn-ea"/>
+              </a:rPr>
+              <a:t>，该函数重点就是启动任务和发送</a:t>
+            </a:r>
+            <a:r>
+              <a:rPr lang="en-US" altLang="zh-CN">
+                <a:sym typeface="+mn-ea"/>
+              </a:rPr>
+              <a:t>device_algorithm_enable</a:t>
+            </a:r>
+            <a:r>
+              <a:rPr lang="zh-CN" altLang="en-US">
+                <a:sym typeface="+mn-ea"/>
+              </a:rPr>
+              <a:t>的应答，</a:t>
+            </a:r>
+            <a:r>
+              <a:rPr lang="en-US" altLang="zh-CN">
+                <a:sym typeface="+mn-ea"/>
+              </a:rPr>
+              <a:t>startTask</a:t>
+            </a:r>
+            <a:r>
+              <a:rPr lang="zh-CN" altLang="en-US">
+                <a:sym typeface="+mn-ea"/>
+              </a:rPr>
+              <a:t>重点就是创建和启动任务，我们先看是如何创建的，这里使用了简单工厂模式来判断。为什么要用简单工厂呢，可以想一下如果我们不用简单工厂，那我们创建、启动、停止任务都要判断是视频流分析任务还是媒体文件分析任务然后再去执行相应的函数，我们这是两个任务还好，如果我们再加几个任务呢，大量的重复代码不说，耦合度会越来越高，代码也会越来越难阅读。但是使用简单工厂之后，我们就只需要在</a:t>
+            </a:r>
+            <a:r>
+              <a:rPr lang="en-US" altLang="zh-CN">
+                <a:sym typeface="+mn-ea"/>
+              </a:rPr>
+              <a:t>switch</a:t>
+            </a:r>
+            <a:r>
+              <a:rPr lang="zh-CN" altLang="en-US">
+                <a:sym typeface="+mn-ea"/>
+              </a:rPr>
+              <a:t>类这里加上自己新增加的任务就可以了。无论是视频流还是媒体文件分析，都去继承</a:t>
+            </a:r>
+            <a:r>
+              <a:rPr lang="en-US" altLang="zh-CN">
+                <a:sym typeface="+mn-ea"/>
+              </a:rPr>
+              <a:t>ITask</a:t>
+            </a:r>
+            <a:r>
+              <a:rPr lang="zh-CN" altLang="en-US">
+                <a:sym typeface="+mn-ea"/>
+              </a:rPr>
+              <a:t>这个类，实现他的接口，这样我们就可以使用统一的函数来实现不同任务的功能了。</a:t>
             </a:r>
             <a:endParaRPr lang="zh-CN" altLang="en-US">
               <a:sym typeface="+mn-ea"/>
@@ -3742,43 +3868,283 @@
               <a:rPr lang="zh-CN" altLang="en-US">
                 <a:sym typeface="+mn-ea"/>
               </a:rPr>
-              <a:t>之后就是构建事件，求经纬度、根据</a:t>
-            </a:r>
-            <a:r>
-              <a:rPr lang="en-US" altLang="zh-CN">
-                <a:sym typeface="+mn-ea"/>
-              </a:rPr>
-              <a:t>bboxes</a:t>
-            </a:r>
-            <a:r>
-              <a:rPr lang="zh-CN" altLang="en-US">
-                <a:sym typeface="+mn-ea"/>
-              </a:rPr>
-              <a:t>绘制可视化图片，构建事件，发布</a:t>
-            </a:r>
-            <a:r>
-              <a:rPr lang="zh-CN" altLang="en-US">
-                <a:sym typeface="+mn-ea"/>
-              </a:rPr>
-              <a:t>事件。</a:t>
-            </a:r>
-            <a:endParaRPr lang="zh-CN" altLang="en-US">
-              <a:sym typeface="+mn-ea"/>
-            </a:endParaRPr>
-          </a:p>
-          <a:p>
-            <a:pPr indent="457200"/>
-            <a:r>
-              <a:rPr lang="zh-CN" altLang="en-US">
-                <a:sym typeface="+mn-ea"/>
-              </a:rPr>
-              <a:t>好，媒体文件分析已经差不多处理完了，我们再来看视频流有哪些</a:t>
-            </a:r>
-            <a:r>
-              <a:rPr lang="zh-CN" altLang="en-US">
-                <a:sym typeface="+mn-ea"/>
-              </a:rPr>
-              <a:t>需要注意的事情。</a:t>
+              <a:t>创建完任务之后</a:t>
+            </a:r>
+            <a:r>
+              <a:rPr lang="en-US" altLang="zh-CN">
+                <a:sym typeface="+mn-ea"/>
+              </a:rPr>
+              <a:t>start</a:t>
+            </a:r>
+            <a:r>
+              <a:rPr lang="zh-CN" altLang="en-US">
+                <a:sym typeface="+mn-ea"/>
+              </a:rPr>
+              <a:t>，事件缓存可以先不用管，因为我也没大看。好，现在来想媒体文件分析的</a:t>
+            </a:r>
+            <a:r>
+              <a:rPr lang="en-US" altLang="zh-CN">
+                <a:sym typeface="+mn-ea"/>
+              </a:rPr>
+              <a:t>start</a:t>
+            </a:r>
+            <a:r>
+              <a:rPr lang="zh-CN" altLang="en-US">
+                <a:sym typeface="+mn-ea"/>
+              </a:rPr>
+              <a:t>需要做什么事情？刚才我们说的程序启动后等待无人机传输数据给机场，机场有了新的数据后状态发生变化，我们的程序就开始拉取图片进行分析，那我们的程序要如何才能知道机场状态发生变化并作出反应呢？对，其实思想和刚才程序收到</a:t>
+            </a:r>
+            <a:r>
+              <a:rPr lang="en-US" altLang="zh-CN">
+                <a:sym typeface="+mn-ea"/>
+              </a:rPr>
+              <a:t>mqtt</a:t>
+            </a:r>
+            <a:r>
+              <a:rPr lang="zh-CN" altLang="en-US">
+                <a:sym typeface="+mn-ea"/>
+              </a:rPr>
+              <a:t>消息并做处理是一样的，回调函数和观察者模式。好，除去事件缓存</a:t>
+            </a:r>
+            <a:r>
+              <a:rPr lang="en-US" altLang="zh-CN">
+                <a:sym typeface="+mn-ea"/>
+              </a:rPr>
+              <a:t>start</a:t>
+            </a:r>
+            <a:r>
+              <a:rPr lang="zh-CN" altLang="en-US">
+                <a:sym typeface="+mn-ea"/>
+              </a:rPr>
+              <a:t>做的第一件事就是</a:t>
+            </a:r>
+            <a:r>
+              <a:rPr lang="en-US" altLang="zh-CN">
+                <a:sym typeface="+mn-ea"/>
+              </a:rPr>
+              <a:t>registerMediaFilesObserver</a:t>
+            </a:r>
+            <a:r>
+              <a:rPr lang="zh-CN" altLang="en-US">
+                <a:sym typeface="+mn-ea"/>
+              </a:rPr>
+              <a:t>注册观察者，我们来看她是怎么注册的，首先获取</a:t>
+            </a:r>
+            <a:r>
+              <a:rPr lang="en-US" altLang="zh-CN">
+                <a:sym typeface="+mn-ea"/>
+              </a:rPr>
+              <a:t>MediaManager</a:t>
+            </a:r>
+            <a:r>
+              <a:rPr lang="zh-CN" altLang="en-US">
+                <a:sym typeface="+mn-ea"/>
+              </a:rPr>
+              <a:t>的实例，</a:t>
+            </a:r>
+            <a:r>
+              <a:rPr lang="en-US" altLang="zh-CN">
+                <a:sym typeface="+mn-ea"/>
+              </a:rPr>
+              <a:t>edge_sdk</a:t>
+            </a:r>
+            <a:r>
+              <a:rPr lang="zh-CN" altLang="en-US">
+                <a:sym typeface="+mn-ea"/>
+              </a:rPr>
+              <a:t>开头的都是大疆</a:t>
+            </a:r>
+            <a:r>
+              <a:rPr lang="en-US" altLang="zh-CN">
+                <a:sym typeface="+mn-ea"/>
+              </a:rPr>
+              <a:t>edge_sdk</a:t>
+            </a:r>
+            <a:r>
+              <a:rPr lang="zh-CN" altLang="en-US">
+                <a:sym typeface="+mn-ea"/>
+              </a:rPr>
+              <a:t>的内容，我们只需要知道他们的函数是做什么用的就可以了。</a:t>
+            </a:r>
+            <a:r>
+              <a:rPr lang="en-US" altLang="zh-CN">
+                <a:sym typeface="+mn-ea"/>
+              </a:rPr>
+              <a:t>MediaManager</a:t>
+            </a:r>
+            <a:r>
+              <a:rPr lang="zh-CN" altLang="en-US">
+                <a:sym typeface="+mn-ea"/>
+              </a:rPr>
+              <a:t>功能就是管理机场的文件。这边写的</a:t>
+            </a:r>
+            <a:r>
+              <a:rPr lang="en-US" altLang="zh-CN">
+                <a:sym typeface="+mn-ea"/>
+              </a:rPr>
+              <a:t>observer</a:t>
+            </a:r>
+            <a:r>
+              <a:rPr lang="zh-CN" altLang="en-US">
+                <a:sym typeface="+mn-ea"/>
+              </a:rPr>
+              <a:t>是一个函数，我们可以看一下这个</a:t>
+            </a:r>
+            <a:r>
+              <a:rPr lang="en-US" altLang="zh-CN">
+                <a:sym typeface="+mn-ea"/>
+              </a:rPr>
+              <a:t>lambda</a:t>
+            </a:r>
+            <a:r>
+              <a:rPr lang="zh-CN" altLang="en-US">
+                <a:sym typeface="+mn-ea"/>
+              </a:rPr>
+              <a:t>表达式，</a:t>
+            </a:r>
+            <a:r>
+              <a:rPr lang="en-US" altLang="zh-CN">
+                <a:sym typeface="+mn-ea"/>
+              </a:rPr>
+              <a:t>[this]</a:t>
+            </a:r>
+            <a:r>
+              <a:rPr lang="zh-CN" altLang="en-US">
+                <a:sym typeface="+mn-ea"/>
+              </a:rPr>
+              <a:t>中的</a:t>
+            </a:r>
+            <a:r>
+              <a:rPr lang="en-US" altLang="zh-CN">
+                <a:sym typeface="+mn-ea"/>
+              </a:rPr>
+              <a:t>[]</a:t>
+            </a:r>
+            <a:r>
+              <a:rPr lang="zh-CN" altLang="en-US">
+                <a:sym typeface="+mn-ea"/>
+              </a:rPr>
+              <a:t>叫做捕获列表，表示</a:t>
+            </a:r>
+            <a:r>
+              <a:rPr lang="en-US" altLang="zh-CN">
+                <a:sym typeface="+mn-ea"/>
+              </a:rPr>
+              <a:t>lambda</a:t>
+            </a:r>
+            <a:r>
+              <a:rPr lang="zh-CN" altLang="en-US">
+                <a:sym typeface="+mn-ea"/>
+              </a:rPr>
+              <a:t>需要访问外部</a:t>
+            </a:r>
+            <a:r>
+              <a:rPr lang="en-US" altLang="zh-CN">
+                <a:sym typeface="+mn-ea"/>
+              </a:rPr>
+              <a:t>(</a:t>
+            </a:r>
+            <a:r>
+              <a:rPr lang="zh-CN" altLang="en-US">
+                <a:sym typeface="+mn-ea"/>
+              </a:rPr>
+              <a:t>即包含这个</a:t>
+            </a:r>
+            <a:r>
+              <a:rPr lang="en-US" altLang="zh-CN">
+                <a:sym typeface="+mn-ea"/>
+              </a:rPr>
+              <a:t>lambda</a:t>
+            </a:r>
+            <a:r>
+              <a:rPr lang="zh-CN" altLang="en-US">
+                <a:sym typeface="+mn-ea"/>
+              </a:rPr>
+              <a:t>的函数或类）的哪些变量。</a:t>
+            </a:r>
+            <a:r>
+              <a:rPr lang="en-US" altLang="zh-CN">
+                <a:sym typeface="+mn-ea"/>
+              </a:rPr>
+              <a:t>[this]</a:t>
+            </a:r>
+            <a:r>
+              <a:rPr lang="zh-CN" altLang="en-US">
+                <a:sym typeface="+mn-ea"/>
+              </a:rPr>
+              <a:t>就表示</a:t>
+            </a:r>
+            <a:r>
+              <a:rPr lang="en-US" altLang="zh-CN">
+                <a:sym typeface="+mn-ea"/>
+              </a:rPr>
+              <a:t>lambda</a:t>
+            </a:r>
+            <a:r>
+              <a:rPr lang="zh-CN" altLang="en-US">
+                <a:sym typeface="+mn-ea"/>
+              </a:rPr>
+              <a:t>可以像当前对象一样访问所有的成员。</a:t>
+            </a:r>
+            <a:r>
+              <a:rPr lang="en-US" altLang="zh-CN">
+                <a:sym typeface="+mn-ea"/>
+              </a:rPr>
+              <a:t>const edge_sdk::MediaFile&amp; file</a:t>
+            </a:r>
+            <a:r>
+              <a:rPr lang="zh-CN" altLang="en-US">
+                <a:sym typeface="+mn-ea"/>
+              </a:rPr>
+              <a:t>是参数，</a:t>
+            </a:r>
+            <a:r>
+              <a:rPr lang="en-US" altLang="zh-CN">
+                <a:sym typeface="+mn-ea"/>
+              </a:rPr>
+              <a:t>edge_sdk::ErrorCode</a:t>
+            </a:r>
+            <a:r>
+              <a:rPr lang="zh-CN" altLang="en-US">
+                <a:sym typeface="+mn-ea"/>
+              </a:rPr>
+              <a:t>是返回值。</a:t>
+            </a:r>
+            <a:r>
+              <a:rPr lang="en-US" altLang="zh-CN">
+                <a:sym typeface="+mn-ea"/>
+              </a:rPr>
+              <a:t>mediaManager_-&gt;RegisterMediaFilesObserver(observer)</a:t>
+            </a:r>
+            <a:r>
+              <a:rPr lang="zh-CN" altLang="en-US">
+                <a:sym typeface="+mn-ea"/>
+              </a:rPr>
+              <a:t>就是将</a:t>
+            </a:r>
+            <a:r>
+              <a:rPr lang="en-US" altLang="zh-CN">
+                <a:sym typeface="+mn-ea"/>
+              </a:rPr>
+              <a:t>observer</a:t>
+            </a:r>
+            <a:r>
+              <a:rPr lang="zh-CN" altLang="en-US">
+                <a:sym typeface="+mn-ea"/>
+              </a:rPr>
+              <a:t>注册成了观察者，说白了就是图片更新就会调用</a:t>
+            </a:r>
+            <a:r>
+              <a:rPr lang="en-US" altLang="zh-CN">
+                <a:sym typeface="+mn-ea"/>
+              </a:rPr>
+              <a:t>observer</a:t>
+            </a:r>
+            <a:r>
+              <a:rPr lang="zh-CN" altLang="en-US">
+                <a:sym typeface="+mn-ea"/>
+              </a:rPr>
+              <a:t>这个函数。</a:t>
             </a:r>
             <a:endParaRPr lang="zh-CN" altLang="en-US">
               <a:sym typeface="+mn-ea"/>
@@ -4311,6 +4677,295 @@
             <a:fld id="{565CE74E-AB26-4998-AD42-012C4C1AD076}" type="slidenum">
               <a:rPr lang="zh-CN" altLang="en-US" smtClean="0"/>
             </a:fld>
+            <a:endParaRPr lang="zh-CN" altLang="en-US"/>
+          </a:p>
+        </p:txBody>
+      </p:sp>
+    </p:spTree>
+  </p:cSld>
+  <p:clrMapOvr>
+    <a:masterClrMapping/>
+  </p:clrMapOvr>
+</p:sldLayout>
+</file>
+
+<file path=ppt/slideLayouts/slideLayout12.xml><?xml version="1.0" encoding="utf-8"?>
+<p:sldLayout xmlns:a="http://schemas.openxmlformats.org/drawingml/2006/main" xmlns:r="http://schemas.openxmlformats.org/officeDocument/2006/relationships" xmlns:p="http://schemas.openxmlformats.org/presentationml/2006/main" preserve="1" userDrawn="1">
+  <p:cSld name="6_自定义版式">
+    <p:spTree>
+      <p:nvGrpSpPr>
+        <p:cNvPr id="1" name=""/>
+        <p:cNvGrpSpPr/>
+        <p:nvPr/>
+      </p:nvGrpSpPr>
+      <p:grpSpPr>
+        <a:xfrm>
+          <a:off x="0" y="0"/>
+          <a:ext cx="0" cy="0"/>
+          <a:chOff x="0" y="0"/>
+          <a:chExt cx="0" cy="0"/>
+        </a:xfrm>
+      </p:grpSpPr>
+      <p:sp>
+        <p:nvSpPr>
+          <p:cNvPr id="10" name="图片占位符 9"/>
+          <p:cNvSpPr>
+            <a:spLocks noGrp="1"/>
+          </p:cNvSpPr>
+          <p:nvPr>
+            <p:ph type="pic" sz="quarter" idx="10"/>
+          </p:nvPr>
+        </p:nvSpPr>
+        <p:spPr>
+          <a:xfrm>
+            <a:off x="1413036" y="1986039"/>
+            <a:ext cx="2864878" cy="2456948"/>
+          </a:xfrm>
+          <a:custGeom>
+            <a:avLst/>
+            <a:gdLst>
+              <a:gd name="connsiteX0" fmla="*/ 614238 w 2864878"/>
+              <a:gd name="connsiteY0" fmla="*/ 0 h 2456948"/>
+              <a:gd name="connsiteX1" fmla="*/ 2250641 w 2864878"/>
+              <a:gd name="connsiteY1" fmla="*/ 0 h 2456948"/>
+              <a:gd name="connsiteX2" fmla="*/ 2864878 w 2864878"/>
+              <a:gd name="connsiteY2" fmla="*/ 1228474 h 2456948"/>
+              <a:gd name="connsiteX3" fmla="*/ 2250641 w 2864878"/>
+              <a:gd name="connsiteY3" fmla="*/ 2456948 h 2456948"/>
+              <a:gd name="connsiteX4" fmla="*/ 614238 w 2864878"/>
+              <a:gd name="connsiteY4" fmla="*/ 2456948 h 2456948"/>
+              <a:gd name="connsiteX5" fmla="*/ 0 w 2864878"/>
+              <a:gd name="connsiteY5" fmla="*/ 1228474 h 2456948"/>
+            </a:gdLst>
+            <a:ahLst/>
+            <a:cxnLst>
+              <a:cxn ang="0">
+                <a:pos x="connsiteX0" y="connsiteY0"/>
+              </a:cxn>
+              <a:cxn ang="0">
+                <a:pos x="connsiteX1" y="connsiteY1"/>
+              </a:cxn>
+              <a:cxn ang="0">
+                <a:pos x="connsiteX2" y="connsiteY2"/>
+              </a:cxn>
+              <a:cxn ang="0">
+                <a:pos x="connsiteX3" y="connsiteY3"/>
+              </a:cxn>
+              <a:cxn ang="0">
+                <a:pos x="connsiteX4" y="connsiteY4"/>
+              </a:cxn>
+              <a:cxn ang="0">
+                <a:pos x="connsiteX5" y="connsiteY5"/>
+              </a:cxn>
+            </a:cxnLst>
+            <a:rect l="l" t="t" r="r" b="b"/>
+            <a:pathLst>
+              <a:path w="2864878" h="2456948">
+                <a:moveTo>
+                  <a:pt x="614238" y="0"/>
+                </a:moveTo>
+                <a:lnTo>
+                  <a:pt x="2250641" y="0"/>
+                </a:lnTo>
+                <a:lnTo>
+                  <a:pt x="2864878" y="1228474"/>
+                </a:lnTo>
+                <a:lnTo>
+                  <a:pt x="2250641" y="2456948"/>
+                </a:lnTo>
+                <a:lnTo>
+                  <a:pt x="614238" y="2456948"/>
+                </a:lnTo>
+                <a:lnTo>
+                  <a:pt x="0" y="1228474"/>
+                </a:lnTo>
+                <a:close/>
+              </a:path>
+            </a:pathLst>
+          </a:custGeom>
+        </p:spPr>
+        <p:txBody>
+          <a:bodyPr wrap="square">
+            <a:noAutofit/>
+          </a:bodyPr>
+          <a:lstStyle/>
+          <a:p>
+            <a:endParaRPr lang="zh-CN" altLang="en-US"/>
+          </a:p>
+        </p:txBody>
+      </p:sp>
+      <p:sp>
+        <p:nvSpPr>
+          <p:cNvPr id="11" name="图片占位符 10"/>
+          <p:cNvSpPr>
+            <a:spLocks noGrp="1"/>
+          </p:cNvSpPr>
+          <p:nvPr>
+            <p:ph type="pic" sz="quarter" idx="11"/>
+          </p:nvPr>
+        </p:nvSpPr>
+        <p:spPr>
+          <a:xfrm>
+            <a:off x="4670586" y="1986039"/>
+            <a:ext cx="2864878" cy="2456948"/>
+          </a:xfrm>
+          <a:custGeom>
+            <a:avLst/>
+            <a:gdLst>
+              <a:gd name="connsiteX0" fmla="*/ 614238 w 2864878"/>
+              <a:gd name="connsiteY0" fmla="*/ 0 h 2456948"/>
+              <a:gd name="connsiteX1" fmla="*/ 2250641 w 2864878"/>
+              <a:gd name="connsiteY1" fmla="*/ 0 h 2456948"/>
+              <a:gd name="connsiteX2" fmla="*/ 2864878 w 2864878"/>
+              <a:gd name="connsiteY2" fmla="*/ 1228474 h 2456948"/>
+              <a:gd name="connsiteX3" fmla="*/ 2250641 w 2864878"/>
+              <a:gd name="connsiteY3" fmla="*/ 2456948 h 2456948"/>
+              <a:gd name="connsiteX4" fmla="*/ 614238 w 2864878"/>
+              <a:gd name="connsiteY4" fmla="*/ 2456948 h 2456948"/>
+              <a:gd name="connsiteX5" fmla="*/ 0 w 2864878"/>
+              <a:gd name="connsiteY5" fmla="*/ 1228474 h 2456948"/>
+            </a:gdLst>
+            <a:ahLst/>
+            <a:cxnLst>
+              <a:cxn ang="0">
+                <a:pos x="connsiteX0" y="connsiteY0"/>
+              </a:cxn>
+              <a:cxn ang="0">
+                <a:pos x="connsiteX1" y="connsiteY1"/>
+              </a:cxn>
+              <a:cxn ang="0">
+                <a:pos x="connsiteX2" y="connsiteY2"/>
+              </a:cxn>
+              <a:cxn ang="0">
+                <a:pos x="connsiteX3" y="connsiteY3"/>
+              </a:cxn>
+              <a:cxn ang="0">
+                <a:pos x="connsiteX4" y="connsiteY4"/>
+              </a:cxn>
+              <a:cxn ang="0">
+                <a:pos x="connsiteX5" y="connsiteY5"/>
+              </a:cxn>
+            </a:cxnLst>
+            <a:rect l="l" t="t" r="r" b="b"/>
+            <a:pathLst>
+              <a:path w="2864878" h="2456948">
+                <a:moveTo>
+                  <a:pt x="614238" y="0"/>
+                </a:moveTo>
+                <a:lnTo>
+                  <a:pt x="2250641" y="0"/>
+                </a:lnTo>
+                <a:lnTo>
+                  <a:pt x="2864878" y="1228474"/>
+                </a:lnTo>
+                <a:lnTo>
+                  <a:pt x="2250641" y="2456948"/>
+                </a:lnTo>
+                <a:lnTo>
+                  <a:pt x="614238" y="2456948"/>
+                </a:lnTo>
+                <a:lnTo>
+                  <a:pt x="0" y="1228474"/>
+                </a:lnTo>
+                <a:close/>
+              </a:path>
+            </a:pathLst>
+          </a:custGeom>
+        </p:spPr>
+        <p:txBody>
+          <a:bodyPr wrap="square">
+            <a:noAutofit/>
+          </a:bodyPr>
+          <a:lstStyle/>
+          <a:p>
+            <a:endParaRPr lang="zh-CN" altLang="en-US"/>
+          </a:p>
+        </p:txBody>
+      </p:sp>
+      <p:sp>
+        <p:nvSpPr>
+          <p:cNvPr id="12" name="图片占位符 11"/>
+          <p:cNvSpPr>
+            <a:spLocks noGrp="1"/>
+          </p:cNvSpPr>
+          <p:nvPr>
+            <p:ph type="pic" sz="quarter" idx="12"/>
+          </p:nvPr>
+        </p:nvSpPr>
+        <p:spPr>
+          <a:xfrm>
+            <a:off x="7928136" y="1986039"/>
+            <a:ext cx="2864878" cy="2456948"/>
+          </a:xfrm>
+          <a:custGeom>
+            <a:avLst/>
+            <a:gdLst>
+              <a:gd name="connsiteX0" fmla="*/ 614238 w 2864878"/>
+              <a:gd name="connsiteY0" fmla="*/ 0 h 2456948"/>
+              <a:gd name="connsiteX1" fmla="*/ 2250641 w 2864878"/>
+              <a:gd name="connsiteY1" fmla="*/ 0 h 2456948"/>
+              <a:gd name="connsiteX2" fmla="*/ 2864878 w 2864878"/>
+              <a:gd name="connsiteY2" fmla="*/ 1228474 h 2456948"/>
+              <a:gd name="connsiteX3" fmla="*/ 2250641 w 2864878"/>
+              <a:gd name="connsiteY3" fmla="*/ 2456948 h 2456948"/>
+              <a:gd name="connsiteX4" fmla="*/ 614238 w 2864878"/>
+              <a:gd name="connsiteY4" fmla="*/ 2456948 h 2456948"/>
+              <a:gd name="connsiteX5" fmla="*/ 0 w 2864878"/>
+              <a:gd name="connsiteY5" fmla="*/ 1228474 h 2456948"/>
+            </a:gdLst>
+            <a:ahLst/>
+            <a:cxnLst>
+              <a:cxn ang="0">
+                <a:pos x="connsiteX0" y="connsiteY0"/>
+              </a:cxn>
+              <a:cxn ang="0">
+                <a:pos x="connsiteX1" y="connsiteY1"/>
+              </a:cxn>
+              <a:cxn ang="0">
+                <a:pos x="connsiteX2" y="connsiteY2"/>
+              </a:cxn>
+              <a:cxn ang="0">
+                <a:pos x="connsiteX3" y="connsiteY3"/>
+              </a:cxn>
+              <a:cxn ang="0">
+                <a:pos x="connsiteX4" y="connsiteY4"/>
+              </a:cxn>
+              <a:cxn ang="0">
+                <a:pos x="connsiteX5" y="connsiteY5"/>
+              </a:cxn>
+            </a:cxnLst>
+            <a:rect l="l" t="t" r="r" b="b"/>
+            <a:pathLst>
+              <a:path w="2864878" h="2456948">
+                <a:moveTo>
+                  <a:pt x="614238" y="0"/>
+                </a:moveTo>
+                <a:lnTo>
+                  <a:pt x="2250641" y="0"/>
+                </a:lnTo>
+                <a:lnTo>
+                  <a:pt x="2864878" y="1228474"/>
+                </a:lnTo>
+                <a:lnTo>
+                  <a:pt x="2250641" y="2456948"/>
+                </a:lnTo>
+                <a:lnTo>
+                  <a:pt x="614238" y="2456948"/>
+                </a:lnTo>
+                <a:lnTo>
+                  <a:pt x="0" y="1228474"/>
+                </a:lnTo>
+                <a:close/>
+              </a:path>
+            </a:pathLst>
+          </a:custGeom>
+        </p:spPr>
+        <p:txBody>
+          <a:bodyPr wrap="square">
+            <a:noAutofit/>
+          </a:bodyPr>
+          <a:lstStyle/>
+          <a:p>
             <a:endParaRPr lang="zh-CN" altLang="en-US"/>
           </a:p>
         </p:txBody>
@@ -6307,6 +6962,7 @@
     <p:sldLayoutId id="2147483657" r:id="rId9"/>
     <p:sldLayoutId id="2147483658" r:id="rId10"/>
     <p:sldLayoutId id="2147483659" r:id="rId11"/>
+    <p:sldLayoutId id="2147483660" r:id="rId12"/>
   </p:sldLayoutIdLst>
   <p:txStyles>
     <p:titleStyle>
@@ -7656,7 +8312,13 @@
           <p:nvPr/>
         </p:nvPicPr>
         <p:blipFill>
-          <a:blip/>
+          <a:blip r:embed="rId1">
+            <a:extLst>
+              <a:ext uri="{96DAC541-7B7A-43D3-8B79-37D633B846F1}">
+                <asvg:svgBlip xmlns:asvg="http://schemas.microsoft.com/office/drawing/2016/SVG/main" r:embed="rId2"/>
+              </a:ext>
+            </a:extLst>
+          </a:blip>
           <a:stretch>
             <a:fillRect/>
           </a:stretch>
@@ -7680,7 +8342,13 @@
           <p:nvPr/>
         </p:nvPicPr>
         <p:blipFill>
-          <a:blip/>
+          <a:blip r:embed="rId3">
+            <a:extLst>
+              <a:ext uri="{96DAC541-7B7A-43D3-8B79-37D633B846F1}">
+                <asvg:svgBlip xmlns:asvg="http://schemas.microsoft.com/office/drawing/2016/SVG/main" r:embed="rId4"/>
+              </a:ext>
+            </a:extLst>
+          </a:blip>
           <a:stretch>
             <a:fillRect/>
           </a:stretch>
@@ -8158,6 +8826,1058 @@
 </file>
 
 <file path=ppt/slides/slide11.xml><?xml version="1.0" encoding="utf-8"?>
+<p:sld xmlns:a="http://schemas.openxmlformats.org/drawingml/2006/main" xmlns:r="http://schemas.openxmlformats.org/officeDocument/2006/relationships" xmlns:p="http://schemas.openxmlformats.org/presentationml/2006/main">
+  <p:cSld>
+    <p:spTree>
+      <p:nvGrpSpPr>
+        <p:cNvPr id="1" name=""/>
+        <p:cNvGrpSpPr/>
+        <p:nvPr/>
+      </p:nvGrpSpPr>
+      <p:grpSpPr/>
+      <p:pic>
+        <p:nvPicPr>
+          <p:cNvPr id="3" name="图片 2" descr="画家"/>
+          <p:cNvPicPr>
+            <a:picLocks noChangeAspect="1"/>
+          </p:cNvPicPr>
+          <p:nvPr/>
+        </p:nvPicPr>
+        <p:blipFill>
+          <a:blip r:embed="rId1">
+            <a:extLst>
+              <a:ext uri="{96DAC541-7B7A-43D3-8B79-37D633B846F1}">
+                <asvg:svgBlip xmlns:asvg="http://schemas.microsoft.com/office/drawing/2016/SVG/main" r:embed="rId2"/>
+              </a:ext>
+            </a:extLst>
+          </a:blip>
+          <a:stretch>
+            <a:fillRect/>
+          </a:stretch>
+        </p:blipFill>
+        <p:spPr>
+          <a:xfrm>
+            <a:off x="1480820" y="1743075"/>
+            <a:ext cx="918000" cy="918000"/>
+          </a:xfrm>
+          <a:prstGeom prst="rect">
+            <a:avLst/>
+          </a:prstGeom>
+        </p:spPr>
+      </p:pic>
+      <p:pic>
+        <p:nvPicPr>
+          <p:cNvPr id="12" name="图片 11" descr="厨师"/>
+          <p:cNvPicPr>
+            <a:picLocks noChangeAspect="1"/>
+          </p:cNvPicPr>
+          <p:nvPr/>
+        </p:nvPicPr>
+        <p:blipFill>
+          <a:blip r:embed="rId3">
+            <a:extLst>
+              <a:ext uri="{96DAC541-7B7A-43D3-8B79-37D633B846F1}">
+                <asvg:svgBlip xmlns:asvg="http://schemas.microsoft.com/office/drawing/2016/SVG/main" r:embed="rId4"/>
+              </a:ext>
+            </a:extLst>
+          </a:blip>
+          <a:stretch>
+            <a:fillRect/>
+          </a:stretch>
+        </p:blipFill>
+        <p:spPr>
+          <a:xfrm>
+            <a:off x="5636895" y="1743075"/>
+            <a:ext cx="918210" cy="918210"/>
+          </a:xfrm>
+          <a:prstGeom prst="rect">
+            <a:avLst/>
+          </a:prstGeom>
+        </p:spPr>
+      </p:pic>
+      <p:sp>
+        <p:nvSpPr>
+          <p:cNvPr id="5" name="圆角矩形 4"/>
+          <p:cNvSpPr/>
+          <p:nvPr/>
+        </p:nvSpPr>
+        <p:spPr>
+          <a:xfrm>
+            <a:off x="3189605" y="723900"/>
+            <a:ext cx="1657350" cy="3733800"/>
+          </a:xfrm>
+          <a:prstGeom prst="roundRect">
+            <a:avLst/>
+          </a:prstGeom>
+        </p:spPr>
+        <p:style>
+          <a:lnRef idx="2">
+            <a:schemeClr val="accent1">
+              <a:lumMod val="75000"/>
+            </a:schemeClr>
+          </a:lnRef>
+          <a:fillRef idx="1">
+            <a:schemeClr val="accent1"/>
+          </a:fillRef>
+          <a:effectRef idx="0">
+            <a:srgbClr val="FFFFFF"/>
+          </a:effectRef>
+          <a:fontRef idx="minor">
+            <a:schemeClr val="lt1"/>
+          </a:fontRef>
+        </p:style>
+        <p:txBody>
+          <a:bodyPr rtlCol="0" anchor="ctr"/>
+          <a:p>
+            <a:pPr algn="ctr"/>
+            <a:endParaRPr lang="zh-CN" altLang="en-US"/>
+          </a:p>
+        </p:txBody>
+      </p:sp>
+      <p:sp>
+        <p:nvSpPr>
+          <p:cNvPr id="6" name="矩形 5"/>
+          <p:cNvSpPr/>
+          <p:nvPr/>
+        </p:nvSpPr>
+        <p:spPr>
+          <a:xfrm>
+            <a:off x="3489325" y="876300"/>
+            <a:ext cx="1057910" cy="591185"/>
+          </a:xfrm>
+          <a:prstGeom prst="rect">
+            <a:avLst/>
+          </a:prstGeom>
+          <a:solidFill>
+            <a:schemeClr val="accent5">
+              <a:lumMod val="60000"/>
+              <a:lumOff val="40000"/>
+            </a:schemeClr>
+          </a:solidFill>
+          <a:ln>
+            <a:noFill/>
+          </a:ln>
+        </p:spPr>
+        <p:style>
+          <a:lnRef idx="2">
+            <a:schemeClr val="accent1">
+              <a:lumMod val="75000"/>
+            </a:schemeClr>
+          </a:lnRef>
+          <a:fillRef idx="1">
+            <a:schemeClr val="accent1"/>
+          </a:fillRef>
+          <a:effectRef idx="0">
+            <a:srgbClr val="FFFFFF"/>
+          </a:effectRef>
+          <a:fontRef idx="minor">
+            <a:schemeClr val="lt1"/>
+          </a:fontRef>
+        </p:style>
+        <p:txBody>
+          <a:bodyPr rtlCol="0" anchor="ctr"/>
+          <a:p>
+            <a:pPr algn="ctr"/>
+            <a:r>
+              <a:rPr lang="zh-CN" altLang="en-US"/>
+              <a:t>图片</a:t>
+            </a:r>
+            <a:endParaRPr lang="zh-CN" altLang="en-US"/>
+          </a:p>
+        </p:txBody>
+      </p:sp>
+      <p:sp>
+        <p:nvSpPr>
+          <p:cNvPr id="10" name="矩形 9"/>
+          <p:cNvSpPr/>
+          <p:nvPr/>
+        </p:nvSpPr>
+        <p:spPr>
+          <a:xfrm>
+            <a:off x="3489325" y="1743075"/>
+            <a:ext cx="1057910" cy="591185"/>
+          </a:xfrm>
+          <a:prstGeom prst="rect">
+            <a:avLst/>
+          </a:prstGeom>
+          <a:solidFill>
+            <a:schemeClr val="accent5">
+              <a:lumMod val="60000"/>
+              <a:lumOff val="40000"/>
+            </a:schemeClr>
+          </a:solidFill>
+          <a:ln>
+            <a:noFill/>
+          </a:ln>
+        </p:spPr>
+        <p:style>
+          <a:lnRef idx="2">
+            <a:schemeClr val="accent1">
+              <a:lumMod val="75000"/>
+            </a:schemeClr>
+          </a:lnRef>
+          <a:fillRef idx="1">
+            <a:schemeClr val="accent1"/>
+          </a:fillRef>
+          <a:effectRef idx="0">
+            <a:srgbClr val="FFFFFF"/>
+          </a:effectRef>
+          <a:fontRef idx="minor">
+            <a:schemeClr val="lt1"/>
+          </a:fontRef>
+        </p:style>
+        <p:txBody>
+          <a:bodyPr rtlCol="0" anchor="ctr"/>
+          <a:p>
+            <a:pPr algn="ctr"/>
+            <a:r>
+              <a:rPr lang="zh-CN" altLang="en-US"/>
+              <a:t>图片</a:t>
+            </a:r>
+            <a:endParaRPr lang="zh-CN" altLang="en-US"/>
+          </a:p>
+        </p:txBody>
+      </p:sp>
+      <p:sp>
+        <p:nvSpPr>
+          <p:cNvPr id="11" name="矩形 10"/>
+          <p:cNvSpPr/>
+          <p:nvPr/>
+        </p:nvSpPr>
+        <p:spPr>
+          <a:xfrm>
+            <a:off x="3488690" y="2609850"/>
+            <a:ext cx="1057910" cy="591185"/>
+          </a:xfrm>
+          <a:prstGeom prst="rect">
+            <a:avLst/>
+          </a:prstGeom>
+          <a:solidFill>
+            <a:schemeClr val="accent5">
+              <a:lumMod val="60000"/>
+              <a:lumOff val="40000"/>
+            </a:schemeClr>
+          </a:solidFill>
+          <a:ln>
+            <a:noFill/>
+          </a:ln>
+        </p:spPr>
+        <p:style>
+          <a:lnRef idx="2">
+            <a:schemeClr val="accent1">
+              <a:lumMod val="75000"/>
+            </a:schemeClr>
+          </a:lnRef>
+          <a:fillRef idx="1">
+            <a:schemeClr val="accent1"/>
+          </a:fillRef>
+          <a:effectRef idx="0">
+            <a:srgbClr val="FFFFFF"/>
+          </a:effectRef>
+          <a:fontRef idx="minor">
+            <a:schemeClr val="lt1"/>
+          </a:fontRef>
+        </p:style>
+        <p:txBody>
+          <a:bodyPr rtlCol="0" anchor="ctr"/>
+          <a:p>
+            <a:pPr algn="ctr"/>
+            <a:r>
+              <a:rPr lang="zh-CN" altLang="en-US"/>
+              <a:t>图片</a:t>
+            </a:r>
+            <a:endParaRPr lang="zh-CN" altLang="en-US"/>
+          </a:p>
+        </p:txBody>
+      </p:sp>
+      <p:sp>
+        <p:nvSpPr>
+          <p:cNvPr id="14" name="矩形 13"/>
+          <p:cNvSpPr/>
+          <p:nvPr/>
+        </p:nvSpPr>
+        <p:spPr>
+          <a:xfrm>
+            <a:off x="3489325" y="3476625"/>
+            <a:ext cx="1057910" cy="591185"/>
+          </a:xfrm>
+          <a:prstGeom prst="rect">
+            <a:avLst/>
+          </a:prstGeom>
+          <a:solidFill>
+            <a:schemeClr val="accent5">
+              <a:lumMod val="60000"/>
+              <a:lumOff val="40000"/>
+            </a:schemeClr>
+          </a:solidFill>
+          <a:ln>
+            <a:noFill/>
+          </a:ln>
+        </p:spPr>
+        <p:style>
+          <a:lnRef idx="2">
+            <a:schemeClr val="accent1">
+              <a:lumMod val="75000"/>
+            </a:schemeClr>
+          </a:lnRef>
+          <a:fillRef idx="1">
+            <a:schemeClr val="accent1"/>
+          </a:fillRef>
+          <a:effectRef idx="0">
+            <a:srgbClr val="FFFFFF"/>
+          </a:effectRef>
+          <a:fontRef idx="minor">
+            <a:schemeClr val="lt1"/>
+          </a:fontRef>
+        </p:style>
+        <p:txBody>
+          <a:bodyPr rtlCol="0" anchor="ctr"/>
+          <a:p>
+            <a:pPr algn="ctr"/>
+            <a:r>
+              <a:rPr lang="zh-CN" altLang="en-US"/>
+              <a:t>图片</a:t>
+            </a:r>
+            <a:endParaRPr lang="zh-CN" altLang="en-US"/>
+          </a:p>
+        </p:txBody>
+      </p:sp>
+      <p:cxnSp>
+        <p:nvCxnSpPr>
+          <p:cNvPr id="15" name="直接箭头连接符 14"/>
+          <p:cNvCxnSpPr>
+            <a:stCxn id="3" idx="3"/>
+          </p:cNvCxnSpPr>
+          <p:nvPr/>
+        </p:nvCxnSpPr>
+        <p:spPr>
+          <a:xfrm>
+            <a:off x="2399030" y="2202180"/>
+            <a:ext cx="1001395" cy="1455420"/>
+          </a:xfrm>
+          <a:prstGeom prst="straightConnector1">
+            <a:avLst/>
+          </a:prstGeom>
+          <a:ln>
+            <a:solidFill>
+              <a:srgbClr val="FF0000"/>
+            </a:solidFill>
+            <a:tailEnd type="arrow"/>
+          </a:ln>
+        </p:spPr>
+        <p:style>
+          <a:lnRef idx="2">
+            <a:schemeClr val="accent1"/>
+          </a:lnRef>
+          <a:fillRef idx="0">
+            <a:srgbClr val="FFFFFF"/>
+          </a:fillRef>
+          <a:effectRef idx="0">
+            <a:srgbClr val="FFFFFF"/>
+          </a:effectRef>
+          <a:fontRef idx="minor">
+            <a:schemeClr val="tx1"/>
+          </a:fontRef>
+        </p:style>
+      </p:cxnSp>
+      <p:sp>
+        <p:nvSpPr>
+          <p:cNvPr id="16" name="文本框 15"/>
+          <p:cNvSpPr txBox="1"/>
+          <p:nvPr/>
+        </p:nvSpPr>
+        <p:spPr>
+          <a:xfrm>
+            <a:off x="1121410" y="2661285"/>
+            <a:ext cx="1589405" cy="654050"/>
+          </a:xfrm>
+          <a:prstGeom prst="rect">
+            <a:avLst/>
+          </a:prstGeom>
+          <a:noFill/>
+        </p:spPr>
+        <p:txBody>
+          <a:bodyPr wrap="square" rtlCol="0">
+            <a:noAutofit/>
+          </a:bodyPr>
+          <a:p>
+            <a:r>
+              <a:rPr lang="zh-CN" altLang="en-US" sz="1400"/>
+              <a:t>放入图片，并通知检测</a:t>
+            </a:r>
+            <a:r>
+              <a:rPr lang="zh-CN" altLang="en-US" sz="1400"/>
+              <a:t>线程</a:t>
+            </a:r>
+            <a:endParaRPr lang="zh-CN" altLang="en-US" sz="1400"/>
+          </a:p>
+        </p:txBody>
+      </p:sp>
+      <p:sp>
+        <p:nvSpPr>
+          <p:cNvPr id="17" name="文本框 16"/>
+          <p:cNvSpPr txBox="1"/>
+          <p:nvPr/>
+        </p:nvSpPr>
+        <p:spPr>
+          <a:xfrm>
+            <a:off x="4951730" y="1137285"/>
+            <a:ext cx="1008380" cy="330200"/>
+          </a:xfrm>
+          <a:prstGeom prst="rect">
+            <a:avLst/>
+          </a:prstGeom>
+          <a:noFill/>
+        </p:spPr>
+        <p:txBody>
+          <a:bodyPr wrap="square" rtlCol="0">
+            <a:noAutofit/>
+          </a:bodyPr>
+          <a:p>
+            <a:r>
+              <a:rPr lang="zh-CN" altLang="en-US" sz="1400"/>
+              <a:t>拿走图片</a:t>
+            </a:r>
+            <a:endParaRPr lang="zh-CN" altLang="en-US" sz="1400"/>
+          </a:p>
+        </p:txBody>
+      </p:sp>
+      <p:cxnSp>
+        <p:nvCxnSpPr>
+          <p:cNvPr id="18" name="直接箭头连接符 17"/>
+          <p:cNvCxnSpPr>
+            <a:endCxn id="12" idx="1"/>
+          </p:cNvCxnSpPr>
+          <p:nvPr/>
+        </p:nvCxnSpPr>
+        <p:spPr>
+          <a:xfrm>
+            <a:off x="4546600" y="1021080"/>
+            <a:ext cx="1090295" cy="1181100"/>
+          </a:xfrm>
+          <a:prstGeom prst="straightConnector1">
+            <a:avLst/>
+          </a:prstGeom>
+          <a:ln>
+            <a:solidFill>
+              <a:srgbClr val="FF0000"/>
+            </a:solidFill>
+            <a:tailEnd type="arrow"/>
+          </a:ln>
+        </p:spPr>
+        <p:style>
+          <a:lnRef idx="2">
+            <a:schemeClr val="accent1"/>
+          </a:lnRef>
+          <a:fillRef idx="0">
+            <a:srgbClr val="FFFFFF"/>
+          </a:fillRef>
+          <a:effectRef idx="0">
+            <a:srgbClr val="FFFFFF"/>
+          </a:effectRef>
+          <a:fontRef idx="minor">
+            <a:schemeClr val="tx1"/>
+          </a:fontRef>
+        </p:style>
+      </p:cxnSp>
+      <p:sp>
+        <p:nvSpPr>
+          <p:cNvPr id="20" name="椭圆形标注 19"/>
+          <p:cNvSpPr/>
+          <p:nvPr/>
+        </p:nvSpPr>
+        <p:spPr>
+          <a:xfrm>
+            <a:off x="1896110" y="1021080"/>
+            <a:ext cx="1188720" cy="579120"/>
+          </a:xfrm>
+          <a:prstGeom prst="wedgeEllipseCallout">
+            <a:avLst>
+              <a:gd name="adj1" fmla="val -43910"/>
+              <a:gd name="adj2" fmla="val 66447"/>
+            </a:avLst>
+          </a:prstGeom>
+        </p:spPr>
+        <p:style>
+          <a:lnRef idx="2">
+            <a:schemeClr val="accent1"/>
+          </a:lnRef>
+          <a:fillRef idx="0">
+            <a:srgbClr val="FFFFFF"/>
+          </a:fillRef>
+          <a:effectRef idx="0">
+            <a:srgbClr val="FFFFFF"/>
+          </a:effectRef>
+          <a:fontRef idx="minor">
+            <a:schemeClr val="tx1"/>
+          </a:fontRef>
+        </p:style>
+        <p:txBody>
+          <a:bodyPr rtlCol="0" anchor="ctr"/>
+          <a:p>
+            <a:pPr algn="ctr"/>
+            <a:endParaRPr lang="zh-CN" altLang="en-US"/>
+          </a:p>
+        </p:txBody>
+      </p:sp>
+      <p:sp>
+        <p:nvSpPr>
+          <p:cNvPr id="22" name="文本框 21"/>
+          <p:cNvSpPr txBox="1"/>
+          <p:nvPr/>
+        </p:nvSpPr>
+        <p:spPr>
+          <a:xfrm>
+            <a:off x="2125345" y="1137285"/>
+            <a:ext cx="959485" cy="275590"/>
+          </a:xfrm>
+          <a:prstGeom prst="rect">
+            <a:avLst/>
+          </a:prstGeom>
+          <a:noFill/>
+        </p:spPr>
+        <p:txBody>
+          <a:bodyPr wrap="square" rtlCol="0">
+            <a:spAutoFit/>
+          </a:bodyPr>
+          <a:p>
+            <a:r>
+              <a:rPr lang="zh-CN" altLang="en-US" sz="1200"/>
+              <a:t>该干活啦</a:t>
+            </a:r>
+            <a:endParaRPr lang="zh-CN" altLang="en-US" sz="1200"/>
+          </a:p>
+        </p:txBody>
+      </p:sp>
+    </p:spTree>
+  </p:cSld>
+  <p:clrMapOvr>
+    <a:masterClrMapping/>
+  </p:clrMapOvr>
+</p:sld>
+</file>
+
+<file path=ppt/slides/slide12.xml><?xml version="1.0" encoding="utf-8"?>
+<p:sld xmlns:a="http://schemas.openxmlformats.org/drawingml/2006/main" xmlns:r="http://schemas.openxmlformats.org/officeDocument/2006/relationships" xmlns:p="http://schemas.openxmlformats.org/presentationml/2006/main">
+  <p:cSld>
+    <p:spTree>
+      <p:nvGrpSpPr>
+        <p:cNvPr id="1" name=""/>
+        <p:cNvGrpSpPr/>
+        <p:nvPr/>
+      </p:nvGrpSpPr>
+      <p:grpSpPr/>
+      <p:pic>
+        <p:nvPicPr>
+          <p:cNvPr id="3" name="图片 2" descr="画家"/>
+          <p:cNvPicPr>
+            <a:picLocks noChangeAspect="1"/>
+          </p:cNvPicPr>
+          <p:nvPr/>
+        </p:nvPicPr>
+        <p:blipFill>
+          <a:blip/>
+          <a:stretch>
+            <a:fillRect/>
+          </a:stretch>
+        </p:blipFill>
+        <p:spPr>
+          <a:xfrm>
+            <a:off x="1480820" y="1743075"/>
+            <a:ext cx="918000" cy="918000"/>
+          </a:xfrm>
+          <a:prstGeom prst="rect">
+            <a:avLst/>
+          </a:prstGeom>
+        </p:spPr>
+      </p:pic>
+      <p:pic>
+        <p:nvPicPr>
+          <p:cNvPr id="12" name="图片 11" descr="厨师"/>
+          <p:cNvPicPr>
+            <a:picLocks noChangeAspect="1"/>
+          </p:cNvPicPr>
+          <p:nvPr/>
+        </p:nvPicPr>
+        <p:blipFill>
+          <a:blip/>
+          <a:stretch>
+            <a:fillRect/>
+          </a:stretch>
+        </p:blipFill>
+        <p:spPr>
+          <a:xfrm>
+            <a:off x="5636895" y="1743075"/>
+            <a:ext cx="918210" cy="918210"/>
+          </a:xfrm>
+          <a:prstGeom prst="rect">
+            <a:avLst/>
+          </a:prstGeom>
+        </p:spPr>
+      </p:pic>
+      <p:sp>
+        <p:nvSpPr>
+          <p:cNvPr id="5" name="圆角矩形 4"/>
+          <p:cNvSpPr/>
+          <p:nvPr/>
+        </p:nvSpPr>
+        <p:spPr>
+          <a:xfrm>
+            <a:off x="3189605" y="723900"/>
+            <a:ext cx="1657350" cy="3733800"/>
+          </a:xfrm>
+          <a:prstGeom prst="roundRect">
+            <a:avLst/>
+          </a:prstGeom>
+        </p:spPr>
+        <p:style>
+          <a:lnRef idx="2">
+            <a:schemeClr val="accent1">
+              <a:lumMod val="75000"/>
+            </a:schemeClr>
+          </a:lnRef>
+          <a:fillRef idx="1">
+            <a:schemeClr val="accent1"/>
+          </a:fillRef>
+          <a:effectRef idx="0">
+            <a:srgbClr val="FFFFFF"/>
+          </a:effectRef>
+          <a:fontRef idx="minor">
+            <a:schemeClr val="lt1"/>
+          </a:fontRef>
+        </p:style>
+        <p:txBody>
+          <a:bodyPr rtlCol="0" anchor="ctr"/>
+          <a:p>
+            <a:pPr algn="ctr"/>
+            <a:endParaRPr lang="zh-CN" altLang="en-US"/>
+          </a:p>
+        </p:txBody>
+      </p:sp>
+      <p:sp>
+        <p:nvSpPr>
+          <p:cNvPr id="6" name="矩形 5"/>
+          <p:cNvSpPr/>
+          <p:nvPr/>
+        </p:nvSpPr>
+        <p:spPr>
+          <a:xfrm>
+            <a:off x="3489325" y="876300"/>
+            <a:ext cx="1057910" cy="591185"/>
+          </a:xfrm>
+          <a:prstGeom prst="rect">
+            <a:avLst/>
+          </a:prstGeom>
+          <a:solidFill>
+            <a:schemeClr val="accent5">
+              <a:lumMod val="60000"/>
+              <a:lumOff val="40000"/>
+            </a:schemeClr>
+          </a:solidFill>
+          <a:ln>
+            <a:noFill/>
+          </a:ln>
+        </p:spPr>
+        <p:style>
+          <a:lnRef idx="2">
+            <a:schemeClr val="accent1">
+              <a:lumMod val="75000"/>
+            </a:schemeClr>
+          </a:lnRef>
+          <a:fillRef idx="1">
+            <a:schemeClr val="accent1"/>
+          </a:fillRef>
+          <a:effectRef idx="0">
+            <a:srgbClr val="FFFFFF"/>
+          </a:effectRef>
+          <a:fontRef idx="minor">
+            <a:schemeClr val="lt1"/>
+          </a:fontRef>
+        </p:style>
+        <p:txBody>
+          <a:bodyPr rtlCol="0" anchor="ctr"/>
+          <a:p>
+            <a:pPr algn="ctr"/>
+            <a:r>
+              <a:rPr lang="zh-CN" altLang="en-US"/>
+              <a:t>图片</a:t>
+            </a:r>
+            <a:endParaRPr lang="zh-CN" altLang="en-US"/>
+          </a:p>
+        </p:txBody>
+      </p:sp>
+      <p:sp>
+        <p:nvSpPr>
+          <p:cNvPr id="10" name="矩形 9"/>
+          <p:cNvSpPr/>
+          <p:nvPr/>
+        </p:nvSpPr>
+        <p:spPr>
+          <a:xfrm>
+            <a:off x="3489325" y="1743075"/>
+            <a:ext cx="1057910" cy="591185"/>
+          </a:xfrm>
+          <a:prstGeom prst="rect">
+            <a:avLst/>
+          </a:prstGeom>
+          <a:solidFill>
+            <a:schemeClr val="accent5">
+              <a:lumMod val="60000"/>
+              <a:lumOff val="40000"/>
+            </a:schemeClr>
+          </a:solidFill>
+          <a:ln>
+            <a:noFill/>
+          </a:ln>
+        </p:spPr>
+        <p:style>
+          <a:lnRef idx="2">
+            <a:schemeClr val="accent1">
+              <a:lumMod val="75000"/>
+            </a:schemeClr>
+          </a:lnRef>
+          <a:fillRef idx="1">
+            <a:schemeClr val="accent1"/>
+          </a:fillRef>
+          <a:effectRef idx="0">
+            <a:srgbClr val="FFFFFF"/>
+          </a:effectRef>
+          <a:fontRef idx="minor">
+            <a:schemeClr val="lt1"/>
+          </a:fontRef>
+        </p:style>
+        <p:txBody>
+          <a:bodyPr rtlCol="0" anchor="ctr"/>
+          <a:p>
+            <a:pPr algn="ctr"/>
+            <a:r>
+              <a:rPr lang="zh-CN" altLang="en-US"/>
+              <a:t>图片</a:t>
+            </a:r>
+            <a:endParaRPr lang="zh-CN" altLang="en-US"/>
+          </a:p>
+        </p:txBody>
+      </p:sp>
+      <p:sp>
+        <p:nvSpPr>
+          <p:cNvPr id="11" name="矩形 10"/>
+          <p:cNvSpPr/>
+          <p:nvPr/>
+        </p:nvSpPr>
+        <p:spPr>
+          <a:xfrm>
+            <a:off x="3488690" y="2609850"/>
+            <a:ext cx="1057910" cy="591185"/>
+          </a:xfrm>
+          <a:prstGeom prst="rect">
+            <a:avLst/>
+          </a:prstGeom>
+          <a:solidFill>
+            <a:schemeClr val="accent5">
+              <a:lumMod val="60000"/>
+              <a:lumOff val="40000"/>
+            </a:schemeClr>
+          </a:solidFill>
+          <a:ln>
+            <a:noFill/>
+          </a:ln>
+        </p:spPr>
+        <p:style>
+          <a:lnRef idx="2">
+            <a:schemeClr val="accent1">
+              <a:lumMod val="75000"/>
+            </a:schemeClr>
+          </a:lnRef>
+          <a:fillRef idx="1">
+            <a:schemeClr val="accent1"/>
+          </a:fillRef>
+          <a:effectRef idx="0">
+            <a:srgbClr val="FFFFFF"/>
+          </a:effectRef>
+          <a:fontRef idx="minor">
+            <a:schemeClr val="lt1"/>
+          </a:fontRef>
+        </p:style>
+        <p:txBody>
+          <a:bodyPr rtlCol="0" anchor="ctr"/>
+          <a:p>
+            <a:pPr algn="ctr"/>
+            <a:r>
+              <a:rPr lang="zh-CN" altLang="en-US"/>
+              <a:t>图片</a:t>
+            </a:r>
+            <a:endParaRPr lang="zh-CN" altLang="en-US"/>
+          </a:p>
+        </p:txBody>
+      </p:sp>
+      <p:sp>
+        <p:nvSpPr>
+          <p:cNvPr id="14" name="矩形 13"/>
+          <p:cNvSpPr/>
+          <p:nvPr/>
+        </p:nvSpPr>
+        <p:spPr>
+          <a:xfrm>
+            <a:off x="3489325" y="3476625"/>
+            <a:ext cx="1057910" cy="591185"/>
+          </a:xfrm>
+          <a:prstGeom prst="rect">
+            <a:avLst/>
+          </a:prstGeom>
+          <a:solidFill>
+            <a:schemeClr val="accent5">
+              <a:lumMod val="60000"/>
+              <a:lumOff val="40000"/>
+            </a:schemeClr>
+          </a:solidFill>
+          <a:ln>
+            <a:noFill/>
+          </a:ln>
+        </p:spPr>
+        <p:style>
+          <a:lnRef idx="2">
+            <a:schemeClr val="accent1">
+              <a:lumMod val="75000"/>
+            </a:schemeClr>
+          </a:lnRef>
+          <a:fillRef idx="1">
+            <a:schemeClr val="accent1"/>
+          </a:fillRef>
+          <a:effectRef idx="0">
+            <a:srgbClr val="FFFFFF"/>
+          </a:effectRef>
+          <a:fontRef idx="minor">
+            <a:schemeClr val="lt1"/>
+          </a:fontRef>
+        </p:style>
+        <p:txBody>
+          <a:bodyPr rtlCol="0" anchor="ctr"/>
+          <a:p>
+            <a:pPr algn="ctr"/>
+            <a:r>
+              <a:rPr lang="zh-CN" altLang="en-US"/>
+              <a:t>图片</a:t>
+            </a:r>
+            <a:endParaRPr lang="zh-CN" altLang="en-US"/>
+          </a:p>
+        </p:txBody>
+      </p:sp>
+      <p:cxnSp>
+        <p:nvCxnSpPr>
+          <p:cNvPr id="15" name="直接箭头连接符 14"/>
+          <p:cNvCxnSpPr>
+            <a:stCxn id="3" idx="3"/>
+          </p:cNvCxnSpPr>
+          <p:nvPr/>
+        </p:nvCxnSpPr>
+        <p:spPr>
+          <a:xfrm>
+            <a:off x="2399030" y="2202180"/>
+            <a:ext cx="1001395" cy="1455420"/>
+          </a:xfrm>
+          <a:prstGeom prst="straightConnector1">
+            <a:avLst/>
+          </a:prstGeom>
+          <a:ln>
+            <a:solidFill>
+              <a:srgbClr val="FF0000"/>
+            </a:solidFill>
+            <a:tailEnd type="arrow"/>
+          </a:ln>
+        </p:spPr>
+        <p:style>
+          <a:lnRef idx="2">
+            <a:schemeClr val="accent1"/>
+          </a:lnRef>
+          <a:fillRef idx="0">
+            <a:srgbClr val="FFFFFF"/>
+          </a:fillRef>
+          <a:effectRef idx="0">
+            <a:srgbClr val="FFFFFF"/>
+          </a:effectRef>
+          <a:fontRef idx="minor">
+            <a:schemeClr val="tx1"/>
+          </a:fontRef>
+        </p:style>
+      </p:cxnSp>
+      <p:sp>
+        <p:nvSpPr>
+          <p:cNvPr id="16" name="文本框 15"/>
+          <p:cNvSpPr txBox="1"/>
+          <p:nvPr/>
+        </p:nvSpPr>
+        <p:spPr>
+          <a:xfrm>
+            <a:off x="1121410" y="2661285"/>
+            <a:ext cx="1589405" cy="654050"/>
+          </a:xfrm>
+          <a:prstGeom prst="rect">
+            <a:avLst/>
+          </a:prstGeom>
+          <a:noFill/>
+        </p:spPr>
+        <p:txBody>
+          <a:bodyPr wrap="square" rtlCol="0">
+            <a:noAutofit/>
+          </a:bodyPr>
+          <a:p>
+            <a:r>
+              <a:rPr lang="zh-CN" altLang="en-US" sz="1400"/>
+              <a:t>放入图片，并通知检测</a:t>
+            </a:r>
+            <a:r>
+              <a:rPr lang="zh-CN" altLang="en-US" sz="1400"/>
+              <a:t>线程</a:t>
+            </a:r>
+            <a:endParaRPr lang="zh-CN" altLang="en-US" sz="1400"/>
+          </a:p>
+        </p:txBody>
+      </p:sp>
+      <p:sp>
+        <p:nvSpPr>
+          <p:cNvPr id="17" name="文本框 16"/>
+          <p:cNvSpPr txBox="1"/>
+          <p:nvPr/>
+        </p:nvSpPr>
+        <p:spPr>
+          <a:xfrm>
+            <a:off x="4951730" y="1137285"/>
+            <a:ext cx="1008380" cy="330200"/>
+          </a:xfrm>
+          <a:prstGeom prst="rect">
+            <a:avLst/>
+          </a:prstGeom>
+          <a:noFill/>
+        </p:spPr>
+        <p:txBody>
+          <a:bodyPr wrap="square" rtlCol="0">
+            <a:noAutofit/>
+          </a:bodyPr>
+          <a:p>
+            <a:r>
+              <a:rPr lang="zh-CN" altLang="en-US" sz="1400"/>
+              <a:t>拿走图片</a:t>
+            </a:r>
+            <a:endParaRPr lang="zh-CN" altLang="en-US" sz="1400"/>
+          </a:p>
+        </p:txBody>
+      </p:sp>
+      <p:cxnSp>
+        <p:nvCxnSpPr>
+          <p:cNvPr id="18" name="直接箭头连接符 17"/>
+          <p:cNvCxnSpPr>
+            <a:endCxn id="12" idx="1"/>
+          </p:cNvCxnSpPr>
+          <p:nvPr/>
+        </p:nvCxnSpPr>
+        <p:spPr>
+          <a:xfrm>
+            <a:off x="4546600" y="1021080"/>
+            <a:ext cx="1090295" cy="1181100"/>
+          </a:xfrm>
+          <a:prstGeom prst="straightConnector1">
+            <a:avLst/>
+          </a:prstGeom>
+          <a:ln>
+            <a:solidFill>
+              <a:srgbClr val="FF0000"/>
+            </a:solidFill>
+            <a:tailEnd type="arrow"/>
+          </a:ln>
+        </p:spPr>
+        <p:style>
+          <a:lnRef idx="2">
+            <a:schemeClr val="accent1"/>
+          </a:lnRef>
+          <a:fillRef idx="0">
+            <a:srgbClr val="FFFFFF"/>
+          </a:fillRef>
+          <a:effectRef idx="0">
+            <a:srgbClr val="FFFFFF"/>
+          </a:effectRef>
+          <a:fontRef idx="minor">
+            <a:schemeClr val="tx1"/>
+          </a:fontRef>
+        </p:style>
+      </p:cxnSp>
+      <p:sp>
+        <p:nvSpPr>
+          <p:cNvPr id="20" name="椭圆形标注 19"/>
+          <p:cNvSpPr/>
+          <p:nvPr/>
+        </p:nvSpPr>
+        <p:spPr>
+          <a:xfrm>
+            <a:off x="1896110" y="1021080"/>
+            <a:ext cx="1188720" cy="579120"/>
+          </a:xfrm>
+          <a:prstGeom prst="wedgeEllipseCallout">
+            <a:avLst>
+              <a:gd name="adj1" fmla="val -43910"/>
+              <a:gd name="adj2" fmla="val 66447"/>
+            </a:avLst>
+          </a:prstGeom>
+        </p:spPr>
+        <p:style>
+          <a:lnRef idx="2">
+            <a:schemeClr val="accent1"/>
+          </a:lnRef>
+          <a:fillRef idx="0">
+            <a:srgbClr val="FFFFFF"/>
+          </a:fillRef>
+          <a:effectRef idx="0">
+            <a:srgbClr val="FFFFFF"/>
+          </a:effectRef>
+          <a:fontRef idx="minor">
+            <a:schemeClr val="tx1"/>
+          </a:fontRef>
+        </p:style>
+        <p:txBody>
+          <a:bodyPr rtlCol="0" anchor="ctr"/>
+          <a:p>
+            <a:pPr algn="ctr"/>
+            <a:endParaRPr lang="zh-CN" altLang="en-US"/>
+          </a:p>
+        </p:txBody>
+      </p:sp>
+      <p:sp>
+        <p:nvSpPr>
+          <p:cNvPr id="22" name="文本框 21"/>
+          <p:cNvSpPr txBox="1"/>
+          <p:nvPr/>
+        </p:nvSpPr>
+        <p:spPr>
+          <a:xfrm>
+            <a:off x="2125345" y="1137285"/>
+            <a:ext cx="959485" cy="275590"/>
+          </a:xfrm>
+          <a:prstGeom prst="rect">
+            <a:avLst/>
+          </a:prstGeom>
+          <a:noFill/>
+        </p:spPr>
+        <p:txBody>
+          <a:bodyPr wrap="square" rtlCol="0">
+            <a:spAutoFit/>
+          </a:bodyPr>
+          <a:p>
+            <a:r>
+              <a:rPr lang="zh-CN" altLang="en-US" sz="1200"/>
+              <a:t>该干活啦</a:t>
+            </a:r>
+            <a:endParaRPr lang="zh-CN" altLang="en-US" sz="1200"/>
+          </a:p>
+        </p:txBody>
+      </p:sp>
+    </p:spTree>
+  </p:cSld>
+  <p:clrMapOvr>
+    <a:masterClrMapping/>
+  </p:clrMapOvr>
+</p:sld>
+</file>
+
+<file path=ppt/slides/slide13.xml><?xml version="1.0" encoding="utf-8"?>
 <p:sld xmlns:a="http://schemas.openxmlformats.org/drawingml/2006/main" xmlns:r="http://schemas.openxmlformats.org/officeDocument/2006/relationships" xmlns:p="http://schemas.openxmlformats.org/presentationml/2006/main">
   <p:cSld>
     <p:spTree>
@@ -10642,6 +12362,2297 @@
         <p:cNvGrpSpPr/>
         <p:nvPr/>
       </p:nvGrpSpPr>
+      <p:grpSpPr>
+        <a:xfrm>
+          <a:off x="0" y="0"/>
+          <a:ext cx="0" cy="0"/>
+          <a:chOff x="0" y="0"/>
+          <a:chExt cx="0" cy="0"/>
+        </a:xfrm>
+      </p:grpSpPr>
+      <p:sp>
+        <p:nvSpPr>
+          <p:cNvPr id="24" name="文本框 23"/>
+          <p:cNvSpPr txBox="1"/>
+          <p:nvPr/>
+        </p:nvSpPr>
+        <p:spPr>
+          <a:xfrm>
+            <a:off x="1990028" y="266857"/>
+            <a:ext cx="4506661" cy="545534"/>
+          </a:xfrm>
+          <a:prstGeom prst="rect">
+            <a:avLst/>
+          </a:prstGeom>
+          <a:noFill/>
+        </p:spPr>
+        <p:txBody>
+          <a:bodyPr wrap="square" rtlCol="0">
+            <a:spAutoFit/>
+            <a:scene3d>
+              <a:camera prst="orthographicFront"/>
+              <a:lightRig rig="threePt" dir="t"/>
+            </a:scene3d>
+            <a:sp3d contourW="12700"/>
+          </a:bodyPr>
+          <a:lstStyle/>
+          <a:p>
+            <a:pPr>
+              <a:lnSpc>
+                <a:spcPct val="114000"/>
+              </a:lnSpc>
+            </a:pPr>
+            <a:r>
+              <a:rPr lang="zh-CN" altLang="en-US" sz="2800" b="1" dirty="0">
+                <a:solidFill>
+                  <a:srgbClr val="152E52"/>
+                </a:solidFill>
+                <a:ea typeface="+mj-ea"/>
+              </a:rPr>
+              <a:t>研究思路</a:t>
+            </a:r>
+            <a:endParaRPr lang="zh-CN" altLang="en-US" sz="2800" b="1" dirty="0">
+              <a:solidFill>
+                <a:srgbClr val="152E52"/>
+              </a:solidFill>
+              <a:ea typeface="+mj-ea"/>
+            </a:endParaRPr>
+          </a:p>
+        </p:txBody>
+      </p:sp>
+      <p:sp>
+        <p:nvSpPr>
+          <p:cNvPr id="3" name="灯片编号占位符 14"/>
+          <p:cNvSpPr>
+            <a:spLocks noGrp="1"/>
+          </p:cNvSpPr>
+          <p:nvPr/>
+        </p:nvSpPr>
+        <p:spPr>
+          <a:xfrm>
+            <a:off x="8610600" y="6356350"/>
+            <a:ext cx="2743200" cy="365125"/>
+          </a:xfrm>
+          <a:prstGeom prst="rect">
+            <a:avLst/>
+          </a:prstGeom>
+        </p:spPr>
+        <p:txBody>
+          <a:bodyPr vert="horz" lIns="91440" tIns="45720" rIns="91440" bIns="45720" rtlCol="0" anchor="ctr"/>
+          <a:lstStyle>
+            <a:defPPr>
+              <a:defRPr lang="en-US"/>
+            </a:defPPr>
+            <a:lvl1pPr marL="0" algn="r" defTabSz="914400" rtl="0" eaLnBrk="1" latinLnBrk="0" hangingPunct="1">
+              <a:defRPr sz="1200" kern="1200">
+                <a:solidFill>
+                  <a:schemeClr val="tx1">
+                    <a:tint val="75000"/>
+                  </a:schemeClr>
+                </a:solidFill>
+                <a:latin typeface="+mn-lt"/>
+                <a:ea typeface="+mn-ea"/>
+                <a:cs typeface="+mn-cs"/>
+              </a:defRPr>
+            </a:lvl1pPr>
+            <a:lvl2pPr marL="457200" algn="l" defTabSz="914400" rtl="0" eaLnBrk="1" latinLnBrk="0" hangingPunct="1">
+              <a:defRPr sz="1800" kern="1200">
+                <a:solidFill>
+                  <a:schemeClr val="tx1"/>
+                </a:solidFill>
+                <a:latin typeface="+mn-lt"/>
+                <a:ea typeface="+mn-ea"/>
+                <a:cs typeface="+mn-cs"/>
+              </a:defRPr>
+            </a:lvl2pPr>
+            <a:lvl3pPr marL="914400" algn="l" defTabSz="914400" rtl="0" eaLnBrk="1" latinLnBrk="0" hangingPunct="1">
+              <a:defRPr sz="1800" kern="1200">
+                <a:solidFill>
+                  <a:schemeClr val="tx1"/>
+                </a:solidFill>
+                <a:latin typeface="+mn-lt"/>
+                <a:ea typeface="+mn-ea"/>
+                <a:cs typeface="+mn-cs"/>
+              </a:defRPr>
+            </a:lvl3pPr>
+            <a:lvl4pPr marL="1371600" algn="l" defTabSz="914400" rtl="0" eaLnBrk="1" latinLnBrk="0" hangingPunct="1">
+              <a:defRPr sz="1800" kern="1200">
+                <a:solidFill>
+                  <a:schemeClr val="tx1"/>
+                </a:solidFill>
+                <a:latin typeface="+mn-lt"/>
+                <a:ea typeface="+mn-ea"/>
+                <a:cs typeface="+mn-cs"/>
+              </a:defRPr>
+            </a:lvl4pPr>
+            <a:lvl5pPr marL="1828800" algn="l" defTabSz="914400" rtl="0" eaLnBrk="1" latinLnBrk="0" hangingPunct="1">
+              <a:defRPr sz="1800" kern="1200">
+                <a:solidFill>
+                  <a:schemeClr val="tx1"/>
+                </a:solidFill>
+                <a:latin typeface="+mn-lt"/>
+                <a:ea typeface="+mn-ea"/>
+                <a:cs typeface="+mn-cs"/>
+              </a:defRPr>
+            </a:lvl5pPr>
+            <a:lvl6pPr marL="2286000" algn="l" defTabSz="914400" rtl="0" eaLnBrk="1" latinLnBrk="0" hangingPunct="1">
+              <a:defRPr sz="1800" kern="1200">
+                <a:solidFill>
+                  <a:schemeClr val="tx1"/>
+                </a:solidFill>
+                <a:latin typeface="+mn-lt"/>
+                <a:ea typeface="+mn-ea"/>
+                <a:cs typeface="+mn-cs"/>
+              </a:defRPr>
+            </a:lvl6pPr>
+            <a:lvl7pPr marL="2743200" algn="l" defTabSz="914400" rtl="0" eaLnBrk="1" latinLnBrk="0" hangingPunct="1">
+              <a:defRPr sz="1800" kern="1200">
+                <a:solidFill>
+                  <a:schemeClr val="tx1"/>
+                </a:solidFill>
+                <a:latin typeface="+mn-lt"/>
+                <a:ea typeface="+mn-ea"/>
+                <a:cs typeface="+mn-cs"/>
+              </a:defRPr>
+            </a:lvl7pPr>
+            <a:lvl8pPr marL="3200400" algn="l" defTabSz="914400" rtl="0" eaLnBrk="1" latinLnBrk="0" hangingPunct="1">
+              <a:defRPr sz="1800" kern="1200">
+                <a:solidFill>
+                  <a:schemeClr val="tx1"/>
+                </a:solidFill>
+                <a:latin typeface="+mn-lt"/>
+                <a:ea typeface="+mn-ea"/>
+                <a:cs typeface="+mn-cs"/>
+              </a:defRPr>
+            </a:lvl8pPr>
+            <a:lvl9pPr marL="3657600" algn="l" defTabSz="914400" rtl="0" eaLnBrk="1" latinLnBrk="0" hangingPunct="1">
+              <a:defRPr sz="1800" kern="1200">
+                <a:solidFill>
+                  <a:schemeClr val="tx1"/>
+                </a:solidFill>
+                <a:latin typeface="+mn-lt"/>
+                <a:ea typeface="+mn-ea"/>
+                <a:cs typeface="+mn-cs"/>
+              </a:defRPr>
+            </a:lvl9pPr>
+          </a:lstStyle>
+          <a:p>
+            <a:fld id="{8F8706B9-C4D9-4918-81D4-F2158A241B80}" type="slidenum">
+              <a:rPr lang="zh-CN" altLang="en-US" smtClean="0"/>
+            </a:fld>
+            <a:r>
+              <a:rPr lang="en-US" altLang="zh-CN" dirty="0"/>
+              <a:t>/18</a:t>
+            </a:r>
+            <a:endParaRPr lang="zh-CN" altLang="en-US" dirty="0"/>
+          </a:p>
+        </p:txBody>
+      </p:sp>
+      <p:sp>
+        <p:nvSpPr>
+          <p:cNvPr id="2" name="箭头: 右 2"/>
+          <p:cNvSpPr/>
+          <p:nvPr/>
+        </p:nvSpPr>
+        <p:spPr>
+          <a:xfrm rot="5400000">
+            <a:off x="2240303" y="2582498"/>
+            <a:ext cx="349641" cy="405442"/>
+          </a:xfrm>
+          <a:prstGeom prst="rightArrow">
+            <a:avLst/>
+          </a:prstGeom>
+          <a:solidFill>
+            <a:srgbClr val="014099"/>
+          </a:solidFill>
+          <a:ln w="38100">
+            <a:noFill/>
+          </a:ln>
+        </p:spPr>
+        <p:style>
+          <a:lnRef idx="2">
+            <a:schemeClr val="accent1">
+              <a:shade val="50000"/>
+            </a:schemeClr>
+          </a:lnRef>
+          <a:fillRef idx="1">
+            <a:schemeClr val="accent1"/>
+          </a:fillRef>
+          <a:effectRef idx="0">
+            <a:schemeClr val="accent1"/>
+          </a:effectRef>
+          <a:fontRef idx="minor">
+            <a:schemeClr val="lt1"/>
+          </a:fontRef>
+        </p:style>
+        <p:txBody>
+          <a:bodyPr rtlCol="0" anchor="ctr"/>
+          <a:lstStyle/>
+          <a:p>
+            <a:pPr algn="ctr"/>
+            <a:endParaRPr lang="zh-CN" altLang="en-US"/>
+          </a:p>
+        </p:txBody>
+      </p:sp>
+      <p:sp>
+        <p:nvSpPr>
+          <p:cNvPr id="8" name="矩形: 圆角 7"/>
+          <p:cNvSpPr/>
+          <p:nvPr/>
+        </p:nvSpPr>
+        <p:spPr>
+          <a:xfrm>
+            <a:off x="247558" y="1017636"/>
+            <a:ext cx="4207147" cy="1521699"/>
+          </a:xfrm>
+          <a:prstGeom prst="roundRect">
+            <a:avLst/>
+          </a:prstGeom>
+          <a:noFill/>
+          <a:ln w="38100">
+            <a:solidFill>
+              <a:srgbClr val="014099"/>
+            </a:solidFill>
+          </a:ln>
+        </p:spPr>
+        <p:style>
+          <a:lnRef idx="2">
+            <a:schemeClr val="accent1">
+              <a:shade val="50000"/>
+            </a:schemeClr>
+          </a:lnRef>
+          <a:fillRef idx="1">
+            <a:schemeClr val="accent1"/>
+          </a:fillRef>
+          <a:effectRef idx="0">
+            <a:schemeClr val="accent1"/>
+          </a:effectRef>
+          <a:fontRef idx="minor">
+            <a:schemeClr val="lt1"/>
+          </a:fontRef>
+        </p:style>
+        <p:txBody>
+          <a:bodyPr lIns="90000" tIns="0" rIns="90000" bIns="0" rtlCol="0" anchor="ctr"/>
+          <a:lstStyle/>
+          <a:p>
+            <a:pPr>
+              <a:lnSpc>
+                <a:spcPct val="120000"/>
+              </a:lnSpc>
+            </a:pPr>
+            <a:r>
+              <a:rPr lang="zh-CN" altLang="en-US" dirty="0">
+                <a:solidFill>
+                  <a:schemeClr val="tx1"/>
+                </a:solidFill>
+                <a:latin typeface="宋体" panose="02010600030101010101" pitchFamily="2" charset="-122"/>
+                <a:ea typeface="宋体" panose="02010600030101010101" pitchFamily="2" charset="-122"/>
+                <a:cs typeface="阿里巴巴普惠体 3.0 65 Medium" panose="00020600040101010101" pitchFamily="18" charset="-122"/>
+              </a:rPr>
+              <a:t>问题二：</a:t>
+            </a:r>
+            <a:endParaRPr lang="en-US" altLang="zh-CN" dirty="0">
+              <a:solidFill>
+                <a:schemeClr val="tx1"/>
+              </a:solidFill>
+              <a:latin typeface="阿里巴巴普惠体 3.0 65 Medium" panose="00020600040101010101" pitchFamily="18" charset="-122"/>
+              <a:ea typeface="阿里巴巴普惠体 3.0 65 Medium" panose="00020600040101010101" pitchFamily="18" charset="-122"/>
+              <a:cs typeface="阿里巴巴普惠体 3.0 65 Medium" panose="00020600040101010101" pitchFamily="18" charset="-122"/>
+            </a:endParaRPr>
+          </a:p>
+          <a:p>
+            <a:pPr>
+              <a:lnSpc>
+                <a:spcPct val="120000"/>
+              </a:lnSpc>
+            </a:pPr>
+            <a:r>
+              <a:rPr lang="zh-CN" altLang="en-US" sz="1600" dirty="0">
+                <a:solidFill>
+                  <a:schemeClr val="tx1"/>
+                </a:solidFill>
+                <a:latin typeface="宋体" panose="02010600030101010101" pitchFamily="2" charset="-122"/>
+                <a:ea typeface="宋体" panose="02010600030101010101" pitchFamily="2" charset="-122"/>
+                <a:cs typeface="阿里巴巴普惠体 3.0 55 Regular" panose="00020600040101010101" pitchFamily="18" charset="-122"/>
+              </a:rPr>
+              <a:t>直接将深度图作为通道输入，网络易受绝对深度值变化的干扰，且难以隐式捕捉表面法向等本质的3D</a:t>
+            </a:r>
+            <a:r>
+              <a:rPr lang="zh-CN" altLang="en-US" sz="1600" dirty="0">
+                <a:solidFill>
+                  <a:srgbClr val="FF0000"/>
+                </a:solidFill>
+                <a:latin typeface="宋体" panose="02010600030101010101" pitchFamily="2" charset="-122"/>
+                <a:ea typeface="宋体" panose="02010600030101010101" pitchFamily="2" charset="-122"/>
+                <a:cs typeface="阿里巴巴普惠体 3.0 55 Regular" panose="00020600040101010101" pitchFamily="18" charset="-122"/>
+              </a:rPr>
+              <a:t>几何结构</a:t>
+            </a:r>
+            <a:r>
+              <a:rPr lang="zh-CN" altLang="en-US" sz="1600" dirty="0">
+                <a:solidFill>
+                  <a:schemeClr val="tx1"/>
+                </a:solidFill>
+                <a:latin typeface="宋体" panose="02010600030101010101" pitchFamily="2" charset="-122"/>
+                <a:ea typeface="宋体" panose="02010600030101010101" pitchFamily="2" charset="-122"/>
+                <a:cs typeface="阿里巴巴普惠体 3.0 55 Regular" panose="00020600040101010101" pitchFamily="18" charset="-122"/>
+              </a:rPr>
+              <a:t>。</a:t>
+            </a:r>
+            <a:endParaRPr lang="zh-CN" altLang="en-US" sz="1600" dirty="0">
+              <a:solidFill>
+                <a:schemeClr val="tx1"/>
+              </a:solidFill>
+              <a:latin typeface="宋体" panose="02010600030101010101" pitchFamily="2" charset="-122"/>
+              <a:ea typeface="宋体" panose="02010600030101010101" pitchFamily="2" charset="-122"/>
+              <a:cs typeface="阿里巴巴普惠体 3.0 55 Regular" panose="00020600040101010101" pitchFamily="18" charset="-122"/>
+            </a:endParaRPr>
+          </a:p>
+        </p:txBody>
+      </p:sp>
+      <p:sp>
+        <p:nvSpPr>
+          <p:cNvPr id="10" name="矩形: 圆角 9"/>
+          <p:cNvSpPr/>
+          <p:nvPr/>
+        </p:nvSpPr>
+        <p:spPr>
+          <a:xfrm>
+            <a:off x="247559" y="3021578"/>
+            <a:ext cx="4207148" cy="1416020"/>
+          </a:xfrm>
+          <a:prstGeom prst="roundRect">
+            <a:avLst/>
+          </a:prstGeom>
+          <a:noFill/>
+          <a:ln w="38100">
+            <a:solidFill>
+              <a:srgbClr val="014099"/>
+            </a:solidFill>
+          </a:ln>
+        </p:spPr>
+        <p:style>
+          <a:lnRef idx="2">
+            <a:schemeClr val="accent1">
+              <a:shade val="50000"/>
+            </a:schemeClr>
+          </a:lnRef>
+          <a:fillRef idx="1">
+            <a:schemeClr val="accent1"/>
+          </a:fillRef>
+          <a:effectRef idx="0">
+            <a:schemeClr val="accent1"/>
+          </a:effectRef>
+          <a:fontRef idx="minor">
+            <a:schemeClr val="lt1"/>
+          </a:fontRef>
+        </p:style>
+        <p:txBody>
+          <a:bodyPr lIns="90000" tIns="0" rIns="90000" bIns="0" rtlCol="0" anchor="ctr"/>
+          <a:lstStyle/>
+          <a:p>
+            <a:pPr>
+              <a:lnSpc>
+                <a:spcPct val="120000"/>
+              </a:lnSpc>
+            </a:pPr>
+            <a:r>
+              <a:rPr lang="zh-CN" altLang="en-US" dirty="0">
+                <a:solidFill>
+                  <a:schemeClr val="tx1"/>
+                </a:solidFill>
+                <a:latin typeface="宋体" panose="02010600030101010101" pitchFamily="2" charset="-122"/>
+                <a:ea typeface="宋体" panose="02010600030101010101" pitchFamily="2" charset="-122"/>
+                <a:cs typeface="阿里巴巴普惠体 3.0 65 Medium" panose="00020600040101010101" pitchFamily="18" charset="-122"/>
+              </a:rPr>
+              <a:t>思路：</a:t>
+            </a:r>
+            <a:endParaRPr lang="en-US" altLang="zh-CN" dirty="0">
+              <a:solidFill>
+                <a:schemeClr val="tx1"/>
+              </a:solidFill>
+              <a:latin typeface="阿里巴巴普惠体 3.0 65 Medium" panose="00020600040101010101" pitchFamily="18" charset="-122"/>
+              <a:ea typeface="阿里巴巴普惠体 3.0 65 Medium" panose="00020600040101010101" pitchFamily="18" charset="-122"/>
+              <a:cs typeface="阿里巴巴普惠体 3.0 65 Medium" panose="00020600040101010101" pitchFamily="18" charset="-122"/>
+            </a:endParaRPr>
+          </a:p>
+          <a:p>
+            <a:pPr>
+              <a:lnSpc>
+                <a:spcPct val="120000"/>
+              </a:lnSpc>
+            </a:pPr>
+            <a:r>
+              <a:rPr lang="zh-CN" altLang="en-US" sz="1600" dirty="0">
+                <a:solidFill>
+                  <a:schemeClr val="tx1"/>
+                </a:solidFill>
+                <a:latin typeface="宋体" panose="02010600030101010101" pitchFamily="2" charset="-122"/>
+                <a:ea typeface="宋体" panose="02010600030101010101" pitchFamily="2" charset="-122"/>
+                <a:cs typeface="宋体" panose="02010600030101010101" pitchFamily="2" charset="-122"/>
+              </a:rPr>
+              <a:t>利用</a:t>
+            </a:r>
+            <a:r>
+              <a:rPr lang="zh-CN" altLang="en-US" sz="1600" dirty="0">
+                <a:solidFill>
+                  <a:schemeClr val="tx1"/>
+                </a:solidFill>
+                <a:latin typeface="宋体" panose="02010600030101010101" pitchFamily="2" charset="-122"/>
+                <a:ea typeface="宋体" panose="02010600030101010101" pitchFamily="2" charset="-122"/>
+                <a:cs typeface="宋体" panose="02010600030101010101" pitchFamily="2" charset="-122"/>
+              </a:rPr>
+              <a:t>卷积模块将</a:t>
+            </a:r>
+            <a:r>
+              <a:rPr lang="en-US" altLang="zh-CN" sz="1600" dirty="0">
+                <a:solidFill>
+                  <a:schemeClr val="tx1"/>
+                </a:solidFill>
+                <a:latin typeface="宋体" panose="02010600030101010101" pitchFamily="2" charset="-122"/>
+                <a:ea typeface="宋体" panose="02010600030101010101" pitchFamily="2" charset="-122"/>
+                <a:cs typeface="宋体" panose="02010600030101010101" pitchFamily="2" charset="-122"/>
+              </a:rPr>
+              <a:t>“</a:t>
+            </a:r>
+            <a:r>
+              <a:rPr lang="zh-CN" altLang="en-US" sz="1600" dirty="0">
+                <a:solidFill>
+                  <a:schemeClr val="tx1"/>
+                </a:solidFill>
+                <a:latin typeface="宋体" panose="02010600030101010101" pitchFamily="2" charset="-122"/>
+                <a:ea typeface="宋体" panose="02010600030101010101" pitchFamily="2" charset="-122"/>
+                <a:cs typeface="宋体" panose="02010600030101010101" pitchFamily="2" charset="-122"/>
+              </a:rPr>
+              <a:t>距离场</a:t>
+            </a:r>
+            <a:r>
+              <a:rPr lang="en-US" altLang="zh-CN" sz="1600" dirty="0">
+                <a:solidFill>
+                  <a:schemeClr val="tx1"/>
+                </a:solidFill>
+                <a:latin typeface="宋体" panose="02010600030101010101" pitchFamily="2" charset="-122"/>
+                <a:ea typeface="宋体" panose="02010600030101010101" pitchFamily="2" charset="-122"/>
+                <a:cs typeface="宋体" panose="02010600030101010101" pitchFamily="2" charset="-122"/>
+              </a:rPr>
+              <a:t>”</a:t>
+            </a:r>
+            <a:r>
+              <a:rPr lang="zh-CN" altLang="en-US" sz="1600" dirty="0">
+                <a:solidFill>
+                  <a:schemeClr val="tx1"/>
+                </a:solidFill>
+                <a:latin typeface="宋体" panose="02010600030101010101" pitchFamily="2" charset="-122"/>
+                <a:ea typeface="宋体" panose="02010600030101010101" pitchFamily="2" charset="-122"/>
+                <a:cs typeface="宋体" panose="02010600030101010101" pitchFamily="2" charset="-122"/>
+              </a:rPr>
+              <a:t>转化为</a:t>
+            </a:r>
+            <a:r>
+              <a:rPr lang="en-US" altLang="zh-CN" sz="1600" dirty="0">
+                <a:solidFill>
+                  <a:schemeClr val="tx1"/>
+                </a:solidFill>
+                <a:latin typeface="宋体" panose="02010600030101010101" pitchFamily="2" charset="-122"/>
+                <a:ea typeface="宋体" panose="02010600030101010101" pitchFamily="2" charset="-122"/>
+                <a:cs typeface="宋体" panose="02010600030101010101" pitchFamily="2" charset="-122"/>
+              </a:rPr>
+              <a:t>“</a:t>
+            </a:r>
+            <a:r>
+              <a:rPr lang="zh-CN" altLang="en-US" sz="1600" dirty="0">
+                <a:solidFill>
+                  <a:schemeClr val="tx1"/>
+                </a:solidFill>
+                <a:latin typeface="宋体" panose="02010600030101010101" pitchFamily="2" charset="-122"/>
+                <a:ea typeface="宋体" panose="02010600030101010101" pitchFamily="2" charset="-122"/>
+                <a:cs typeface="宋体" panose="02010600030101010101" pitchFamily="2" charset="-122"/>
+              </a:rPr>
+              <a:t>梯度场</a:t>
+            </a:r>
+            <a:r>
+              <a:rPr lang="en-US" altLang="zh-CN" sz="1600" dirty="0">
+                <a:solidFill>
+                  <a:schemeClr val="tx1"/>
+                </a:solidFill>
+                <a:latin typeface="宋体" panose="02010600030101010101" pitchFamily="2" charset="-122"/>
+                <a:ea typeface="宋体" panose="02010600030101010101" pitchFamily="2" charset="-122"/>
+                <a:cs typeface="宋体" panose="02010600030101010101" pitchFamily="2" charset="-122"/>
+              </a:rPr>
+              <a:t>”</a:t>
+            </a:r>
+            <a:r>
+              <a:rPr lang="zh-CN" altLang="en-US" sz="1600" dirty="0">
+                <a:solidFill>
+                  <a:schemeClr val="tx1"/>
+                </a:solidFill>
+                <a:latin typeface="宋体" panose="02010600030101010101" pitchFamily="2" charset="-122"/>
+                <a:ea typeface="宋体" panose="02010600030101010101" pitchFamily="2" charset="-122"/>
+                <a:cs typeface="宋体" panose="02010600030101010101" pitchFamily="2" charset="-122"/>
+              </a:rPr>
+              <a:t>，显式提取深度的空间变化率以表征物体形状。</a:t>
+            </a:r>
+            <a:endParaRPr lang="zh-CN" altLang="en-US" sz="1600" dirty="0">
+              <a:solidFill>
+                <a:schemeClr val="tx1"/>
+              </a:solidFill>
+              <a:latin typeface="宋体" panose="02010600030101010101" pitchFamily="2" charset="-122"/>
+              <a:ea typeface="宋体" panose="02010600030101010101" pitchFamily="2" charset="-122"/>
+              <a:cs typeface="宋体" panose="02010600030101010101" pitchFamily="2" charset="-122"/>
+            </a:endParaRPr>
+          </a:p>
+        </p:txBody>
+      </p:sp>
+      <p:sp>
+        <p:nvSpPr>
+          <p:cNvPr id="4" name="矩形: 圆角 10"/>
+          <p:cNvSpPr/>
+          <p:nvPr/>
+        </p:nvSpPr>
+        <p:spPr>
+          <a:xfrm>
+            <a:off x="247650" y="4963160"/>
+            <a:ext cx="4206875" cy="1576705"/>
+          </a:xfrm>
+          <a:prstGeom prst="roundRect">
+            <a:avLst/>
+          </a:prstGeom>
+          <a:noFill/>
+          <a:ln w="38100">
+            <a:solidFill>
+              <a:srgbClr val="014099"/>
+            </a:solidFill>
+          </a:ln>
+        </p:spPr>
+        <p:style>
+          <a:lnRef idx="2">
+            <a:schemeClr val="accent1">
+              <a:shade val="50000"/>
+            </a:schemeClr>
+          </a:lnRef>
+          <a:fillRef idx="1">
+            <a:schemeClr val="accent1"/>
+          </a:fillRef>
+          <a:effectRef idx="0">
+            <a:schemeClr val="accent1"/>
+          </a:effectRef>
+          <a:fontRef idx="minor">
+            <a:schemeClr val="lt1"/>
+          </a:fontRef>
+        </p:style>
+        <p:txBody>
+          <a:bodyPr lIns="72000" tIns="0" rIns="90000" bIns="0" rtlCol="0" anchor="ctr"/>
+          <a:lstStyle/>
+          <a:p>
+            <a:pPr>
+              <a:lnSpc>
+                <a:spcPct val="120000"/>
+              </a:lnSpc>
+            </a:pPr>
+            <a:r>
+              <a:rPr lang="zh-CN" altLang="en-US" dirty="0">
+                <a:solidFill>
+                  <a:schemeClr val="tx1"/>
+                </a:solidFill>
+                <a:latin typeface="宋体" panose="02010600030101010101" pitchFamily="2" charset="-122"/>
+                <a:ea typeface="宋体" panose="02010600030101010101" pitchFamily="2" charset="-122"/>
+                <a:cs typeface="阿里巴巴普惠体 3.0 65 Medium" panose="00020600040101010101" pitchFamily="18" charset="-122"/>
+              </a:rPr>
+              <a:t>方案：</a:t>
+            </a:r>
+            <a:endParaRPr lang="en-US" altLang="zh-CN" dirty="0">
+              <a:solidFill>
+                <a:schemeClr val="tx1"/>
+              </a:solidFill>
+              <a:latin typeface="阿里巴巴普惠体 3.0 65 Medium" panose="00020600040101010101" pitchFamily="18" charset="-122"/>
+              <a:ea typeface="阿里巴巴普惠体 3.0 65 Medium" panose="00020600040101010101" pitchFamily="18" charset="-122"/>
+              <a:cs typeface="阿里巴巴普惠体 3.0 65 Medium" panose="00020600040101010101" pitchFamily="18" charset="-122"/>
+            </a:endParaRPr>
+          </a:p>
+          <a:p>
+            <a:pPr>
+              <a:lnSpc>
+                <a:spcPct val="120000"/>
+              </a:lnSpc>
+            </a:pPr>
+            <a:r>
+              <a:rPr lang="zh-CN" altLang="en-US" sz="1600" dirty="0">
+                <a:solidFill>
+                  <a:schemeClr val="tx1"/>
+                </a:solidFill>
+                <a:latin typeface="宋体" panose="02010600030101010101" pitchFamily="2" charset="-122"/>
+                <a:ea typeface="宋体" panose="02010600030101010101" pitchFamily="2" charset="-122"/>
+                <a:cs typeface="阿里巴巴普惠体 3.0 55 Regular" panose="00020600040101010101" pitchFamily="18" charset="-122"/>
+              </a:rPr>
+              <a:t>引入中心差分卷积模块CDC，CDC通过可学习的梯度聚合机制，同时捕获细粒度的深度纹理与局部相对距离，增强网络对</a:t>
+            </a:r>
+            <a:r>
+              <a:rPr lang="zh-CN" altLang="en-US" sz="1600" dirty="0">
+                <a:solidFill>
+                  <a:srgbClr val="FF0000"/>
+                </a:solidFill>
+                <a:latin typeface="宋体" panose="02010600030101010101" pitchFamily="2" charset="-122"/>
+                <a:ea typeface="宋体" panose="02010600030101010101" pitchFamily="2" charset="-122"/>
+                <a:cs typeface="阿里巴巴普惠体 3.0 55 Regular" panose="00020600040101010101" pitchFamily="18" charset="-122"/>
+              </a:rPr>
+              <a:t>无人机视角</a:t>
+            </a:r>
+            <a:r>
+              <a:rPr lang="zh-CN" altLang="en-US" sz="1600" dirty="0">
+                <a:solidFill>
+                  <a:schemeClr val="tx1"/>
+                </a:solidFill>
+                <a:latin typeface="宋体" panose="02010600030101010101" pitchFamily="2" charset="-122"/>
+                <a:ea typeface="宋体" panose="02010600030101010101" pitchFamily="2" charset="-122"/>
+                <a:cs typeface="阿里巴巴普惠体 3.0 55 Regular" panose="00020600040101010101" pitchFamily="18" charset="-122"/>
+              </a:rPr>
+              <a:t>下微小物体表面几何结构的感知能力</a:t>
+            </a:r>
+            <a:endParaRPr lang="zh-CN" altLang="en-US" sz="1600" b="1" dirty="0">
+              <a:solidFill>
+                <a:schemeClr val="tx1"/>
+              </a:solidFill>
+              <a:latin typeface="宋体" panose="02010600030101010101" pitchFamily="2" charset="-122"/>
+              <a:ea typeface="宋体" panose="02010600030101010101" pitchFamily="2" charset="-122"/>
+              <a:cs typeface="宋体" panose="02010600030101010101" pitchFamily="2" charset="-122"/>
+            </a:endParaRPr>
+          </a:p>
+        </p:txBody>
+      </p:sp>
+      <p:sp>
+        <p:nvSpPr>
+          <p:cNvPr id="12" name="箭头: 右 11"/>
+          <p:cNvSpPr/>
+          <p:nvPr/>
+        </p:nvSpPr>
+        <p:spPr>
+          <a:xfrm rot="5400000">
+            <a:off x="2240303" y="4490287"/>
+            <a:ext cx="349641" cy="405442"/>
+          </a:xfrm>
+          <a:prstGeom prst="rightArrow">
+            <a:avLst/>
+          </a:prstGeom>
+          <a:solidFill>
+            <a:srgbClr val="014099"/>
+          </a:solidFill>
+          <a:ln w="38100">
+            <a:noFill/>
+          </a:ln>
+        </p:spPr>
+        <p:style>
+          <a:lnRef idx="2">
+            <a:schemeClr val="accent1">
+              <a:shade val="50000"/>
+            </a:schemeClr>
+          </a:lnRef>
+          <a:fillRef idx="1">
+            <a:schemeClr val="accent1"/>
+          </a:fillRef>
+          <a:effectRef idx="0">
+            <a:schemeClr val="accent1"/>
+          </a:effectRef>
+          <a:fontRef idx="minor">
+            <a:schemeClr val="lt1"/>
+          </a:fontRef>
+        </p:style>
+        <p:txBody>
+          <a:bodyPr rtlCol="0" anchor="ctr"/>
+          <a:lstStyle/>
+          <a:p>
+            <a:pPr algn="ctr"/>
+            <a:endParaRPr lang="zh-CN" altLang="en-US"/>
+          </a:p>
+        </p:txBody>
+      </p:sp>
+      <p:sp>
+        <p:nvSpPr>
+          <p:cNvPr id="6" name="文本框 5"/>
+          <p:cNvSpPr txBox="1"/>
+          <p:nvPr/>
+        </p:nvSpPr>
+        <p:spPr>
+          <a:xfrm>
+            <a:off x="4763441" y="1017636"/>
+            <a:ext cx="5923749" cy="1198880"/>
+          </a:xfrm>
+          <a:prstGeom prst="rect">
+            <a:avLst/>
+          </a:prstGeom>
+          <a:noFill/>
+        </p:spPr>
+        <p:txBody>
+          <a:bodyPr wrap="square">
+            <a:spAutoFit/>
+          </a:bodyPr>
+          <a:lstStyle/>
+          <a:p>
+            <a:pPr>
+              <a:lnSpc>
+                <a:spcPct val="150000"/>
+              </a:lnSpc>
+            </a:pPr>
+            <a:r>
+              <a:rPr lang="zh-CN" altLang="en-US" sz="2400" b="1" dirty="0">
+                <a:latin typeface="阿里巴巴普惠体 3.0 55 Regular" panose="00020600040101010101" pitchFamily="18" charset="-122"/>
+                <a:ea typeface="阿里巴巴普惠体 3.0 55 Regular" panose="00020600040101010101" pitchFamily="18" charset="-122"/>
+                <a:cs typeface="阿里巴巴普惠体 3.0 55 Regular" panose="00020600040101010101" pitchFamily="18" charset="-122"/>
+              </a:rPr>
+              <a:t>研究内容</a:t>
+            </a:r>
+            <a:r>
+              <a:rPr lang="zh-CN" altLang="en-US" sz="2400" b="1" dirty="0">
+                <a:latin typeface="阿里巴巴普惠体 3.0 55 Regular" panose="00020600040101010101" pitchFamily="18" charset="-122"/>
+                <a:ea typeface="阿里巴巴普惠体 3.0 55 Regular" panose="00020600040101010101" pitchFamily="18" charset="-122"/>
+                <a:cs typeface="阿里巴巴普惠体 3.0 55 Regular" panose="00020600040101010101" pitchFamily="18" charset="-122"/>
+              </a:rPr>
+              <a:t>二：</a:t>
+            </a:r>
+            <a:r>
+              <a:rPr lang="zh-CN" altLang="en-US" sz="2400" b="1" dirty="0">
+                <a:latin typeface="宋体" panose="02010600030101010101" pitchFamily="2" charset="-122"/>
+                <a:ea typeface="宋体" panose="02010600030101010101" pitchFamily="2" charset="-122"/>
+                <a:cs typeface="阿里巴巴普惠体 3.0 55 Regular" panose="00020600040101010101" pitchFamily="18" charset="-122"/>
+                <a:sym typeface="+mn-ea"/>
+              </a:rPr>
+              <a:t>如何提升深度估计模型在无人机航拍图像的表现</a:t>
+            </a:r>
+            <a:endParaRPr lang="zh-CN" altLang="en-US" sz="2400" dirty="0">
+              <a:solidFill>
+                <a:schemeClr val="tx1"/>
+              </a:solidFill>
+              <a:latin typeface="阿里巴巴普惠体 3.0 55 Regular" panose="00020600040101010101" pitchFamily="18" charset="-122"/>
+              <a:ea typeface="阿里巴巴普惠体 3.0 55 Regular" panose="00020600040101010101" pitchFamily="18" charset="-122"/>
+              <a:cs typeface="阿里巴巴普惠体 3.0 55 Regular" panose="00020600040101010101" pitchFamily="18" charset="-122"/>
+            </a:endParaRPr>
+          </a:p>
+        </p:txBody>
+      </p:sp>
+      <p:pic>
+        <p:nvPicPr>
+          <p:cNvPr id="7" name="图片 6" descr="jiHeXianYan"/>
+          <p:cNvPicPr>
+            <a:picLocks noChangeAspect="1"/>
+          </p:cNvPicPr>
+          <p:nvPr/>
+        </p:nvPicPr>
+        <p:blipFill>
+          <a:blip r:embed="rId1"/>
+          <a:stretch>
+            <a:fillRect/>
+          </a:stretch>
+        </p:blipFill>
+        <p:spPr>
+          <a:xfrm>
+            <a:off x="4685665" y="3145155"/>
+            <a:ext cx="7264400" cy="2581275"/>
+          </a:xfrm>
+          <a:prstGeom prst="rect">
+            <a:avLst/>
+          </a:prstGeom>
+        </p:spPr>
+      </p:pic>
+    </p:spTree>
+  </p:cSld>
+  <p:clrMapOvr>
+    <a:masterClrMapping/>
+  </p:clrMapOvr>
+  <p:transition spd="slow" advTm="0">
+    <p:push dir="u"/>
+  </p:transition>
+  <p:timing>
+    <p:tnLst>
+      <p:par>
+        <p:cTn id="1" dur="indefinite" restart="never" nodeType="tmRoot">
+          <p:childTnLst>
+            <p:seq concurrent="1" nextAc="seek">
+              <p:cTn id="2" dur="indefinite" nodeType="mainSeq">
+                <p:childTnLst>
+                  <p:par>
+                    <p:cTn id="3" fill="hold">
+                      <p:stCondLst>
+                        <p:cond delay="indefinite"/>
+                        <p:cond evt="onBegin" delay="0">
+                          <p:tn val="2"/>
+                        </p:cond>
+                      </p:stCondLst>
+                      <p:childTnLst>
+                        <p:par>
+                          <p:cTn id="4" fill="hold">
+                            <p:stCondLst>
+                              <p:cond delay="0"/>
+                            </p:stCondLst>
+                            <p:childTnLst>
+                              <p:par>
+                                <p:cTn id="5" presetID="10" presetClass="entr" presetSubtype="0" fill="hold" grpId="0" nodeType="withEffect">
+                                  <p:stCondLst>
+                                    <p:cond delay="0"/>
+                                  </p:stCondLst>
+                                  <p:childTnLst>
+                                    <p:set>
+                                      <p:cBhvr>
+                                        <p:cTn id="6" dur="1" fill="hold">
+                                          <p:stCondLst>
+                                            <p:cond delay="0"/>
+                                          </p:stCondLst>
+                                        </p:cTn>
+                                        <p:tgtEl>
+                                          <p:spTgt spid="6"/>
+                                        </p:tgtEl>
+                                        <p:attrNameLst>
+                                          <p:attrName>style.visibility</p:attrName>
+                                        </p:attrNameLst>
+                                      </p:cBhvr>
+                                      <p:to>
+                                        <p:strVal val="visible"/>
+                                      </p:to>
+                                    </p:set>
+                                    <p:animEffect transition="in" filter="fade">
+                                      <p:cBhvr>
+                                        <p:cTn id="7" dur="500"/>
+                                        <p:tgtEl>
+                                          <p:spTgt spid="6"/>
+                                        </p:tgtEl>
+                                      </p:cBhvr>
+                                    </p:animEffect>
+                                  </p:childTnLst>
+                                </p:cTn>
+                              </p:par>
+                              <p:par>
+                                <p:cTn id="8" presetID="10" presetClass="entr" presetSubtype="0" fill="hold" grpId="0" nodeType="withEffect">
+                                  <p:stCondLst>
+                                    <p:cond delay="0"/>
+                                  </p:stCondLst>
+                                  <p:childTnLst>
+                                    <p:set>
+                                      <p:cBhvr>
+                                        <p:cTn id="9" dur="1" fill="hold">
+                                          <p:stCondLst>
+                                            <p:cond delay="0"/>
+                                          </p:stCondLst>
+                                        </p:cTn>
+                                        <p:tgtEl>
+                                          <p:spTgt spid="8"/>
+                                        </p:tgtEl>
+                                        <p:attrNameLst>
+                                          <p:attrName>style.visibility</p:attrName>
+                                        </p:attrNameLst>
+                                      </p:cBhvr>
+                                      <p:to>
+                                        <p:strVal val="visible"/>
+                                      </p:to>
+                                    </p:set>
+                                    <p:animEffect transition="in" filter="fade">
+                                      <p:cBhvr>
+                                        <p:cTn id="10" dur="500"/>
+                                        <p:tgtEl>
+                                          <p:spTgt spid="8"/>
+                                        </p:tgtEl>
+                                      </p:cBhvr>
+                                    </p:animEffect>
+                                  </p:childTnLst>
+                                </p:cTn>
+                              </p:par>
+                            </p:childTnLst>
+                          </p:cTn>
+                        </p:par>
+                      </p:childTnLst>
+                    </p:cTn>
+                  </p:par>
+                  <p:par>
+                    <p:cTn id="11" fill="hold">
+                      <p:stCondLst>
+                        <p:cond delay="indefinite"/>
+                      </p:stCondLst>
+                      <p:childTnLst>
+                        <p:par>
+                          <p:cTn id="12" fill="hold">
+                            <p:stCondLst>
+                              <p:cond delay="0"/>
+                            </p:stCondLst>
+                            <p:childTnLst>
+                              <p:par>
+                                <p:cTn id="13" presetID="10" presetClass="entr" presetSubtype="0" fill="hold" grpId="0" nodeType="clickEffect">
+                                  <p:stCondLst>
+                                    <p:cond delay="0"/>
+                                  </p:stCondLst>
+                                  <p:childTnLst>
+                                    <p:set>
+                                      <p:cBhvr>
+                                        <p:cTn id="14" dur="1" fill="hold">
+                                          <p:stCondLst>
+                                            <p:cond delay="0"/>
+                                          </p:stCondLst>
+                                        </p:cTn>
+                                        <p:tgtEl>
+                                          <p:spTgt spid="2"/>
+                                        </p:tgtEl>
+                                        <p:attrNameLst>
+                                          <p:attrName>style.visibility</p:attrName>
+                                        </p:attrNameLst>
+                                      </p:cBhvr>
+                                      <p:to>
+                                        <p:strVal val="visible"/>
+                                      </p:to>
+                                    </p:set>
+                                    <p:animEffect transition="in" filter="fade">
+                                      <p:cBhvr>
+                                        <p:cTn id="15" dur="500"/>
+                                        <p:tgtEl>
+                                          <p:spTgt spid="2"/>
+                                        </p:tgtEl>
+                                      </p:cBhvr>
+                                    </p:animEffect>
+                                  </p:childTnLst>
+                                </p:cTn>
+                              </p:par>
+                              <p:par>
+                                <p:cTn id="16" presetID="10" presetClass="entr" presetSubtype="0" fill="hold" grpId="0" nodeType="withEffect">
+                                  <p:stCondLst>
+                                    <p:cond delay="0"/>
+                                  </p:stCondLst>
+                                  <p:childTnLst>
+                                    <p:set>
+                                      <p:cBhvr>
+                                        <p:cTn id="17" dur="1" fill="hold">
+                                          <p:stCondLst>
+                                            <p:cond delay="0"/>
+                                          </p:stCondLst>
+                                        </p:cTn>
+                                        <p:tgtEl>
+                                          <p:spTgt spid="10"/>
+                                        </p:tgtEl>
+                                        <p:attrNameLst>
+                                          <p:attrName>style.visibility</p:attrName>
+                                        </p:attrNameLst>
+                                      </p:cBhvr>
+                                      <p:to>
+                                        <p:strVal val="visible"/>
+                                      </p:to>
+                                    </p:set>
+                                    <p:animEffect transition="in" filter="fade">
+                                      <p:cBhvr>
+                                        <p:cTn id="18" dur="500"/>
+                                        <p:tgtEl>
+                                          <p:spTgt spid="10"/>
+                                        </p:tgtEl>
+                                      </p:cBhvr>
+                                    </p:animEffect>
+                                  </p:childTnLst>
+                                </p:cTn>
+                              </p:par>
+                            </p:childTnLst>
+                          </p:cTn>
+                        </p:par>
+                      </p:childTnLst>
+                    </p:cTn>
+                  </p:par>
+                  <p:par>
+                    <p:cTn id="19" fill="hold">
+                      <p:stCondLst>
+                        <p:cond delay="indefinite"/>
+                      </p:stCondLst>
+                      <p:childTnLst>
+                        <p:par>
+                          <p:cTn id="20" fill="hold">
+                            <p:stCondLst>
+                              <p:cond delay="0"/>
+                            </p:stCondLst>
+                            <p:childTnLst>
+                              <p:par>
+                                <p:cTn id="21" presetID="10" presetClass="entr" presetSubtype="0" fill="hold" grpId="0" nodeType="clickEffect">
+                                  <p:stCondLst>
+                                    <p:cond delay="0"/>
+                                  </p:stCondLst>
+                                  <p:childTnLst>
+                                    <p:set>
+                                      <p:cBhvr>
+                                        <p:cTn id="22" dur="1" fill="hold">
+                                          <p:stCondLst>
+                                            <p:cond delay="0"/>
+                                          </p:stCondLst>
+                                        </p:cTn>
+                                        <p:tgtEl>
+                                          <p:spTgt spid="12"/>
+                                        </p:tgtEl>
+                                        <p:attrNameLst>
+                                          <p:attrName>style.visibility</p:attrName>
+                                        </p:attrNameLst>
+                                      </p:cBhvr>
+                                      <p:to>
+                                        <p:strVal val="visible"/>
+                                      </p:to>
+                                    </p:set>
+                                    <p:animEffect transition="in" filter="fade">
+                                      <p:cBhvr>
+                                        <p:cTn id="23" dur="500"/>
+                                        <p:tgtEl>
+                                          <p:spTgt spid="12"/>
+                                        </p:tgtEl>
+                                      </p:cBhvr>
+                                    </p:animEffect>
+                                  </p:childTnLst>
+                                </p:cTn>
+                              </p:par>
+                              <p:par>
+                                <p:cTn id="24" presetID="10" presetClass="entr" presetSubtype="0" fill="hold" grpId="0" nodeType="withEffect">
+                                  <p:stCondLst>
+                                    <p:cond delay="0"/>
+                                  </p:stCondLst>
+                                  <p:childTnLst>
+                                    <p:set>
+                                      <p:cBhvr>
+                                        <p:cTn id="25" dur="1" fill="hold">
+                                          <p:stCondLst>
+                                            <p:cond delay="0"/>
+                                          </p:stCondLst>
+                                        </p:cTn>
+                                        <p:tgtEl>
+                                          <p:spTgt spid="4"/>
+                                        </p:tgtEl>
+                                        <p:attrNameLst>
+                                          <p:attrName>style.visibility</p:attrName>
+                                        </p:attrNameLst>
+                                      </p:cBhvr>
+                                      <p:to>
+                                        <p:strVal val="visible"/>
+                                      </p:to>
+                                    </p:set>
+                                    <p:animEffect transition="in" filter="fade">
+                                      <p:cBhvr>
+                                        <p:cTn id="26" dur="500"/>
+                                        <p:tgtEl>
+                                          <p:spTgt spid="4"/>
+                                        </p:tgtEl>
+                                      </p:cBhvr>
+                                    </p:animEffect>
+                                  </p:childTnLst>
+                                </p:cTn>
+                              </p:par>
+                            </p:childTnLst>
+                          </p:cTn>
+                        </p:par>
+                      </p:childTnLst>
+                    </p:cTn>
+                  </p:par>
+                  <p:par>
+                    <p:cTn id="27" fill="hold">
+                      <p:stCondLst>
+                        <p:cond delay="indefinite"/>
+                      </p:stCondLst>
+                      <p:childTnLst>
+                        <p:par>
+                          <p:cTn id="28" fill="hold">
+                            <p:stCondLst>
+                              <p:cond delay="0"/>
+                            </p:stCondLst>
+                            <p:childTnLst>
+                              <p:par>
+                                <p:cTn id="29" presetID="22" presetClass="entr" presetSubtype="4" fill="hold" nodeType="clickEffect">
+                                  <p:stCondLst>
+                                    <p:cond delay="0"/>
+                                  </p:stCondLst>
+                                  <p:childTnLst>
+                                    <p:set>
+                                      <p:cBhvr>
+                                        <p:cTn id="30" dur="1" fill="hold">
+                                          <p:stCondLst>
+                                            <p:cond delay="0"/>
+                                          </p:stCondLst>
+                                        </p:cTn>
+                                        <p:tgtEl>
+                                          <p:spTgt spid="7"/>
+                                        </p:tgtEl>
+                                        <p:attrNameLst>
+                                          <p:attrName>style.visibility</p:attrName>
+                                        </p:attrNameLst>
+                                      </p:cBhvr>
+                                      <p:to>
+                                        <p:strVal val="visible"/>
+                                      </p:to>
+                                    </p:set>
+                                    <p:animEffect transition="in" filter="wipe(down)">
+                                      <p:cBhvr>
+                                        <p:cTn id="31" dur="500"/>
+                                        <p:tgtEl>
+                                          <p:spTgt spid="7"/>
+                                        </p:tgtEl>
+                                      </p:cBhvr>
+                                    </p:animEffect>
+                                  </p:childTnLst>
+                                </p:cTn>
+                              </p:par>
+                            </p:childTnLst>
+                          </p:cTn>
+                        </p:par>
+                      </p:childTnLst>
+                    </p:cTn>
+                  </p:par>
+                </p:childTnLst>
+              </p:cTn>
+              <p:prevCondLst>
+                <p:cond evt="onPrev" delay="0">
+                  <p:tgtEl>
+                    <p:sldTgt/>
+                  </p:tgtEl>
+                </p:cond>
+              </p:prevCondLst>
+              <p:nextCondLst>
+                <p:cond evt="onNext" delay="0">
+                  <p:tgtEl>
+                    <p:sldTgt/>
+                  </p:tgtEl>
+                </p:cond>
+              </p:nextCondLst>
+            </p:seq>
+          </p:childTnLst>
+        </p:cTn>
+      </p:par>
+    </p:tnLst>
+    <p:bldLst>
+      <p:bldP spid="2" grpId="0" bldLvl="0" animBg="1"/>
+      <p:bldP spid="8" grpId="0" bldLvl="0" animBg="1"/>
+      <p:bldP spid="10" grpId="0" bldLvl="0" animBg="1"/>
+      <p:bldP spid="4" grpId="0" bldLvl="0" animBg="1"/>
+      <p:bldP spid="12" grpId="0" bldLvl="0" animBg="1"/>
+      <p:bldP spid="6" grpId="0"/>
+    </p:bldLst>
+  </p:timing>
+</p:sld>
+</file>
+
+<file path=ppt/slides/slide8.xml><?xml version="1.0" encoding="utf-8"?>
+<p:sld xmlns:a="http://schemas.openxmlformats.org/drawingml/2006/main" xmlns:r="http://schemas.openxmlformats.org/officeDocument/2006/relationships" xmlns:p="http://schemas.openxmlformats.org/presentationml/2006/main">
+  <p:cSld>
+    <p:spTree>
+      <p:nvGrpSpPr>
+        <p:cNvPr id="1" name=""/>
+        <p:cNvGrpSpPr/>
+        <p:nvPr/>
+      </p:nvGrpSpPr>
+      <p:grpSpPr>
+        <a:xfrm>
+          <a:off x="0" y="0"/>
+          <a:ext cx="0" cy="0"/>
+          <a:chOff x="0" y="0"/>
+          <a:chExt cx="0" cy="0"/>
+        </a:xfrm>
+      </p:grpSpPr>
+      <p:sp>
+        <p:nvSpPr>
+          <p:cNvPr id="24" name="文本框 23"/>
+          <p:cNvSpPr txBox="1"/>
+          <p:nvPr/>
+        </p:nvSpPr>
+        <p:spPr>
+          <a:xfrm>
+            <a:off x="1990028" y="266857"/>
+            <a:ext cx="4506661" cy="545534"/>
+          </a:xfrm>
+          <a:prstGeom prst="rect">
+            <a:avLst/>
+          </a:prstGeom>
+          <a:noFill/>
+        </p:spPr>
+        <p:txBody>
+          <a:bodyPr wrap="square" rtlCol="0">
+            <a:spAutoFit/>
+            <a:scene3d>
+              <a:camera prst="orthographicFront"/>
+              <a:lightRig rig="threePt" dir="t"/>
+            </a:scene3d>
+            <a:sp3d contourW="12700"/>
+          </a:bodyPr>
+          <a:lstStyle/>
+          <a:p>
+            <a:pPr>
+              <a:lnSpc>
+                <a:spcPct val="114000"/>
+              </a:lnSpc>
+            </a:pPr>
+            <a:r>
+              <a:rPr lang="zh-CN" altLang="en-US" sz="2800" b="1" dirty="0">
+                <a:solidFill>
+                  <a:srgbClr val="152E52"/>
+                </a:solidFill>
+                <a:ea typeface="+mj-ea"/>
+              </a:rPr>
+              <a:t>研究思路</a:t>
+            </a:r>
+            <a:endParaRPr lang="zh-CN" altLang="en-US" sz="2800" b="1" dirty="0">
+              <a:solidFill>
+                <a:srgbClr val="152E52"/>
+              </a:solidFill>
+              <a:ea typeface="+mj-ea"/>
+            </a:endParaRPr>
+          </a:p>
+        </p:txBody>
+      </p:sp>
+      <p:sp>
+        <p:nvSpPr>
+          <p:cNvPr id="3" name="灯片编号占位符 14"/>
+          <p:cNvSpPr>
+            <a:spLocks noGrp="1"/>
+          </p:cNvSpPr>
+          <p:nvPr/>
+        </p:nvSpPr>
+        <p:spPr>
+          <a:xfrm>
+            <a:off x="8610600" y="6356350"/>
+            <a:ext cx="2743200" cy="365125"/>
+          </a:xfrm>
+          <a:prstGeom prst="rect">
+            <a:avLst/>
+          </a:prstGeom>
+        </p:spPr>
+        <p:txBody>
+          <a:bodyPr vert="horz" lIns="91440" tIns="45720" rIns="91440" bIns="45720" rtlCol="0" anchor="ctr"/>
+          <a:lstStyle>
+            <a:defPPr>
+              <a:defRPr lang="en-US"/>
+            </a:defPPr>
+            <a:lvl1pPr marL="0" algn="r" defTabSz="914400" rtl="0" eaLnBrk="1" latinLnBrk="0" hangingPunct="1">
+              <a:defRPr sz="1200" kern="1200">
+                <a:solidFill>
+                  <a:schemeClr val="tx1">
+                    <a:tint val="75000"/>
+                  </a:schemeClr>
+                </a:solidFill>
+                <a:latin typeface="+mn-lt"/>
+                <a:ea typeface="+mn-ea"/>
+                <a:cs typeface="+mn-cs"/>
+              </a:defRPr>
+            </a:lvl1pPr>
+            <a:lvl2pPr marL="457200" algn="l" defTabSz="914400" rtl="0" eaLnBrk="1" latinLnBrk="0" hangingPunct="1">
+              <a:defRPr sz="1800" kern="1200">
+                <a:solidFill>
+                  <a:schemeClr val="tx1"/>
+                </a:solidFill>
+                <a:latin typeface="+mn-lt"/>
+                <a:ea typeface="+mn-ea"/>
+                <a:cs typeface="+mn-cs"/>
+              </a:defRPr>
+            </a:lvl2pPr>
+            <a:lvl3pPr marL="914400" algn="l" defTabSz="914400" rtl="0" eaLnBrk="1" latinLnBrk="0" hangingPunct="1">
+              <a:defRPr sz="1800" kern="1200">
+                <a:solidFill>
+                  <a:schemeClr val="tx1"/>
+                </a:solidFill>
+                <a:latin typeface="+mn-lt"/>
+                <a:ea typeface="+mn-ea"/>
+                <a:cs typeface="+mn-cs"/>
+              </a:defRPr>
+            </a:lvl3pPr>
+            <a:lvl4pPr marL="1371600" algn="l" defTabSz="914400" rtl="0" eaLnBrk="1" latinLnBrk="0" hangingPunct="1">
+              <a:defRPr sz="1800" kern="1200">
+                <a:solidFill>
+                  <a:schemeClr val="tx1"/>
+                </a:solidFill>
+                <a:latin typeface="+mn-lt"/>
+                <a:ea typeface="+mn-ea"/>
+                <a:cs typeface="+mn-cs"/>
+              </a:defRPr>
+            </a:lvl4pPr>
+            <a:lvl5pPr marL="1828800" algn="l" defTabSz="914400" rtl="0" eaLnBrk="1" latinLnBrk="0" hangingPunct="1">
+              <a:defRPr sz="1800" kern="1200">
+                <a:solidFill>
+                  <a:schemeClr val="tx1"/>
+                </a:solidFill>
+                <a:latin typeface="+mn-lt"/>
+                <a:ea typeface="+mn-ea"/>
+                <a:cs typeface="+mn-cs"/>
+              </a:defRPr>
+            </a:lvl5pPr>
+            <a:lvl6pPr marL="2286000" algn="l" defTabSz="914400" rtl="0" eaLnBrk="1" latinLnBrk="0" hangingPunct="1">
+              <a:defRPr sz="1800" kern="1200">
+                <a:solidFill>
+                  <a:schemeClr val="tx1"/>
+                </a:solidFill>
+                <a:latin typeface="+mn-lt"/>
+                <a:ea typeface="+mn-ea"/>
+                <a:cs typeface="+mn-cs"/>
+              </a:defRPr>
+            </a:lvl6pPr>
+            <a:lvl7pPr marL="2743200" algn="l" defTabSz="914400" rtl="0" eaLnBrk="1" latinLnBrk="0" hangingPunct="1">
+              <a:defRPr sz="1800" kern="1200">
+                <a:solidFill>
+                  <a:schemeClr val="tx1"/>
+                </a:solidFill>
+                <a:latin typeface="+mn-lt"/>
+                <a:ea typeface="+mn-ea"/>
+                <a:cs typeface="+mn-cs"/>
+              </a:defRPr>
+            </a:lvl7pPr>
+            <a:lvl8pPr marL="3200400" algn="l" defTabSz="914400" rtl="0" eaLnBrk="1" latinLnBrk="0" hangingPunct="1">
+              <a:defRPr sz="1800" kern="1200">
+                <a:solidFill>
+                  <a:schemeClr val="tx1"/>
+                </a:solidFill>
+                <a:latin typeface="+mn-lt"/>
+                <a:ea typeface="+mn-ea"/>
+                <a:cs typeface="+mn-cs"/>
+              </a:defRPr>
+            </a:lvl8pPr>
+            <a:lvl9pPr marL="3657600" algn="l" defTabSz="914400" rtl="0" eaLnBrk="1" latinLnBrk="0" hangingPunct="1">
+              <a:defRPr sz="1800" kern="1200">
+                <a:solidFill>
+                  <a:schemeClr val="tx1"/>
+                </a:solidFill>
+                <a:latin typeface="+mn-lt"/>
+                <a:ea typeface="+mn-ea"/>
+                <a:cs typeface="+mn-cs"/>
+              </a:defRPr>
+            </a:lvl9pPr>
+          </a:lstStyle>
+          <a:p>
+            <a:fld id="{8F8706B9-C4D9-4918-81D4-F2158A241B80}" type="slidenum">
+              <a:rPr lang="zh-CN" altLang="en-US" smtClean="0"/>
+            </a:fld>
+            <a:r>
+              <a:rPr lang="en-US" altLang="zh-CN" dirty="0"/>
+              <a:t>/18</a:t>
+            </a:r>
+            <a:endParaRPr lang="zh-CN" altLang="en-US" dirty="0"/>
+          </a:p>
+        </p:txBody>
+      </p:sp>
+      <p:sp>
+        <p:nvSpPr>
+          <p:cNvPr id="2" name="箭头: 右 2"/>
+          <p:cNvSpPr/>
+          <p:nvPr/>
+        </p:nvSpPr>
+        <p:spPr>
+          <a:xfrm rot="5400000">
+            <a:off x="2240303" y="2639648"/>
+            <a:ext cx="349641" cy="405442"/>
+          </a:xfrm>
+          <a:prstGeom prst="rightArrow">
+            <a:avLst/>
+          </a:prstGeom>
+          <a:solidFill>
+            <a:srgbClr val="014099"/>
+          </a:solidFill>
+          <a:ln w="38100">
+            <a:noFill/>
+          </a:ln>
+        </p:spPr>
+        <p:style>
+          <a:lnRef idx="2">
+            <a:schemeClr val="accent1">
+              <a:shade val="50000"/>
+            </a:schemeClr>
+          </a:lnRef>
+          <a:fillRef idx="1">
+            <a:schemeClr val="accent1"/>
+          </a:fillRef>
+          <a:effectRef idx="0">
+            <a:schemeClr val="accent1"/>
+          </a:effectRef>
+          <a:fontRef idx="minor">
+            <a:schemeClr val="lt1"/>
+          </a:fontRef>
+        </p:style>
+        <p:txBody>
+          <a:bodyPr rtlCol="0" anchor="ctr"/>
+          <a:lstStyle/>
+          <a:p>
+            <a:pPr algn="ctr"/>
+            <a:endParaRPr lang="zh-CN" altLang="en-US"/>
+          </a:p>
+        </p:txBody>
+      </p:sp>
+      <p:sp>
+        <p:nvSpPr>
+          <p:cNvPr id="8" name="矩形: 圆角 7"/>
+          <p:cNvSpPr/>
+          <p:nvPr/>
+        </p:nvSpPr>
+        <p:spPr>
+          <a:xfrm>
+            <a:off x="247558" y="1017636"/>
+            <a:ext cx="4207147" cy="1521699"/>
+          </a:xfrm>
+          <a:prstGeom prst="roundRect">
+            <a:avLst/>
+          </a:prstGeom>
+          <a:noFill/>
+          <a:ln w="38100">
+            <a:solidFill>
+              <a:srgbClr val="014099"/>
+            </a:solidFill>
+          </a:ln>
+        </p:spPr>
+        <p:style>
+          <a:lnRef idx="2">
+            <a:schemeClr val="accent1">
+              <a:shade val="50000"/>
+            </a:schemeClr>
+          </a:lnRef>
+          <a:fillRef idx="1">
+            <a:schemeClr val="accent1"/>
+          </a:fillRef>
+          <a:effectRef idx="0">
+            <a:schemeClr val="accent1"/>
+          </a:effectRef>
+          <a:fontRef idx="minor">
+            <a:schemeClr val="lt1"/>
+          </a:fontRef>
+        </p:style>
+        <p:txBody>
+          <a:bodyPr lIns="90000" tIns="0" rIns="90000" bIns="0" rtlCol="0" anchor="ctr"/>
+          <a:lstStyle/>
+          <a:p>
+            <a:pPr>
+              <a:lnSpc>
+                <a:spcPct val="120000"/>
+              </a:lnSpc>
+            </a:pPr>
+            <a:r>
+              <a:rPr lang="zh-CN" altLang="en-US" dirty="0">
+                <a:solidFill>
+                  <a:schemeClr val="tx1"/>
+                </a:solidFill>
+                <a:latin typeface="宋体" panose="02010600030101010101" pitchFamily="2" charset="-122"/>
+                <a:ea typeface="宋体" panose="02010600030101010101" pitchFamily="2" charset="-122"/>
+                <a:cs typeface="阿里巴巴普惠体 3.0 65 Medium" panose="00020600040101010101" pitchFamily="18" charset="-122"/>
+              </a:rPr>
+              <a:t>问题三：</a:t>
+            </a:r>
+            <a:endParaRPr lang="en-US" altLang="zh-CN" dirty="0">
+              <a:solidFill>
+                <a:schemeClr val="tx1"/>
+              </a:solidFill>
+              <a:latin typeface="阿里巴巴普惠体 3.0 65 Medium" panose="00020600040101010101" pitchFamily="18" charset="-122"/>
+              <a:ea typeface="阿里巴巴普惠体 3.0 65 Medium" panose="00020600040101010101" pitchFamily="18" charset="-122"/>
+              <a:cs typeface="阿里巴巴普惠体 3.0 65 Medium" panose="00020600040101010101" pitchFamily="18" charset="-122"/>
+            </a:endParaRPr>
+          </a:p>
+          <a:p>
+            <a:pPr>
+              <a:lnSpc>
+                <a:spcPct val="120000"/>
+              </a:lnSpc>
+            </a:pPr>
+            <a:r>
+              <a:rPr lang="zh-CN" altLang="en-US" sz="1600" dirty="0">
+                <a:solidFill>
+                  <a:schemeClr val="tx1"/>
+                </a:solidFill>
+                <a:latin typeface="宋体" panose="02010600030101010101" pitchFamily="2" charset="-122"/>
+                <a:ea typeface="宋体" panose="02010600030101010101" pitchFamily="2" charset="-122"/>
+                <a:cs typeface="宋体" panose="02010600030101010101" pitchFamily="2" charset="-122"/>
+              </a:rPr>
+              <a:t>深度估计图往往存在局部不确定性与伪影，直接融合会引入噪声干扰；且几何信息在深层网络中极易被</a:t>
+            </a:r>
+            <a:r>
+              <a:rPr lang="zh-CN" altLang="en-US" sz="1600" dirty="0">
+                <a:solidFill>
+                  <a:srgbClr val="FF0000"/>
+                </a:solidFill>
+                <a:latin typeface="宋体" panose="02010600030101010101" pitchFamily="2" charset="-122"/>
+                <a:ea typeface="宋体" panose="02010600030101010101" pitchFamily="2" charset="-122"/>
+                <a:cs typeface="宋体" panose="02010600030101010101" pitchFamily="2" charset="-122"/>
+              </a:rPr>
+              <a:t>RGB特征稀释</a:t>
+            </a:r>
+            <a:r>
+              <a:rPr lang="zh-CN" altLang="en-US" sz="1600" dirty="0">
+                <a:solidFill>
+                  <a:schemeClr val="tx1"/>
+                </a:solidFill>
+                <a:latin typeface="宋体" panose="02010600030101010101" pitchFamily="2" charset="-122"/>
+                <a:ea typeface="宋体" panose="02010600030101010101" pitchFamily="2" charset="-122"/>
+                <a:cs typeface="宋体" panose="02010600030101010101" pitchFamily="2" charset="-122"/>
+              </a:rPr>
+              <a:t>。</a:t>
+            </a:r>
+            <a:endParaRPr lang="zh-CN" altLang="en-US" sz="1600" dirty="0">
+              <a:solidFill>
+                <a:schemeClr val="tx1"/>
+              </a:solidFill>
+              <a:latin typeface="宋体" panose="02010600030101010101" pitchFamily="2" charset="-122"/>
+              <a:ea typeface="宋体" panose="02010600030101010101" pitchFamily="2" charset="-122"/>
+              <a:cs typeface="宋体" panose="02010600030101010101" pitchFamily="2" charset="-122"/>
+            </a:endParaRPr>
+          </a:p>
+        </p:txBody>
+      </p:sp>
+      <p:sp>
+        <p:nvSpPr>
+          <p:cNvPr id="10" name="矩形: 圆角 9"/>
+          <p:cNvSpPr/>
+          <p:nvPr/>
+        </p:nvSpPr>
+        <p:spPr>
+          <a:xfrm>
+            <a:off x="247559" y="3145403"/>
+            <a:ext cx="4207148" cy="1416020"/>
+          </a:xfrm>
+          <a:prstGeom prst="roundRect">
+            <a:avLst/>
+          </a:prstGeom>
+          <a:noFill/>
+          <a:ln w="38100">
+            <a:solidFill>
+              <a:srgbClr val="014099"/>
+            </a:solidFill>
+          </a:ln>
+        </p:spPr>
+        <p:style>
+          <a:lnRef idx="2">
+            <a:schemeClr val="accent1">
+              <a:shade val="50000"/>
+            </a:schemeClr>
+          </a:lnRef>
+          <a:fillRef idx="1">
+            <a:schemeClr val="accent1"/>
+          </a:fillRef>
+          <a:effectRef idx="0">
+            <a:schemeClr val="accent1"/>
+          </a:effectRef>
+          <a:fontRef idx="minor">
+            <a:schemeClr val="lt1"/>
+          </a:fontRef>
+        </p:style>
+        <p:txBody>
+          <a:bodyPr lIns="90000" tIns="0" rIns="90000" bIns="0" rtlCol="0" anchor="ctr"/>
+          <a:lstStyle/>
+          <a:p>
+            <a:pPr>
+              <a:lnSpc>
+                <a:spcPct val="120000"/>
+              </a:lnSpc>
+            </a:pPr>
+            <a:r>
+              <a:rPr lang="zh-CN" altLang="en-US" dirty="0">
+                <a:solidFill>
+                  <a:schemeClr val="tx1"/>
+                </a:solidFill>
+                <a:latin typeface="宋体" panose="02010600030101010101" pitchFamily="2" charset="-122"/>
+                <a:ea typeface="宋体" panose="02010600030101010101" pitchFamily="2" charset="-122"/>
+                <a:cs typeface="阿里巴巴普惠体 3.0 65 Medium" panose="00020600040101010101" pitchFamily="18" charset="-122"/>
+              </a:rPr>
+              <a:t>思路：</a:t>
+            </a:r>
+            <a:endParaRPr lang="en-US" altLang="zh-CN" dirty="0">
+              <a:solidFill>
+                <a:schemeClr val="tx1"/>
+              </a:solidFill>
+              <a:latin typeface="阿里巴巴普惠体 3.0 65 Medium" panose="00020600040101010101" pitchFamily="18" charset="-122"/>
+              <a:ea typeface="阿里巴巴普惠体 3.0 65 Medium" panose="00020600040101010101" pitchFamily="18" charset="-122"/>
+              <a:cs typeface="阿里巴巴普惠体 3.0 65 Medium" panose="00020600040101010101" pitchFamily="18" charset="-122"/>
+            </a:endParaRPr>
+          </a:p>
+          <a:p>
+            <a:pPr>
+              <a:lnSpc>
+                <a:spcPct val="120000"/>
+              </a:lnSpc>
+            </a:pPr>
+            <a:r>
+              <a:rPr lang="zh-CN" altLang="en-US" sz="1600" dirty="0">
+                <a:solidFill>
+                  <a:schemeClr val="tx1"/>
+                </a:solidFill>
+                <a:latin typeface="宋体" panose="02010600030101010101" pitchFamily="2" charset="-122"/>
+                <a:ea typeface="宋体" panose="02010600030101010101" pitchFamily="2" charset="-122"/>
+                <a:cs typeface="宋体" panose="02010600030101010101" pitchFamily="2" charset="-122"/>
+              </a:rPr>
+              <a:t>基于局部方差构建置信度评估机制，对特征进行加权筛选（</a:t>
+            </a:r>
+            <a:r>
+              <a:rPr lang="en-US" altLang="zh-CN" sz="1600" dirty="0">
+                <a:solidFill>
+                  <a:schemeClr val="tx1"/>
+                </a:solidFill>
+                <a:latin typeface="宋体" panose="02010600030101010101" pitchFamily="2" charset="-122"/>
+                <a:ea typeface="宋体" panose="02010600030101010101" pitchFamily="2" charset="-122"/>
+                <a:cs typeface="宋体" panose="02010600030101010101" pitchFamily="2" charset="-122"/>
+              </a:rPr>
+              <a:t>“</a:t>
+            </a:r>
+            <a:r>
+              <a:rPr lang="zh-CN" altLang="en-US" sz="1600" dirty="0">
+                <a:solidFill>
+                  <a:schemeClr val="tx1"/>
+                </a:solidFill>
+                <a:latin typeface="宋体" panose="02010600030101010101" pitchFamily="2" charset="-122"/>
+                <a:ea typeface="宋体" panose="02010600030101010101" pitchFamily="2" charset="-122"/>
+                <a:cs typeface="宋体" panose="02010600030101010101" pitchFamily="2" charset="-122"/>
+              </a:rPr>
+              <a:t>去伪存真</a:t>
+            </a:r>
+            <a:r>
+              <a:rPr lang="en-US" altLang="zh-CN" sz="1600" dirty="0">
+                <a:solidFill>
+                  <a:schemeClr val="tx1"/>
+                </a:solidFill>
+                <a:latin typeface="宋体" panose="02010600030101010101" pitchFamily="2" charset="-122"/>
+                <a:ea typeface="宋体" panose="02010600030101010101" pitchFamily="2" charset="-122"/>
+                <a:cs typeface="宋体" panose="02010600030101010101" pitchFamily="2" charset="-122"/>
+              </a:rPr>
+              <a:t>”</a:t>
+            </a:r>
+            <a:r>
+              <a:rPr lang="zh-CN" altLang="en-US" sz="1600" dirty="0">
+                <a:solidFill>
+                  <a:schemeClr val="tx1"/>
+                </a:solidFill>
+                <a:latin typeface="宋体" panose="02010600030101010101" pitchFamily="2" charset="-122"/>
+                <a:ea typeface="宋体" panose="02010600030101010101" pitchFamily="2" charset="-122"/>
+                <a:cs typeface="宋体" panose="02010600030101010101" pitchFamily="2" charset="-122"/>
+              </a:rPr>
+              <a:t>），并建立跨层通路防止几何信息遗忘。</a:t>
+            </a:r>
+            <a:endParaRPr lang="zh-CN" altLang="en-US" sz="1600" dirty="0">
+              <a:solidFill>
+                <a:schemeClr val="tx1"/>
+              </a:solidFill>
+              <a:latin typeface="宋体" panose="02010600030101010101" pitchFamily="2" charset="-122"/>
+              <a:ea typeface="宋体" panose="02010600030101010101" pitchFamily="2" charset="-122"/>
+              <a:cs typeface="宋体" panose="02010600030101010101" pitchFamily="2" charset="-122"/>
+            </a:endParaRPr>
+          </a:p>
+        </p:txBody>
+      </p:sp>
+      <p:sp>
+        <p:nvSpPr>
+          <p:cNvPr id="4" name="矩形: 圆角 10"/>
+          <p:cNvSpPr/>
+          <p:nvPr/>
+        </p:nvSpPr>
+        <p:spPr>
+          <a:xfrm>
+            <a:off x="247650" y="5039360"/>
+            <a:ext cx="4206875" cy="1667510"/>
+          </a:xfrm>
+          <a:prstGeom prst="roundRect">
+            <a:avLst/>
+          </a:prstGeom>
+          <a:noFill/>
+          <a:ln w="38100">
+            <a:solidFill>
+              <a:srgbClr val="014099"/>
+            </a:solidFill>
+          </a:ln>
+        </p:spPr>
+        <p:style>
+          <a:lnRef idx="2">
+            <a:schemeClr val="accent1">
+              <a:shade val="50000"/>
+            </a:schemeClr>
+          </a:lnRef>
+          <a:fillRef idx="1">
+            <a:schemeClr val="accent1"/>
+          </a:fillRef>
+          <a:effectRef idx="0">
+            <a:schemeClr val="accent1"/>
+          </a:effectRef>
+          <a:fontRef idx="minor">
+            <a:schemeClr val="lt1"/>
+          </a:fontRef>
+        </p:style>
+        <p:txBody>
+          <a:bodyPr lIns="72000" tIns="0" rIns="90000" bIns="0" rtlCol="0" anchor="ctr"/>
+          <a:lstStyle/>
+          <a:p>
+            <a:pPr>
+              <a:lnSpc>
+                <a:spcPct val="120000"/>
+              </a:lnSpc>
+            </a:pPr>
+            <a:r>
+              <a:rPr lang="zh-CN" altLang="en-US" dirty="0">
+                <a:solidFill>
+                  <a:schemeClr val="tx1"/>
+                </a:solidFill>
+                <a:latin typeface="宋体" panose="02010600030101010101" pitchFamily="2" charset="-122"/>
+                <a:ea typeface="宋体" panose="02010600030101010101" pitchFamily="2" charset="-122"/>
+                <a:cs typeface="阿里巴巴普惠体 3.0 65 Medium" panose="00020600040101010101" pitchFamily="18" charset="-122"/>
+              </a:rPr>
+              <a:t>方案：</a:t>
+            </a:r>
+            <a:endParaRPr lang="en-US" altLang="zh-CN" dirty="0">
+              <a:solidFill>
+                <a:schemeClr val="tx1"/>
+              </a:solidFill>
+              <a:latin typeface="宋体" panose="02010600030101010101" pitchFamily="2" charset="-122"/>
+              <a:ea typeface="宋体" panose="02010600030101010101" pitchFamily="2" charset="-122"/>
+              <a:cs typeface="阿里巴巴普惠体 3.0 65 Medium" panose="00020600040101010101" pitchFamily="18" charset="-122"/>
+            </a:endParaRPr>
+          </a:p>
+          <a:p>
+            <a:pPr>
+              <a:lnSpc>
+                <a:spcPct val="120000"/>
+              </a:lnSpc>
+            </a:pPr>
+            <a:r>
+              <a:rPr lang="zh-CN" altLang="en-US" sz="1600" dirty="0">
+                <a:solidFill>
+                  <a:schemeClr val="tx1"/>
+                </a:solidFill>
+                <a:latin typeface="宋体" panose="02010600030101010101" pitchFamily="2" charset="-122"/>
+                <a:ea typeface="宋体" panose="02010600030101010101" pitchFamily="2" charset="-122"/>
+                <a:cs typeface="宋体" panose="02010600030101010101" pitchFamily="2" charset="-122"/>
+              </a:rPr>
+              <a:t>构建跨尺度几何显著性引导机制。引入质量加权的</a:t>
+            </a:r>
+            <a:r>
+              <a:rPr lang="zh-CN" altLang="en-US" sz="1600" dirty="0">
+                <a:solidFill>
+                  <a:srgbClr val="FF0000"/>
+                </a:solidFill>
+                <a:latin typeface="宋体" panose="02010600030101010101" pitchFamily="2" charset="-122"/>
+                <a:ea typeface="宋体" panose="02010600030101010101" pitchFamily="2" charset="-122"/>
+                <a:cs typeface="宋体" panose="02010600030101010101" pitchFamily="2" charset="-122"/>
+              </a:rPr>
+              <a:t>注意力门控</a:t>
+            </a:r>
+            <a:r>
+              <a:rPr lang="zh-CN" altLang="en-US" sz="1600" dirty="0">
+                <a:solidFill>
+                  <a:schemeClr val="tx1"/>
+                </a:solidFill>
+                <a:latin typeface="宋体" panose="02010600030101010101" pitchFamily="2" charset="-122"/>
+                <a:ea typeface="宋体" panose="02010600030101010101" pitchFamily="2" charset="-122"/>
+                <a:cs typeface="宋体" panose="02010600030101010101" pitchFamily="2" charset="-122"/>
+              </a:rPr>
+              <a:t>滤除伪影干扰;以残差流形式直接引导深层特征的聚合方向,防止几何信息在下采样过程中丢失。</a:t>
+            </a:r>
+            <a:endParaRPr lang="zh-CN" altLang="en-US" sz="1400" b="1" dirty="0">
+              <a:solidFill>
+                <a:schemeClr val="tx1"/>
+              </a:solidFill>
+              <a:latin typeface="宋体" panose="02010600030101010101" pitchFamily="2" charset="-122"/>
+              <a:ea typeface="宋体" panose="02010600030101010101" pitchFamily="2" charset="-122"/>
+              <a:cs typeface="宋体" panose="02010600030101010101" pitchFamily="2" charset="-122"/>
+            </a:endParaRPr>
+          </a:p>
+        </p:txBody>
+      </p:sp>
+      <p:sp>
+        <p:nvSpPr>
+          <p:cNvPr id="12" name="箭头: 右 11"/>
+          <p:cNvSpPr/>
+          <p:nvPr/>
+        </p:nvSpPr>
+        <p:spPr>
+          <a:xfrm rot="5400000">
+            <a:off x="2240303" y="4633162"/>
+            <a:ext cx="349641" cy="405442"/>
+          </a:xfrm>
+          <a:prstGeom prst="rightArrow">
+            <a:avLst/>
+          </a:prstGeom>
+          <a:solidFill>
+            <a:srgbClr val="014099"/>
+          </a:solidFill>
+          <a:ln w="38100">
+            <a:noFill/>
+          </a:ln>
+        </p:spPr>
+        <p:style>
+          <a:lnRef idx="2">
+            <a:schemeClr val="accent1">
+              <a:shade val="50000"/>
+            </a:schemeClr>
+          </a:lnRef>
+          <a:fillRef idx="1">
+            <a:schemeClr val="accent1"/>
+          </a:fillRef>
+          <a:effectRef idx="0">
+            <a:schemeClr val="accent1"/>
+          </a:effectRef>
+          <a:fontRef idx="minor">
+            <a:schemeClr val="lt1"/>
+          </a:fontRef>
+        </p:style>
+        <p:txBody>
+          <a:bodyPr rtlCol="0" anchor="ctr"/>
+          <a:lstStyle/>
+          <a:p>
+            <a:pPr algn="ctr"/>
+            <a:endParaRPr lang="zh-CN" altLang="en-US"/>
+          </a:p>
+        </p:txBody>
+      </p:sp>
+      <p:sp>
+        <p:nvSpPr>
+          <p:cNvPr id="6" name="文本框 5"/>
+          <p:cNvSpPr txBox="1"/>
+          <p:nvPr/>
+        </p:nvSpPr>
+        <p:spPr>
+          <a:xfrm>
+            <a:off x="4763441" y="1017636"/>
+            <a:ext cx="5923749" cy="1198880"/>
+          </a:xfrm>
+          <a:prstGeom prst="rect">
+            <a:avLst/>
+          </a:prstGeom>
+          <a:noFill/>
+        </p:spPr>
+        <p:txBody>
+          <a:bodyPr wrap="square">
+            <a:spAutoFit/>
+          </a:bodyPr>
+          <a:lstStyle/>
+          <a:p>
+            <a:pPr>
+              <a:lnSpc>
+                <a:spcPct val="150000"/>
+              </a:lnSpc>
+            </a:pPr>
+            <a:r>
+              <a:rPr lang="zh-CN" altLang="en-US" sz="2400" b="1" dirty="0">
+                <a:latin typeface="阿里巴巴普惠体 3.0 55 Regular" panose="00020600040101010101" pitchFamily="18" charset="-122"/>
+                <a:ea typeface="阿里巴巴普惠体 3.0 55 Regular" panose="00020600040101010101" pitchFamily="18" charset="-122"/>
+                <a:cs typeface="阿里巴巴普惠体 3.0 55 Regular" panose="00020600040101010101" pitchFamily="18" charset="-122"/>
+              </a:rPr>
+              <a:t>研究内容二：</a:t>
+            </a:r>
+            <a:r>
+              <a:rPr lang="zh-CN" altLang="en-US" sz="2400" b="1" dirty="0">
+                <a:latin typeface="宋体" panose="02010600030101010101" pitchFamily="2" charset="-122"/>
+                <a:ea typeface="宋体" panose="02010600030101010101" pitchFamily="2" charset="-122"/>
+                <a:cs typeface="阿里巴巴普惠体 3.0 55 Regular" panose="00020600040101010101" pitchFamily="18" charset="-122"/>
+                <a:sym typeface="+mn-ea"/>
+              </a:rPr>
+              <a:t>如何提升</a:t>
+            </a:r>
+            <a:r>
+              <a:rPr lang="en-US" altLang="zh-CN" sz="2400" b="1" dirty="0">
+                <a:latin typeface="宋体" panose="02010600030101010101" pitchFamily="2" charset="-122"/>
+                <a:ea typeface="宋体" panose="02010600030101010101" pitchFamily="2" charset="-122"/>
+                <a:cs typeface="阿里巴巴普惠体 3.0 55 Regular" panose="00020600040101010101" pitchFamily="18" charset="-122"/>
+                <a:sym typeface="+mn-ea"/>
+              </a:rPr>
+              <a:t>RGBD</a:t>
+            </a:r>
+            <a:r>
+              <a:rPr lang="zh-CN" altLang="en-US" sz="2400" b="1" dirty="0">
+                <a:latin typeface="宋体" panose="02010600030101010101" pitchFamily="2" charset="-122"/>
+                <a:ea typeface="宋体" panose="02010600030101010101" pitchFamily="2" charset="-122"/>
+                <a:cs typeface="阿里巴巴普惠体 3.0 55 Regular" panose="00020600040101010101" pitchFamily="18" charset="-122"/>
+                <a:sym typeface="+mn-ea"/>
+              </a:rPr>
+              <a:t>对航拍图像目标的检测能力</a:t>
+            </a:r>
+            <a:endParaRPr lang="zh-CN" altLang="en-US" sz="2400" dirty="0">
+              <a:solidFill>
+                <a:schemeClr val="tx1"/>
+              </a:solidFill>
+              <a:latin typeface="阿里巴巴普惠体 3.0 55 Regular" panose="00020600040101010101" pitchFamily="18" charset="-122"/>
+              <a:ea typeface="阿里巴巴普惠体 3.0 55 Regular" panose="00020600040101010101" pitchFamily="18" charset="-122"/>
+              <a:cs typeface="阿里巴巴普惠体 3.0 55 Regular" panose="00020600040101010101" pitchFamily="18" charset="-122"/>
+            </a:endParaRPr>
+          </a:p>
+        </p:txBody>
+      </p:sp>
+      <p:pic>
+        <p:nvPicPr>
+          <p:cNvPr id="7" name="图片 6" descr="GM-Gate"/>
+          <p:cNvPicPr>
+            <a:picLocks noChangeAspect="1"/>
+          </p:cNvPicPr>
+          <p:nvPr/>
+        </p:nvPicPr>
+        <p:blipFill>
+          <a:blip r:embed="rId1"/>
+          <a:stretch>
+            <a:fillRect/>
+          </a:stretch>
+        </p:blipFill>
+        <p:spPr>
+          <a:xfrm>
+            <a:off x="4675505" y="2781935"/>
+            <a:ext cx="7212965" cy="3181350"/>
+          </a:xfrm>
+          <a:prstGeom prst="rect">
+            <a:avLst/>
+          </a:prstGeom>
+        </p:spPr>
+      </p:pic>
+    </p:spTree>
+  </p:cSld>
+  <p:clrMapOvr>
+    <a:masterClrMapping/>
+  </p:clrMapOvr>
+  <p:transition spd="slow" advTm="0">
+    <p:push dir="u"/>
+  </p:transition>
+  <p:timing>
+    <p:tnLst>
+      <p:par>
+        <p:cTn id="1" dur="indefinite" restart="never" nodeType="tmRoot">
+          <p:childTnLst>
+            <p:seq concurrent="1" nextAc="seek">
+              <p:cTn id="2" dur="indefinite" nodeType="mainSeq">
+                <p:childTnLst>
+                  <p:par>
+                    <p:cTn id="3" fill="hold">
+                      <p:stCondLst>
+                        <p:cond delay="indefinite"/>
+                        <p:cond evt="onBegin" delay="0">
+                          <p:tn val="2"/>
+                        </p:cond>
+                      </p:stCondLst>
+                      <p:childTnLst>
+                        <p:par>
+                          <p:cTn id="4" fill="hold">
+                            <p:stCondLst>
+                              <p:cond delay="0"/>
+                            </p:stCondLst>
+                            <p:childTnLst>
+                              <p:par>
+                                <p:cTn id="5" presetID="10" presetClass="entr" presetSubtype="0" fill="hold" grpId="0" nodeType="withEffect">
+                                  <p:stCondLst>
+                                    <p:cond delay="0"/>
+                                  </p:stCondLst>
+                                  <p:childTnLst>
+                                    <p:set>
+                                      <p:cBhvr>
+                                        <p:cTn id="6" dur="1" fill="hold">
+                                          <p:stCondLst>
+                                            <p:cond delay="0"/>
+                                          </p:stCondLst>
+                                        </p:cTn>
+                                        <p:tgtEl>
+                                          <p:spTgt spid="6"/>
+                                        </p:tgtEl>
+                                        <p:attrNameLst>
+                                          <p:attrName>style.visibility</p:attrName>
+                                        </p:attrNameLst>
+                                      </p:cBhvr>
+                                      <p:to>
+                                        <p:strVal val="visible"/>
+                                      </p:to>
+                                    </p:set>
+                                    <p:animEffect transition="in" filter="fade">
+                                      <p:cBhvr>
+                                        <p:cTn id="7" dur="500"/>
+                                        <p:tgtEl>
+                                          <p:spTgt spid="6"/>
+                                        </p:tgtEl>
+                                      </p:cBhvr>
+                                    </p:animEffect>
+                                  </p:childTnLst>
+                                </p:cTn>
+                              </p:par>
+                              <p:par>
+                                <p:cTn id="8" presetID="10" presetClass="entr" presetSubtype="0" fill="hold" grpId="0" nodeType="withEffect">
+                                  <p:stCondLst>
+                                    <p:cond delay="0"/>
+                                  </p:stCondLst>
+                                  <p:childTnLst>
+                                    <p:set>
+                                      <p:cBhvr>
+                                        <p:cTn id="9" dur="1" fill="hold">
+                                          <p:stCondLst>
+                                            <p:cond delay="0"/>
+                                          </p:stCondLst>
+                                        </p:cTn>
+                                        <p:tgtEl>
+                                          <p:spTgt spid="8"/>
+                                        </p:tgtEl>
+                                        <p:attrNameLst>
+                                          <p:attrName>style.visibility</p:attrName>
+                                        </p:attrNameLst>
+                                      </p:cBhvr>
+                                      <p:to>
+                                        <p:strVal val="visible"/>
+                                      </p:to>
+                                    </p:set>
+                                    <p:animEffect transition="in" filter="fade">
+                                      <p:cBhvr>
+                                        <p:cTn id="10" dur="500"/>
+                                        <p:tgtEl>
+                                          <p:spTgt spid="8"/>
+                                        </p:tgtEl>
+                                      </p:cBhvr>
+                                    </p:animEffect>
+                                  </p:childTnLst>
+                                </p:cTn>
+                              </p:par>
+                            </p:childTnLst>
+                          </p:cTn>
+                        </p:par>
+                      </p:childTnLst>
+                    </p:cTn>
+                  </p:par>
+                  <p:par>
+                    <p:cTn id="11" fill="hold">
+                      <p:stCondLst>
+                        <p:cond delay="indefinite"/>
+                      </p:stCondLst>
+                      <p:childTnLst>
+                        <p:par>
+                          <p:cTn id="12" fill="hold">
+                            <p:stCondLst>
+                              <p:cond delay="0"/>
+                            </p:stCondLst>
+                            <p:childTnLst>
+                              <p:par>
+                                <p:cTn id="13" presetID="10" presetClass="entr" presetSubtype="0" fill="hold" grpId="0" nodeType="clickEffect">
+                                  <p:stCondLst>
+                                    <p:cond delay="0"/>
+                                  </p:stCondLst>
+                                  <p:childTnLst>
+                                    <p:set>
+                                      <p:cBhvr>
+                                        <p:cTn id="14" dur="1" fill="hold">
+                                          <p:stCondLst>
+                                            <p:cond delay="0"/>
+                                          </p:stCondLst>
+                                        </p:cTn>
+                                        <p:tgtEl>
+                                          <p:spTgt spid="2"/>
+                                        </p:tgtEl>
+                                        <p:attrNameLst>
+                                          <p:attrName>style.visibility</p:attrName>
+                                        </p:attrNameLst>
+                                      </p:cBhvr>
+                                      <p:to>
+                                        <p:strVal val="visible"/>
+                                      </p:to>
+                                    </p:set>
+                                    <p:animEffect transition="in" filter="fade">
+                                      <p:cBhvr>
+                                        <p:cTn id="15" dur="500"/>
+                                        <p:tgtEl>
+                                          <p:spTgt spid="2"/>
+                                        </p:tgtEl>
+                                      </p:cBhvr>
+                                    </p:animEffect>
+                                  </p:childTnLst>
+                                </p:cTn>
+                              </p:par>
+                              <p:par>
+                                <p:cTn id="16" presetID="10" presetClass="entr" presetSubtype="0" fill="hold" grpId="0" nodeType="withEffect">
+                                  <p:stCondLst>
+                                    <p:cond delay="0"/>
+                                  </p:stCondLst>
+                                  <p:childTnLst>
+                                    <p:set>
+                                      <p:cBhvr>
+                                        <p:cTn id="17" dur="1" fill="hold">
+                                          <p:stCondLst>
+                                            <p:cond delay="0"/>
+                                          </p:stCondLst>
+                                        </p:cTn>
+                                        <p:tgtEl>
+                                          <p:spTgt spid="10"/>
+                                        </p:tgtEl>
+                                        <p:attrNameLst>
+                                          <p:attrName>style.visibility</p:attrName>
+                                        </p:attrNameLst>
+                                      </p:cBhvr>
+                                      <p:to>
+                                        <p:strVal val="visible"/>
+                                      </p:to>
+                                    </p:set>
+                                    <p:animEffect transition="in" filter="fade">
+                                      <p:cBhvr>
+                                        <p:cTn id="18" dur="500"/>
+                                        <p:tgtEl>
+                                          <p:spTgt spid="10"/>
+                                        </p:tgtEl>
+                                      </p:cBhvr>
+                                    </p:animEffect>
+                                  </p:childTnLst>
+                                </p:cTn>
+                              </p:par>
+                            </p:childTnLst>
+                          </p:cTn>
+                        </p:par>
+                      </p:childTnLst>
+                    </p:cTn>
+                  </p:par>
+                  <p:par>
+                    <p:cTn id="19" fill="hold">
+                      <p:stCondLst>
+                        <p:cond delay="indefinite"/>
+                      </p:stCondLst>
+                      <p:childTnLst>
+                        <p:par>
+                          <p:cTn id="20" fill="hold">
+                            <p:stCondLst>
+                              <p:cond delay="0"/>
+                            </p:stCondLst>
+                            <p:childTnLst>
+                              <p:par>
+                                <p:cTn id="21" presetID="10" presetClass="entr" presetSubtype="0" fill="hold" grpId="0" nodeType="clickEffect">
+                                  <p:stCondLst>
+                                    <p:cond delay="0"/>
+                                  </p:stCondLst>
+                                  <p:childTnLst>
+                                    <p:set>
+                                      <p:cBhvr>
+                                        <p:cTn id="22" dur="1" fill="hold">
+                                          <p:stCondLst>
+                                            <p:cond delay="0"/>
+                                          </p:stCondLst>
+                                        </p:cTn>
+                                        <p:tgtEl>
+                                          <p:spTgt spid="12"/>
+                                        </p:tgtEl>
+                                        <p:attrNameLst>
+                                          <p:attrName>style.visibility</p:attrName>
+                                        </p:attrNameLst>
+                                      </p:cBhvr>
+                                      <p:to>
+                                        <p:strVal val="visible"/>
+                                      </p:to>
+                                    </p:set>
+                                    <p:animEffect transition="in" filter="fade">
+                                      <p:cBhvr>
+                                        <p:cTn id="23" dur="500"/>
+                                        <p:tgtEl>
+                                          <p:spTgt spid="12"/>
+                                        </p:tgtEl>
+                                      </p:cBhvr>
+                                    </p:animEffect>
+                                  </p:childTnLst>
+                                </p:cTn>
+                              </p:par>
+                              <p:par>
+                                <p:cTn id="24" presetID="10" presetClass="entr" presetSubtype="0" fill="hold" grpId="0" nodeType="withEffect">
+                                  <p:stCondLst>
+                                    <p:cond delay="0"/>
+                                  </p:stCondLst>
+                                  <p:childTnLst>
+                                    <p:set>
+                                      <p:cBhvr>
+                                        <p:cTn id="25" dur="1" fill="hold">
+                                          <p:stCondLst>
+                                            <p:cond delay="0"/>
+                                          </p:stCondLst>
+                                        </p:cTn>
+                                        <p:tgtEl>
+                                          <p:spTgt spid="4"/>
+                                        </p:tgtEl>
+                                        <p:attrNameLst>
+                                          <p:attrName>style.visibility</p:attrName>
+                                        </p:attrNameLst>
+                                      </p:cBhvr>
+                                      <p:to>
+                                        <p:strVal val="visible"/>
+                                      </p:to>
+                                    </p:set>
+                                    <p:animEffect transition="in" filter="fade">
+                                      <p:cBhvr>
+                                        <p:cTn id="26" dur="500"/>
+                                        <p:tgtEl>
+                                          <p:spTgt spid="4"/>
+                                        </p:tgtEl>
+                                      </p:cBhvr>
+                                    </p:animEffect>
+                                  </p:childTnLst>
+                                </p:cTn>
+                              </p:par>
+                            </p:childTnLst>
+                          </p:cTn>
+                        </p:par>
+                      </p:childTnLst>
+                    </p:cTn>
+                  </p:par>
+                  <p:par>
+                    <p:cTn id="27" fill="hold">
+                      <p:stCondLst>
+                        <p:cond delay="indefinite"/>
+                      </p:stCondLst>
+                      <p:childTnLst>
+                        <p:par>
+                          <p:cTn id="28" fill="hold">
+                            <p:stCondLst>
+                              <p:cond delay="0"/>
+                            </p:stCondLst>
+                            <p:childTnLst>
+                              <p:par>
+                                <p:cTn id="29" presetID="22" presetClass="entr" presetSubtype="4" fill="hold" nodeType="clickEffect">
+                                  <p:stCondLst>
+                                    <p:cond delay="0"/>
+                                  </p:stCondLst>
+                                  <p:childTnLst>
+                                    <p:set>
+                                      <p:cBhvr>
+                                        <p:cTn id="30" dur="1" fill="hold">
+                                          <p:stCondLst>
+                                            <p:cond delay="0"/>
+                                          </p:stCondLst>
+                                        </p:cTn>
+                                        <p:tgtEl>
+                                          <p:spTgt spid="7"/>
+                                        </p:tgtEl>
+                                        <p:attrNameLst>
+                                          <p:attrName>style.visibility</p:attrName>
+                                        </p:attrNameLst>
+                                      </p:cBhvr>
+                                      <p:to>
+                                        <p:strVal val="visible"/>
+                                      </p:to>
+                                    </p:set>
+                                    <p:animEffect transition="in" filter="wipe(down)">
+                                      <p:cBhvr>
+                                        <p:cTn id="31" dur="500"/>
+                                        <p:tgtEl>
+                                          <p:spTgt spid="7"/>
+                                        </p:tgtEl>
+                                      </p:cBhvr>
+                                    </p:animEffect>
+                                  </p:childTnLst>
+                                </p:cTn>
+                              </p:par>
+                            </p:childTnLst>
+                          </p:cTn>
+                        </p:par>
+                      </p:childTnLst>
+                    </p:cTn>
+                  </p:par>
+                </p:childTnLst>
+              </p:cTn>
+              <p:prevCondLst>
+                <p:cond evt="onPrev" delay="0">
+                  <p:tgtEl>
+                    <p:sldTgt/>
+                  </p:tgtEl>
+                </p:cond>
+              </p:prevCondLst>
+              <p:nextCondLst>
+                <p:cond evt="onNext" delay="0">
+                  <p:tgtEl>
+                    <p:sldTgt/>
+                  </p:tgtEl>
+                </p:cond>
+              </p:nextCondLst>
+            </p:seq>
+          </p:childTnLst>
+        </p:cTn>
+      </p:par>
+    </p:tnLst>
+    <p:bldLst>
+      <p:bldP spid="2" grpId="0" bldLvl="0" animBg="1"/>
+      <p:bldP spid="8" grpId="0" bldLvl="0" animBg="1"/>
+      <p:bldP spid="10" grpId="0" bldLvl="0" animBg="1"/>
+      <p:bldP spid="4" grpId="0" bldLvl="0" animBg="1"/>
+      <p:bldP spid="12" grpId="0" bldLvl="0" animBg="1"/>
+      <p:bldP spid="6" grpId="0"/>
+    </p:bldLst>
+  </p:timing>
+</p:sld>
+</file>
+
+<file path=ppt/slides/slide9.xml><?xml version="1.0" encoding="utf-8"?>
+<p:sld xmlns:a="http://schemas.openxmlformats.org/drawingml/2006/main" xmlns:r="http://schemas.openxmlformats.org/officeDocument/2006/relationships" xmlns:p="http://schemas.openxmlformats.org/presentationml/2006/main">
+  <p:cSld>
+    <p:spTree>
+      <p:nvGrpSpPr>
+        <p:cNvPr id="1" name=""/>
+        <p:cNvGrpSpPr/>
+        <p:nvPr/>
+      </p:nvGrpSpPr>
       <p:grpSpPr/>
       <p:pic>
         <p:nvPicPr>
@@ -10667,1070 +14678,6 @@
           </a:prstGeom>
         </p:spPr>
       </p:pic>
-    </p:spTree>
-  </p:cSld>
-  <p:clrMapOvr>
-    <a:masterClrMapping/>
-  </p:clrMapOvr>
-</p:sld>
-</file>
-
-<file path=ppt/slides/slide8.xml><?xml version="1.0" encoding="utf-8"?>
-<p:sld xmlns:a="http://schemas.openxmlformats.org/drawingml/2006/main" xmlns:r="http://schemas.openxmlformats.org/officeDocument/2006/relationships" xmlns:p="http://schemas.openxmlformats.org/presentationml/2006/main">
-  <p:cSld>
-    <p:spTree>
-      <p:nvGrpSpPr>
-        <p:cNvPr id="1" name=""/>
-        <p:cNvGrpSpPr/>
-        <p:nvPr/>
-      </p:nvGrpSpPr>
-      <p:grpSpPr/>
-      <p:pic>
-        <p:nvPicPr>
-          <p:cNvPr id="3" name="图片 2" descr="画家"/>
-          <p:cNvPicPr>
-            <a:picLocks noChangeAspect="1"/>
-          </p:cNvPicPr>
-          <p:nvPr/>
-        </p:nvPicPr>
-        <p:blipFill>
-          <a:blip r:embed="rId1">
-            <a:extLst>
-              <a:ext uri="{96DAC541-7B7A-43D3-8B79-37D633B846F1}">
-                <asvg:svgBlip xmlns:asvg="http://schemas.microsoft.com/office/drawing/2016/SVG/main" r:embed="rId2"/>
-              </a:ext>
-            </a:extLst>
-          </a:blip>
-          <a:stretch>
-            <a:fillRect/>
-          </a:stretch>
-        </p:blipFill>
-        <p:spPr>
-          <a:xfrm>
-            <a:off x="1480820" y="1743075"/>
-            <a:ext cx="918000" cy="918000"/>
-          </a:xfrm>
-          <a:prstGeom prst="rect">
-            <a:avLst/>
-          </a:prstGeom>
-        </p:spPr>
-      </p:pic>
-      <p:pic>
-        <p:nvPicPr>
-          <p:cNvPr id="12" name="图片 11" descr="厨师"/>
-          <p:cNvPicPr>
-            <a:picLocks noChangeAspect="1"/>
-          </p:cNvPicPr>
-          <p:nvPr/>
-        </p:nvPicPr>
-        <p:blipFill>
-          <a:blip r:embed="rId3">
-            <a:extLst>
-              <a:ext uri="{96DAC541-7B7A-43D3-8B79-37D633B846F1}">
-                <asvg:svgBlip xmlns:asvg="http://schemas.microsoft.com/office/drawing/2016/SVG/main" r:embed="rId4"/>
-              </a:ext>
-            </a:extLst>
-          </a:blip>
-          <a:stretch>
-            <a:fillRect/>
-          </a:stretch>
-        </p:blipFill>
-        <p:spPr>
-          <a:xfrm>
-            <a:off x="5636895" y="1743075"/>
-            <a:ext cx="918210" cy="918210"/>
-          </a:xfrm>
-          <a:prstGeom prst="rect">
-            <a:avLst/>
-          </a:prstGeom>
-        </p:spPr>
-      </p:pic>
-      <p:sp>
-        <p:nvSpPr>
-          <p:cNvPr id="5" name="圆角矩形 4"/>
-          <p:cNvSpPr/>
-          <p:nvPr/>
-        </p:nvSpPr>
-        <p:spPr>
-          <a:xfrm>
-            <a:off x="3189605" y="723900"/>
-            <a:ext cx="1657350" cy="3733800"/>
-          </a:xfrm>
-          <a:prstGeom prst="roundRect">
-            <a:avLst/>
-          </a:prstGeom>
-        </p:spPr>
-        <p:style>
-          <a:lnRef idx="2">
-            <a:schemeClr val="accent1">
-              <a:lumMod val="75000"/>
-            </a:schemeClr>
-          </a:lnRef>
-          <a:fillRef idx="1">
-            <a:schemeClr val="accent1"/>
-          </a:fillRef>
-          <a:effectRef idx="0">
-            <a:srgbClr val="FFFFFF"/>
-          </a:effectRef>
-          <a:fontRef idx="minor">
-            <a:schemeClr val="lt1"/>
-          </a:fontRef>
-        </p:style>
-        <p:txBody>
-          <a:bodyPr rtlCol="0" anchor="ctr"/>
-          <a:p>
-            <a:pPr algn="ctr"/>
-            <a:endParaRPr lang="zh-CN" altLang="en-US"/>
-          </a:p>
-        </p:txBody>
-      </p:sp>
-      <p:sp>
-        <p:nvSpPr>
-          <p:cNvPr id="6" name="矩形 5"/>
-          <p:cNvSpPr/>
-          <p:nvPr/>
-        </p:nvSpPr>
-        <p:spPr>
-          <a:xfrm>
-            <a:off x="3489325" y="876300"/>
-            <a:ext cx="1057910" cy="591185"/>
-          </a:xfrm>
-          <a:prstGeom prst="rect">
-            <a:avLst/>
-          </a:prstGeom>
-          <a:solidFill>
-            <a:schemeClr val="accent5">
-              <a:lumMod val="60000"/>
-              <a:lumOff val="40000"/>
-            </a:schemeClr>
-          </a:solidFill>
-          <a:ln>
-            <a:noFill/>
-          </a:ln>
-        </p:spPr>
-        <p:style>
-          <a:lnRef idx="2">
-            <a:schemeClr val="accent1">
-              <a:lumMod val="75000"/>
-            </a:schemeClr>
-          </a:lnRef>
-          <a:fillRef idx="1">
-            <a:schemeClr val="accent1"/>
-          </a:fillRef>
-          <a:effectRef idx="0">
-            <a:srgbClr val="FFFFFF"/>
-          </a:effectRef>
-          <a:fontRef idx="minor">
-            <a:schemeClr val="lt1"/>
-          </a:fontRef>
-        </p:style>
-        <p:txBody>
-          <a:bodyPr rtlCol="0" anchor="ctr"/>
-          <a:p>
-            <a:pPr algn="ctr"/>
-            <a:r>
-              <a:rPr lang="zh-CN" altLang="en-US"/>
-              <a:t>图片</a:t>
-            </a:r>
-            <a:endParaRPr lang="zh-CN" altLang="en-US"/>
-          </a:p>
-        </p:txBody>
-      </p:sp>
-      <p:sp>
-        <p:nvSpPr>
-          <p:cNvPr id="10" name="矩形 9"/>
-          <p:cNvSpPr/>
-          <p:nvPr/>
-        </p:nvSpPr>
-        <p:spPr>
-          <a:xfrm>
-            <a:off x="3489325" y="1743075"/>
-            <a:ext cx="1057910" cy="591185"/>
-          </a:xfrm>
-          <a:prstGeom prst="rect">
-            <a:avLst/>
-          </a:prstGeom>
-          <a:solidFill>
-            <a:schemeClr val="accent5">
-              <a:lumMod val="60000"/>
-              <a:lumOff val="40000"/>
-            </a:schemeClr>
-          </a:solidFill>
-          <a:ln>
-            <a:noFill/>
-          </a:ln>
-        </p:spPr>
-        <p:style>
-          <a:lnRef idx="2">
-            <a:schemeClr val="accent1">
-              <a:lumMod val="75000"/>
-            </a:schemeClr>
-          </a:lnRef>
-          <a:fillRef idx="1">
-            <a:schemeClr val="accent1"/>
-          </a:fillRef>
-          <a:effectRef idx="0">
-            <a:srgbClr val="FFFFFF"/>
-          </a:effectRef>
-          <a:fontRef idx="minor">
-            <a:schemeClr val="lt1"/>
-          </a:fontRef>
-        </p:style>
-        <p:txBody>
-          <a:bodyPr rtlCol="0" anchor="ctr"/>
-          <a:p>
-            <a:pPr algn="ctr"/>
-            <a:r>
-              <a:rPr lang="zh-CN" altLang="en-US"/>
-              <a:t>图片</a:t>
-            </a:r>
-            <a:endParaRPr lang="zh-CN" altLang="en-US"/>
-          </a:p>
-        </p:txBody>
-      </p:sp>
-      <p:sp>
-        <p:nvSpPr>
-          <p:cNvPr id="11" name="矩形 10"/>
-          <p:cNvSpPr/>
-          <p:nvPr/>
-        </p:nvSpPr>
-        <p:spPr>
-          <a:xfrm>
-            <a:off x="3488690" y="2609850"/>
-            <a:ext cx="1057910" cy="591185"/>
-          </a:xfrm>
-          <a:prstGeom prst="rect">
-            <a:avLst/>
-          </a:prstGeom>
-          <a:solidFill>
-            <a:schemeClr val="accent5">
-              <a:lumMod val="60000"/>
-              <a:lumOff val="40000"/>
-            </a:schemeClr>
-          </a:solidFill>
-          <a:ln>
-            <a:noFill/>
-          </a:ln>
-        </p:spPr>
-        <p:style>
-          <a:lnRef idx="2">
-            <a:schemeClr val="accent1">
-              <a:lumMod val="75000"/>
-            </a:schemeClr>
-          </a:lnRef>
-          <a:fillRef idx="1">
-            <a:schemeClr val="accent1"/>
-          </a:fillRef>
-          <a:effectRef idx="0">
-            <a:srgbClr val="FFFFFF"/>
-          </a:effectRef>
-          <a:fontRef idx="minor">
-            <a:schemeClr val="lt1"/>
-          </a:fontRef>
-        </p:style>
-        <p:txBody>
-          <a:bodyPr rtlCol="0" anchor="ctr"/>
-          <a:p>
-            <a:pPr algn="ctr"/>
-            <a:r>
-              <a:rPr lang="zh-CN" altLang="en-US"/>
-              <a:t>图片</a:t>
-            </a:r>
-            <a:endParaRPr lang="zh-CN" altLang="en-US"/>
-          </a:p>
-        </p:txBody>
-      </p:sp>
-      <p:sp>
-        <p:nvSpPr>
-          <p:cNvPr id="14" name="矩形 13"/>
-          <p:cNvSpPr/>
-          <p:nvPr/>
-        </p:nvSpPr>
-        <p:spPr>
-          <a:xfrm>
-            <a:off x="3489325" y="3476625"/>
-            <a:ext cx="1057910" cy="591185"/>
-          </a:xfrm>
-          <a:prstGeom prst="rect">
-            <a:avLst/>
-          </a:prstGeom>
-          <a:solidFill>
-            <a:schemeClr val="accent5">
-              <a:lumMod val="60000"/>
-              <a:lumOff val="40000"/>
-            </a:schemeClr>
-          </a:solidFill>
-          <a:ln>
-            <a:noFill/>
-          </a:ln>
-        </p:spPr>
-        <p:style>
-          <a:lnRef idx="2">
-            <a:schemeClr val="accent1">
-              <a:lumMod val="75000"/>
-            </a:schemeClr>
-          </a:lnRef>
-          <a:fillRef idx="1">
-            <a:schemeClr val="accent1"/>
-          </a:fillRef>
-          <a:effectRef idx="0">
-            <a:srgbClr val="FFFFFF"/>
-          </a:effectRef>
-          <a:fontRef idx="minor">
-            <a:schemeClr val="lt1"/>
-          </a:fontRef>
-        </p:style>
-        <p:txBody>
-          <a:bodyPr rtlCol="0" anchor="ctr"/>
-          <a:p>
-            <a:pPr algn="ctr"/>
-            <a:r>
-              <a:rPr lang="zh-CN" altLang="en-US"/>
-              <a:t>图片</a:t>
-            </a:r>
-            <a:endParaRPr lang="zh-CN" altLang="en-US"/>
-          </a:p>
-        </p:txBody>
-      </p:sp>
-      <p:cxnSp>
-        <p:nvCxnSpPr>
-          <p:cNvPr id="15" name="直接箭头连接符 14"/>
-          <p:cNvCxnSpPr>
-            <a:stCxn id="3" idx="3"/>
-          </p:cNvCxnSpPr>
-          <p:nvPr/>
-        </p:nvCxnSpPr>
-        <p:spPr>
-          <a:xfrm>
-            <a:off x="2399030" y="2202180"/>
-            <a:ext cx="1001395" cy="1455420"/>
-          </a:xfrm>
-          <a:prstGeom prst="straightConnector1">
-            <a:avLst/>
-          </a:prstGeom>
-          <a:ln>
-            <a:solidFill>
-              <a:srgbClr val="FF0000"/>
-            </a:solidFill>
-            <a:tailEnd type="arrow"/>
-          </a:ln>
-        </p:spPr>
-        <p:style>
-          <a:lnRef idx="2">
-            <a:schemeClr val="accent1"/>
-          </a:lnRef>
-          <a:fillRef idx="0">
-            <a:srgbClr val="FFFFFF"/>
-          </a:fillRef>
-          <a:effectRef idx="0">
-            <a:srgbClr val="FFFFFF"/>
-          </a:effectRef>
-          <a:fontRef idx="minor">
-            <a:schemeClr val="tx1"/>
-          </a:fontRef>
-        </p:style>
-      </p:cxnSp>
-      <p:sp>
-        <p:nvSpPr>
-          <p:cNvPr id="16" name="文本框 15"/>
-          <p:cNvSpPr txBox="1"/>
-          <p:nvPr/>
-        </p:nvSpPr>
-        <p:spPr>
-          <a:xfrm>
-            <a:off x="1121410" y="2661285"/>
-            <a:ext cx="1589405" cy="654050"/>
-          </a:xfrm>
-          <a:prstGeom prst="rect">
-            <a:avLst/>
-          </a:prstGeom>
-          <a:noFill/>
-        </p:spPr>
-        <p:txBody>
-          <a:bodyPr wrap="square" rtlCol="0">
-            <a:noAutofit/>
-          </a:bodyPr>
-          <a:p>
-            <a:r>
-              <a:rPr lang="zh-CN" altLang="en-US" sz="1400"/>
-              <a:t>放入图片，并通知检测</a:t>
-            </a:r>
-            <a:r>
-              <a:rPr lang="zh-CN" altLang="en-US" sz="1400"/>
-              <a:t>线程</a:t>
-            </a:r>
-            <a:endParaRPr lang="zh-CN" altLang="en-US" sz="1400"/>
-          </a:p>
-        </p:txBody>
-      </p:sp>
-      <p:sp>
-        <p:nvSpPr>
-          <p:cNvPr id="17" name="文本框 16"/>
-          <p:cNvSpPr txBox="1"/>
-          <p:nvPr/>
-        </p:nvSpPr>
-        <p:spPr>
-          <a:xfrm>
-            <a:off x="4951730" y="1137285"/>
-            <a:ext cx="1008380" cy="330200"/>
-          </a:xfrm>
-          <a:prstGeom prst="rect">
-            <a:avLst/>
-          </a:prstGeom>
-          <a:noFill/>
-        </p:spPr>
-        <p:txBody>
-          <a:bodyPr wrap="square" rtlCol="0">
-            <a:noAutofit/>
-          </a:bodyPr>
-          <a:p>
-            <a:r>
-              <a:rPr lang="zh-CN" altLang="en-US" sz="1400"/>
-              <a:t>拿走图片</a:t>
-            </a:r>
-            <a:endParaRPr lang="zh-CN" altLang="en-US" sz="1400"/>
-          </a:p>
-        </p:txBody>
-      </p:sp>
-      <p:cxnSp>
-        <p:nvCxnSpPr>
-          <p:cNvPr id="18" name="直接箭头连接符 17"/>
-          <p:cNvCxnSpPr>
-            <a:endCxn id="12" idx="1"/>
-          </p:cNvCxnSpPr>
-          <p:nvPr/>
-        </p:nvCxnSpPr>
-        <p:spPr>
-          <a:xfrm>
-            <a:off x="4546600" y="1021080"/>
-            <a:ext cx="1090295" cy="1181100"/>
-          </a:xfrm>
-          <a:prstGeom prst="straightConnector1">
-            <a:avLst/>
-          </a:prstGeom>
-          <a:ln>
-            <a:solidFill>
-              <a:srgbClr val="FF0000"/>
-            </a:solidFill>
-            <a:tailEnd type="arrow"/>
-          </a:ln>
-        </p:spPr>
-        <p:style>
-          <a:lnRef idx="2">
-            <a:schemeClr val="accent1"/>
-          </a:lnRef>
-          <a:fillRef idx="0">
-            <a:srgbClr val="FFFFFF"/>
-          </a:fillRef>
-          <a:effectRef idx="0">
-            <a:srgbClr val="FFFFFF"/>
-          </a:effectRef>
-          <a:fontRef idx="minor">
-            <a:schemeClr val="tx1"/>
-          </a:fontRef>
-        </p:style>
-      </p:cxnSp>
-      <p:sp>
-        <p:nvSpPr>
-          <p:cNvPr id="20" name="椭圆形标注 19"/>
-          <p:cNvSpPr/>
-          <p:nvPr/>
-        </p:nvSpPr>
-        <p:spPr>
-          <a:xfrm>
-            <a:off x="1896110" y="1021080"/>
-            <a:ext cx="1188720" cy="579120"/>
-          </a:xfrm>
-          <a:prstGeom prst="wedgeEllipseCallout">
-            <a:avLst>
-              <a:gd name="adj1" fmla="val -43910"/>
-              <a:gd name="adj2" fmla="val 66447"/>
-            </a:avLst>
-          </a:prstGeom>
-        </p:spPr>
-        <p:style>
-          <a:lnRef idx="2">
-            <a:schemeClr val="accent1"/>
-          </a:lnRef>
-          <a:fillRef idx="0">
-            <a:srgbClr val="FFFFFF"/>
-          </a:fillRef>
-          <a:effectRef idx="0">
-            <a:srgbClr val="FFFFFF"/>
-          </a:effectRef>
-          <a:fontRef idx="minor">
-            <a:schemeClr val="tx1"/>
-          </a:fontRef>
-        </p:style>
-        <p:txBody>
-          <a:bodyPr rtlCol="0" anchor="ctr"/>
-          <a:p>
-            <a:pPr algn="ctr"/>
-            <a:endParaRPr lang="zh-CN" altLang="en-US"/>
-          </a:p>
-        </p:txBody>
-      </p:sp>
-      <p:sp>
-        <p:nvSpPr>
-          <p:cNvPr id="22" name="文本框 21"/>
-          <p:cNvSpPr txBox="1"/>
-          <p:nvPr/>
-        </p:nvSpPr>
-        <p:spPr>
-          <a:xfrm>
-            <a:off x="2125345" y="1137285"/>
-            <a:ext cx="959485" cy="275590"/>
-          </a:xfrm>
-          <a:prstGeom prst="rect">
-            <a:avLst/>
-          </a:prstGeom>
-          <a:noFill/>
-        </p:spPr>
-        <p:txBody>
-          <a:bodyPr wrap="square" rtlCol="0">
-            <a:spAutoFit/>
-          </a:bodyPr>
-          <a:p>
-            <a:r>
-              <a:rPr lang="zh-CN" altLang="en-US" sz="1200"/>
-              <a:t>该干活啦</a:t>
-            </a:r>
-            <a:endParaRPr lang="zh-CN" altLang="en-US" sz="1200"/>
-          </a:p>
-        </p:txBody>
-      </p:sp>
-    </p:spTree>
-  </p:cSld>
-  <p:clrMapOvr>
-    <a:masterClrMapping/>
-  </p:clrMapOvr>
-</p:sld>
-</file>
-
-<file path=ppt/slides/slide9.xml><?xml version="1.0" encoding="utf-8"?>
-<p:sld xmlns:a="http://schemas.openxmlformats.org/drawingml/2006/main" xmlns:r="http://schemas.openxmlformats.org/officeDocument/2006/relationships" xmlns:p="http://schemas.openxmlformats.org/presentationml/2006/main">
-  <p:cSld>
-    <p:spTree>
-      <p:nvGrpSpPr>
-        <p:cNvPr id="1" name=""/>
-        <p:cNvGrpSpPr/>
-        <p:nvPr/>
-      </p:nvGrpSpPr>
-      <p:grpSpPr/>
-      <p:pic>
-        <p:nvPicPr>
-          <p:cNvPr id="3" name="图片 2" descr="画家"/>
-          <p:cNvPicPr>
-            <a:picLocks noChangeAspect="1"/>
-          </p:cNvPicPr>
-          <p:nvPr/>
-        </p:nvPicPr>
-        <p:blipFill>
-          <a:blip r:embed="rId1">
-            <a:extLst>
-              <a:ext uri="{96DAC541-7B7A-43D3-8B79-37D633B846F1}">
-                <asvg:svgBlip xmlns:asvg="http://schemas.microsoft.com/office/drawing/2016/SVG/main" r:embed="rId2"/>
-              </a:ext>
-            </a:extLst>
-          </a:blip>
-          <a:stretch>
-            <a:fillRect/>
-          </a:stretch>
-        </p:blipFill>
-        <p:spPr>
-          <a:xfrm>
-            <a:off x="1480820" y="1743075"/>
-            <a:ext cx="918000" cy="918000"/>
-          </a:xfrm>
-          <a:prstGeom prst="rect">
-            <a:avLst/>
-          </a:prstGeom>
-        </p:spPr>
-      </p:pic>
-      <p:pic>
-        <p:nvPicPr>
-          <p:cNvPr id="12" name="图片 11" descr="厨师"/>
-          <p:cNvPicPr>
-            <a:picLocks noChangeAspect="1"/>
-          </p:cNvPicPr>
-          <p:nvPr/>
-        </p:nvPicPr>
-        <p:blipFill>
-          <a:blip r:embed="rId3">
-            <a:extLst>
-              <a:ext uri="{96DAC541-7B7A-43D3-8B79-37D633B846F1}">
-                <asvg:svgBlip xmlns:asvg="http://schemas.microsoft.com/office/drawing/2016/SVG/main" r:embed="rId4"/>
-              </a:ext>
-            </a:extLst>
-          </a:blip>
-          <a:stretch>
-            <a:fillRect/>
-          </a:stretch>
-        </p:blipFill>
-        <p:spPr>
-          <a:xfrm>
-            <a:off x="5636895" y="1743075"/>
-            <a:ext cx="918210" cy="918210"/>
-          </a:xfrm>
-          <a:prstGeom prst="rect">
-            <a:avLst/>
-          </a:prstGeom>
-        </p:spPr>
-      </p:pic>
-      <p:sp>
-        <p:nvSpPr>
-          <p:cNvPr id="5" name="圆角矩形 4"/>
-          <p:cNvSpPr/>
-          <p:nvPr/>
-        </p:nvSpPr>
-        <p:spPr>
-          <a:xfrm>
-            <a:off x="3189605" y="723900"/>
-            <a:ext cx="1657350" cy="3733800"/>
-          </a:xfrm>
-          <a:prstGeom prst="roundRect">
-            <a:avLst/>
-          </a:prstGeom>
-        </p:spPr>
-        <p:style>
-          <a:lnRef idx="2">
-            <a:schemeClr val="accent1">
-              <a:lumMod val="75000"/>
-            </a:schemeClr>
-          </a:lnRef>
-          <a:fillRef idx="1">
-            <a:schemeClr val="accent1"/>
-          </a:fillRef>
-          <a:effectRef idx="0">
-            <a:srgbClr val="FFFFFF"/>
-          </a:effectRef>
-          <a:fontRef idx="minor">
-            <a:schemeClr val="lt1"/>
-          </a:fontRef>
-        </p:style>
-        <p:txBody>
-          <a:bodyPr rtlCol="0" anchor="ctr"/>
-          <a:p>
-            <a:pPr algn="ctr"/>
-            <a:endParaRPr lang="zh-CN" altLang="en-US"/>
-          </a:p>
-        </p:txBody>
-      </p:sp>
-      <p:sp>
-        <p:nvSpPr>
-          <p:cNvPr id="6" name="矩形 5"/>
-          <p:cNvSpPr/>
-          <p:nvPr/>
-        </p:nvSpPr>
-        <p:spPr>
-          <a:xfrm>
-            <a:off x="3489325" y="876300"/>
-            <a:ext cx="1057910" cy="591185"/>
-          </a:xfrm>
-          <a:prstGeom prst="rect">
-            <a:avLst/>
-          </a:prstGeom>
-          <a:solidFill>
-            <a:schemeClr val="accent5">
-              <a:lumMod val="60000"/>
-              <a:lumOff val="40000"/>
-            </a:schemeClr>
-          </a:solidFill>
-          <a:ln>
-            <a:noFill/>
-          </a:ln>
-        </p:spPr>
-        <p:style>
-          <a:lnRef idx="2">
-            <a:schemeClr val="accent1">
-              <a:lumMod val="75000"/>
-            </a:schemeClr>
-          </a:lnRef>
-          <a:fillRef idx="1">
-            <a:schemeClr val="accent1"/>
-          </a:fillRef>
-          <a:effectRef idx="0">
-            <a:srgbClr val="FFFFFF"/>
-          </a:effectRef>
-          <a:fontRef idx="minor">
-            <a:schemeClr val="lt1"/>
-          </a:fontRef>
-        </p:style>
-        <p:txBody>
-          <a:bodyPr rtlCol="0" anchor="ctr"/>
-          <a:p>
-            <a:pPr algn="ctr"/>
-            <a:r>
-              <a:rPr lang="zh-CN" altLang="en-US"/>
-              <a:t>图片</a:t>
-            </a:r>
-            <a:endParaRPr lang="zh-CN" altLang="en-US"/>
-          </a:p>
-        </p:txBody>
-      </p:sp>
-      <p:sp>
-        <p:nvSpPr>
-          <p:cNvPr id="10" name="矩形 9"/>
-          <p:cNvSpPr/>
-          <p:nvPr/>
-        </p:nvSpPr>
-        <p:spPr>
-          <a:xfrm>
-            <a:off x="3489325" y="1743075"/>
-            <a:ext cx="1057910" cy="591185"/>
-          </a:xfrm>
-          <a:prstGeom prst="rect">
-            <a:avLst/>
-          </a:prstGeom>
-          <a:solidFill>
-            <a:schemeClr val="accent5">
-              <a:lumMod val="60000"/>
-              <a:lumOff val="40000"/>
-            </a:schemeClr>
-          </a:solidFill>
-          <a:ln>
-            <a:noFill/>
-          </a:ln>
-        </p:spPr>
-        <p:style>
-          <a:lnRef idx="2">
-            <a:schemeClr val="accent1">
-              <a:lumMod val="75000"/>
-            </a:schemeClr>
-          </a:lnRef>
-          <a:fillRef idx="1">
-            <a:schemeClr val="accent1"/>
-          </a:fillRef>
-          <a:effectRef idx="0">
-            <a:srgbClr val="FFFFFF"/>
-          </a:effectRef>
-          <a:fontRef idx="minor">
-            <a:schemeClr val="lt1"/>
-          </a:fontRef>
-        </p:style>
-        <p:txBody>
-          <a:bodyPr rtlCol="0" anchor="ctr"/>
-          <a:p>
-            <a:pPr algn="ctr"/>
-            <a:r>
-              <a:rPr lang="zh-CN" altLang="en-US"/>
-              <a:t>图片</a:t>
-            </a:r>
-            <a:endParaRPr lang="zh-CN" altLang="en-US"/>
-          </a:p>
-        </p:txBody>
-      </p:sp>
-      <p:sp>
-        <p:nvSpPr>
-          <p:cNvPr id="11" name="矩形 10"/>
-          <p:cNvSpPr/>
-          <p:nvPr/>
-        </p:nvSpPr>
-        <p:spPr>
-          <a:xfrm>
-            <a:off x="3488690" y="2609850"/>
-            <a:ext cx="1057910" cy="591185"/>
-          </a:xfrm>
-          <a:prstGeom prst="rect">
-            <a:avLst/>
-          </a:prstGeom>
-          <a:solidFill>
-            <a:schemeClr val="accent5">
-              <a:lumMod val="60000"/>
-              <a:lumOff val="40000"/>
-            </a:schemeClr>
-          </a:solidFill>
-          <a:ln>
-            <a:noFill/>
-          </a:ln>
-        </p:spPr>
-        <p:style>
-          <a:lnRef idx="2">
-            <a:schemeClr val="accent1">
-              <a:lumMod val="75000"/>
-            </a:schemeClr>
-          </a:lnRef>
-          <a:fillRef idx="1">
-            <a:schemeClr val="accent1"/>
-          </a:fillRef>
-          <a:effectRef idx="0">
-            <a:srgbClr val="FFFFFF"/>
-          </a:effectRef>
-          <a:fontRef idx="minor">
-            <a:schemeClr val="lt1"/>
-          </a:fontRef>
-        </p:style>
-        <p:txBody>
-          <a:bodyPr rtlCol="0" anchor="ctr"/>
-          <a:p>
-            <a:pPr algn="ctr"/>
-            <a:r>
-              <a:rPr lang="zh-CN" altLang="en-US"/>
-              <a:t>图片</a:t>
-            </a:r>
-            <a:endParaRPr lang="zh-CN" altLang="en-US"/>
-          </a:p>
-        </p:txBody>
-      </p:sp>
-      <p:sp>
-        <p:nvSpPr>
-          <p:cNvPr id="14" name="矩形 13"/>
-          <p:cNvSpPr/>
-          <p:nvPr/>
-        </p:nvSpPr>
-        <p:spPr>
-          <a:xfrm>
-            <a:off x="3489325" y="3476625"/>
-            <a:ext cx="1057910" cy="591185"/>
-          </a:xfrm>
-          <a:prstGeom prst="rect">
-            <a:avLst/>
-          </a:prstGeom>
-          <a:solidFill>
-            <a:schemeClr val="accent5">
-              <a:lumMod val="60000"/>
-              <a:lumOff val="40000"/>
-            </a:schemeClr>
-          </a:solidFill>
-          <a:ln>
-            <a:noFill/>
-          </a:ln>
-        </p:spPr>
-        <p:style>
-          <a:lnRef idx="2">
-            <a:schemeClr val="accent1">
-              <a:lumMod val="75000"/>
-            </a:schemeClr>
-          </a:lnRef>
-          <a:fillRef idx="1">
-            <a:schemeClr val="accent1"/>
-          </a:fillRef>
-          <a:effectRef idx="0">
-            <a:srgbClr val="FFFFFF"/>
-          </a:effectRef>
-          <a:fontRef idx="minor">
-            <a:schemeClr val="lt1"/>
-          </a:fontRef>
-        </p:style>
-        <p:txBody>
-          <a:bodyPr rtlCol="0" anchor="ctr"/>
-          <a:p>
-            <a:pPr algn="ctr"/>
-            <a:r>
-              <a:rPr lang="zh-CN" altLang="en-US"/>
-              <a:t>图片</a:t>
-            </a:r>
-            <a:endParaRPr lang="zh-CN" altLang="en-US"/>
-          </a:p>
-        </p:txBody>
-      </p:sp>
-      <p:cxnSp>
-        <p:nvCxnSpPr>
-          <p:cNvPr id="15" name="直接箭头连接符 14"/>
-          <p:cNvCxnSpPr>
-            <a:stCxn id="3" idx="3"/>
-          </p:cNvCxnSpPr>
-          <p:nvPr/>
-        </p:nvCxnSpPr>
-        <p:spPr>
-          <a:xfrm>
-            <a:off x="2399030" y="2202180"/>
-            <a:ext cx="1001395" cy="1455420"/>
-          </a:xfrm>
-          <a:prstGeom prst="straightConnector1">
-            <a:avLst/>
-          </a:prstGeom>
-          <a:ln>
-            <a:solidFill>
-              <a:srgbClr val="FF0000"/>
-            </a:solidFill>
-            <a:tailEnd type="arrow"/>
-          </a:ln>
-        </p:spPr>
-        <p:style>
-          <a:lnRef idx="2">
-            <a:schemeClr val="accent1"/>
-          </a:lnRef>
-          <a:fillRef idx="0">
-            <a:srgbClr val="FFFFFF"/>
-          </a:fillRef>
-          <a:effectRef idx="0">
-            <a:srgbClr val="FFFFFF"/>
-          </a:effectRef>
-          <a:fontRef idx="minor">
-            <a:schemeClr val="tx1"/>
-          </a:fontRef>
-        </p:style>
-      </p:cxnSp>
-      <p:sp>
-        <p:nvSpPr>
-          <p:cNvPr id="16" name="文本框 15"/>
-          <p:cNvSpPr txBox="1"/>
-          <p:nvPr/>
-        </p:nvSpPr>
-        <p:spPr>
-          <a:xfrm>
-            <a:off x="1121410" y="2661285"/>
-            <a:ext cx="1589405" cy="654050"/>
-          </a:xfrm>
-          <a:prstGeom prst="rect">
-            <a:avLst/>
-          </a:prstGeom>
-          <a:noFill/>
-        </p:spPr>
-        <p:txBody>
-          <a:bodyPr wrap="square" rtlCol="0">
-            <a:noAutofit/>
-          </a:bodyPr>
-          <a:p>
-            <a:r>
-              <a:rPr lang="zh-CN" altLang="en-US" sz="1400"/>
-              <a:t>放入图片，并通知检测</a:t>
-            </a:r>
-            <a:r>
-              <a:rPr lang="zh-CN" altLang="en-US" sz="1400"/>
-              <a:t>线程</a:t>
-            </a:r>
-            <a:endParaRPr lang="zh-CN" altLang="en-US" sz="1400"/>
-          </a:p>
-        </p:txBody>
-      </p:sp>
-      <p:sp>
-        <p:nvSpPr>
-          <p:cNvPr id="17" name="文本框 16"/>
-          <p:cNvSpPr txBox="1"/>
-          <p:nvPr/>
-        </p:nvSpPr>
-        <p:spPr>
-          <a:xfrm>
-            <a:off x="4951730" y="1137285"/>
-            <a:ext cx="1008380" cy="330200"/>
-          </a:xfrm>
-          <a:prstGeom prst="rect">
-            <a:avLst/>
-          </a:prstGeom>
-          <a:noFill/>
-        </p:spPr>
-        <p:txBody>
-          <a:bodyPr wrap="square" rtlCol="0">
-            <a:noAutofit/>
-          </a:bodyPr>
-          <a:p>
-            <a:r>
-              <a:rPr lang="zh-CN" altLang="en-US" sz="1400"/>
-              <a:t>拿走图片</a:t>
-            </a:r>
-            <a:endParaRPr lang="zh-CN" altLang="en-US" sz="1400"/>
-          </a:p>
-        </p:txBody>
-      </p:sp>
-      <p:cxnSp>
-        <p:nvCxnSpPr>
-          <p:cNvPr id="18" name="直接箭头连接符 17"/>
-          <p:cNvCxnSpPr>
-            <a:endCxn id="12" idx="1"/>
-          </p:cNvCxnSpPr>
-          <p:nvPr/>
-        </p:nvCxnSpPr>
-        <p:spPr>
-          <a:xfrm>
-            <a:off x="4546600" y="1021080"/>
-            <a:ext cx="1090295" cy="1181100"/>
-          </a:xfrm>
-          <a:prstGeom prst="straightConnector1">
-            <a:avLst/>
-          </a:prstGeom>
-          <a:ln>
-            <a:solidFill>
-              <a:srgbClr val="FF0000"/>
-            </a:solidFill>
-            <a:tailEnd type="arrow"/>
-          </a:ln>
-        </p:spPr>
-        <p:style>
-          <a:lnRef idx="2">
-            <a:schemeClr val="accent1"/>
-          </a:lnRef>
-          <a:fillRef idx="0">
-            <a:srgbClr val="FFFFFF"/>
-          </a:fillRef>
-          <a:effectRef idx="0">
-            <a:srgbClr val="FFFFFF"/>
-          </a:effectRef>
-          <a:fontRef idx="minor">
-            <a:schemeClr val="tx1"/>
-          </a:fontRef>
-        </p:style>
-      </p:cxnSp>
-      <p:sp>
-        <p:nvSpPr>
-          <p:cNvPr id="20" name="椭圆形标注 19"/>
-          <p:cNvSpPr/>
-          <p:nvPr/>
-        </p:nvSpPr>
-        <p:spPr>
-          <a:xfrm>
-            <a:off x="1896110" y="1021080"/>
-            <a:ext cx="1188720" cy="579120"/>
-          </a:xfrm>
-          <a:prstGeom prst="wedgeEllipseCallout">
-            <a:avLst>
-              <a:gd name="adj1" fmla="val -43910"/>
-              <a:gd name="adj2" fmla="val 66447"/>
-            </a:avLst>
-          </a:prstGeom>
-        </p:spPr>
-        <p:style>
-          <a:lnRef idx="2">
-            <a:schemeClr val="accent1"/>
-          </a:lnRef>
-          <a:fillRef idx="0">
-            <a:srgbClr val="FFFFFF"/>
-          </a:fillRef>
-          <a:effectRef idx="0">
-            <a:srgbClr val="FFFFFF"/>
-          </a:effectRef>
-          <a:fontRef idx="minor">
-            <a:schemeClr val="tx1"/>
-          </a:fontRef>
-        </p:style>
-        <p:txBody>
-          <a:bodyPr rtlCol="0" anchor="ctr"/>
-          <a:p>
-            <a:pPr algn="ctr"/>
-            <a:endParaRPr lang="zh-CN" altLang="en-US"/>
-          </a:p>
-        </p:txBody>
-      </p:sp>
-      <p:sp>
-        <p:nvSpPr>
-          <p:cNvPr id="22" name="文本框 21"/>
-          <p:cNvSpPr txBox="1"/>
-          <p:nvPr/>
-        </p:nvSpPr>
-        <p:spPr>
-          <a:xfrm>
-            <a:off x="2125345" y="1137285"/>
-            <a:ext cx="959485" cy="275590"/>
-          </a:xfrm>
-          <a:prstGeom prst="rect">
-            <a:avLst/>
-          </a:prstGeom>
-          <a:noFill/>
-        </p:spPr>
-        <p:txBody>
-          <a:bodyPr wrap="square" rtlCol="0">
-            <a:spAutoFit/>
-          </a:bodyPr>
-          <a:p>
-            <a:r>
-              <a:rPr lang="zh-CN" altLang="en-US" sz="1200"/>
-              <a:t>该干活啦</a:t>
-            </a:r>
-            <a:endParaRPr lang="zh-CN" altLang="en-US" sz="1200"/>
-          </a:p>
-        </p:txBody>
-      </p:sp>
     </p:spTree>
   </p:cSld>
   <p:clrMapOvr>
